--- a/PPT/template/주차별 발표.pptx
+++ b/PPT/template/주차별 발표.pptx
@@ -4,10 +4,14 @@
   <p:sldMasterIdLst>
     <p:sldMasterId id="2147483648" r:id="rId1"/>
   </p:sldMasterIdLst>
+  <p:notesMasterIdLst>
+    <p:notesMasterId r:id="rId6"/>
+  </p:notesMasterIdLst>
   <p:sldIdLst>
     <p:sldId id="256" r:id="rId2"/>
     <p:sldId id="257" r:id="rId3"/>
     <p:sldId id="258" r:id="rId4"/>
+    <p:sldId id="259" r:id="rId5"/>
   </p:sldIdLst>
   <p:sldSz cx="12192000" cy="6858000"/>
   <p:notesSz cx="6858000" cy="9144000"/>
@@ -114,6 +118,532 @@
 </p:presentation>
 </file>
 
+<file path=ppt/notesMasters/notesMaster1.xml><?xml version="1.0" encoding="utf-8"?>
+<p:notesMaster xmlns:a="http://schemas.openxmlformats.org/drawingml/2006/main" xmlns:r="http://schemas.openxmlformats.org/officeDocument/2006/relationships" xmlns:p="http://schemas.openxmlformats.org/presentationml/2006/main">
+  <p:cSld>
+    <p:bg>
+      <p:bgRef idx="1001">
+        <a:schemeClr val="bg1"/>
+      </p:bgRef>
+    </p:bg>
+    <p:spTree>
+      <p:nvGrpSpPr>
+        <p:cNvPr id="1" name=""/>
+        <p:cNvGrpSpPr/>
+        <p:nvPr/>
+      </p:nvGrpSpPr>
+      <p:grpSpPr>
+        <a:xfrm>
+          <a:off x="0" y="0"/>
+          <a:ext cx="0" cy="0"/>
+          <a:chOff x="0" y="0"/>
+          <a:chExt cx="0" cy="0"/>
+        </a:xfrm>
+      </p:grpSpPr>
+      <p:sp>
+        <p:nvSpPr>
+          <p:cNvPr id="2" name="머리글 개체 틀 1"/>
+          <p:cNvSpPr>
+            <a:spLocks noGrp="1"/>
+          </p:cNvSpPr>
+          <p:nvPr>
+            <p:ph type="hdr" sz="quarter"/>
+          </p:nvPr>
+        </p:nvSpPr>
+        <p:spPr>
+          <a:xfrm>
+            <a:off x="0" y="0"/>
+            <a:ext cx="2971800" cy="458788"/>
+          </a:xfrm>
+          <a:prstGeom prst="rect">
+            <a:avLst/>
+          </a:prstGeom>
+        </p:spPr>
+        <p:txBody>
+          <a:bodyPr vert="horz" lIns="91440" tIns="45720" rIns="91440" bIns="45720" rtlCol="0"/>
+          <a:lstStyle>
+            <a:lvl1pPr algn="l">
+              <a:defRPr sz="1200"/>
+            </a:lvl1pPr>
+          </a:lstStyle>
+          <a:p>
+            <a:endParaRPr lang="ko-KR" altLang="en-US"/>
+          </a:p>
+        </p:txBody>
+      </p:sp>
+      <p:sp>
+        <p:nvSpPr>
+          <p:cNvPr id="3" name="날짜 개체 틀 2"/>
+          <p:cNvSpPr>
+            <a:spLocks noGrp="1"/>
+          </p:cNvSpPr>
+          <p:nvPr>
+            <p:ph type="dt" idx="1"/>
+          </p:nvPr>
+        </p:nvSpPr>
+        <p:spPr>
+          <a:xfrm>
+            <a:off x="3884613" y="0"/>
+            <a:ext cx="2971800" cy="458788"/>
+          </a:xfrm>
+          <a:prstGeom prst="rect">
+            <a:avLst/>
+          </a:prstGeom>
+        </p:spPr>
+        <p:txBody>
+          <a:bodyPr vert="horz" lIns="91440" tIns="45720" rIns="91440" bIns="45720" rtlCol="0"/>
+          <a:lstStyle>
+            <a:lvl1pPr algn="r">
+              <a:defRPr sz="1200"/>
+            </a:lvl1pPr>
+          </a:lstStyle>
+          <a:p>
+            <a:fld id="{6D0F6F63-7345-452E-A3AE-DB0EC2E8B20E}" type="datetimeFigureOut">
+              <a:rPr lang="ko-KR" altLang="en-US" smtClean="0"/>
+              <a:t>2026-07-09</a:t>
+            </a:fld>
+            <a:endParaRPr lang="ko-KR" altLang="en-US"/>
+          </a:p>
+        </p:txBody>
+      </p:sp>
+      <p:sp>
+        <p:nvSpPr>
+          <p:cNvPr id="4" name="슬라이드 이미지 개체 틀 3"/>
+          <p:cNvSpPr>
+            <a:spLocks noGrp="1" noRot="1" noChangeAspect="1"/>
+          </p:cNvSpPr>
+          <p:nvPr>
+            <p:ph type="sldImg" idx="2"/>
+          </p:nvPr>
+        </p:nvSpPr>
+        <p:spPr>
+          <a:xfrm>
+            <a:off x="685800" y="1143000"/>
+            <a:ext cx="5486400" cy="3086100"/>
+          </a:xfrm>
+          <a:prstGeom prst="rect">
+            <a:avLst/>
+          </a:prstGeom>
+          <a:noFill/>
+          <a:ln w="12700">
+            <a:solidFill>
+              <a:prstClr val="black"/>
+            </a:solidFill>
+          </a:ln>
+        </p:spPr>
+        <p:txBody>
+          <a:bodyPr vert="horz" lIns="91440" tIns="45720" rIns="91440" bIns="45720" rtlCol="0" anchor="ctr"/>
+          <a:lstStyle/>
+          <a:p>
+            <a:endParaRPr lang="ko-KR" altLang="en-US"/>
+          </a:p>
+        </p:txBody>
+      </p:sp>
+      <p:sp>
+        <p:nvSpPr>
+          <p:cNvPr id="5" name="슬라이드 노트 개체 틀 4"/>
+          <p:cNvSpPr>
+            <a:spLocks noGrp="1"/>
+          </p:cNvSpPr>
+          <p:nvPr>
+            <p:ph type="body" sz="quarter" idx="3"/>
+          </p:nvPr>
+        </p:nvSpPr>
+        <p:spPr>
+          <a:xfrm>
+            <a:off x="685800" y="4400550"/>
+            <a:ext cx="5486400" cy="3600450"/>
+          </a:xfrm>
+          <a:prstGeom prst="rect">
+            <a:avLst/>
+          </a:prstGeom>
+        </p:spPr>
+        <p:txBody>
+          <a:bodyPr vert="horz" lIns="91440" tIns="45720" rIns="91440" bIns="45720" rtlCol="0"/>
+          <a:lstStyle/>
+          <a:p>
+            <a:pPr lvl="0"/>
+            <a:r>
+              <a:rPr lang="ko-KR" altLang="en-US"/>
+              <a:t>마스터 텍스트 스타일을 편집하려면 클릭</a:t>
+            </a:r>
+          </a:p>
+          <a:p>
+            <a:pPr lvl="1"/>
+            <a:r>
+              <a:rPr lang="ko-KR" altLang="en-US"/>
+              <a:t>두 번째 수준</a:t>
+            </a:r>
+          </a:p>
+          <a:p>
+            <a:pPr lvl="2"/>
+            <a:r>
+              <a:rPr lang="ko-KR" altLang="en-US"/>
+              <a:t>세 번째 수준</a:t>
+            </a:r>
+          </a:p>
+          <a:p>
+            <a:pPr lvl="3"/>
+            <a:r>
+              <a:rPr lang="ko-KR" altLang="en-US"/>
+              <a:t>네 번째 수준</a:t>
+            </a:r>
+          </a:p>
+          <a:p>
+            <a:pPr lvl="4"/>
+            <a:r>
+              <a:rPr lang="ko-KR" altLang="en-US"/>
+              <a:t>다섯 번째 수준</a:t>
+            </a:r>
+          </a:p>
+        </p:txBody>
+      </p:sp>
+      <p:sp>
+        <p:nvSpPr>
+          <p:cNvPr id="6" name="바닥글 개체 틀 5"/>
+          <p:cNvSpPr>
+            <a:spLocks noGrp="1"/>
+          </p:cNvSpPr>
+          <p:nvPr>
+            <p:ph type="ftr" sz="quarter" idx="4"/>
+          </p:nvPr>
+        </p:nvSpPr>
+        <p:spPr>
+          <a:xfrm>
+            <a:off x="0" y="8685213"/>
+            <a:ext cx="2971800" cy="458787"/>
+          </a:xfrm>
+          <a:prstGeom prst="rect">
+            <a:avLst/>
+          </a:prstGeom>
+        </p:spPr>
+        <p:txBody>
+          <a:bodyPr vert="horz" lIns="91440" tIns="45720" rIns="91440" bIns="45720" rtlCol="0" anchor="b"/>
+          <a:lstStyle>
+            <a:lvl1pPr algn="l">
+              <a:defRPr sz="1200"/>
+            </a:lvl1pPr>
+          </a:lstStyle>
+          <a:p>
+            <a:endParaRPr lang="ko-KR" altLang="en-US"/>
+          </a:p>
+        </p:txBody>
+      </p:sp>
+      <p:sp>
+        <p:nvSpPr>
+          <p:cNvPr id="7" name="슬라이드 번호 개체 틀 6"/>
+          <p:cNvSpPr>
+            <a:spLocks noGrp="1"/>
+          </p:cNvSpPr>
+          <p:nvPr>
+            <p:ph type="sldNum" sz="quarter" idx="5"/>
+          </p:nvPr>
+        </p:nvSpPr>
+        <p:spPr>
+          <a:xfrm>
+            <a:off x="3884613" y="8685213"/>
+            <a:ext cx="2971800" cy="458787"/>
+          </a:xfrm>
+          <a:prstGeom prst="rect">
+            <a:avLst/>
+          </a:prstGeom>
+        </p:spPr>
+        <p:txBody>
+          <a:bodyPr vert="horz" lIns="91440" tIns="45720" rIns="91440" bIns="45720" rtlCol="0" anchor="b"/>
+          <a:lstStyle>
+            <a:lvl1pPr algn="r">
+              <a:defRPr sz="1200"/>
+            </a:lvl1pPr>
+          </a:lstStyle>
+          <a:p>
+            <a:fld id="{5CBA7081-BBC1-4593-971E-3964C5C5F8A4}" type="slidenum">
+              <a:rPr lang="ko-KR" altLang="en-US" smtClean="0"/>
+              <a:t>‹#›</a:t>
+            </a:fld>
+            <a:endParaRPr lang="ko-KR" altLang="en-US"/>
+          </a:p>
+        </p:txBody>
+      </p:sp>
+    </p:spTree>
+    <p:extLst>
+      <p:ext uri="{BB962C8B-B14F-4D97-AF65-F5344CB8AC3E}">
+        <p14:creationId xmlns:p14="http://schemas.microsoft.com/office/powerpoint/2010/main" val="1969555147"/>
+      </p:ext>
+    </p:extLst>
+  </p:cSld>
+  <p:clrMap bg1="lt1" tx1="dk1" bg2="lt2" tx2="dk2" accent1="accent1" accent2="accent2" accent3="accent3" accent4="accent4" accent5="accent5" accent6="accent6" hlink="hlink" folHlink="folHlink"/>
+  <p:notesStyle>
+    <a:lvl1pPr marL="0" algn="l" defTabSz="914400" rtl="0" eaLnBrk="1" latinLnBrk="1" hangingPunct="1">
+      <a:defRPr sz="1200" kern="1200">
+        <a:solidFill>
+          <a:schemeClr val="tx1"/>
+        </a:solidFill>
+        <a:latin typeface="+mn-lt"/>
+        <a:ea typeface="+mn-ea"/>
+        <a:cs typeface="+mn-cs"/>
+      </a:defRPr>
+    </a:lvl1pPr>
+    <a:lvl2pPr marL="457200" algn="l" defTabSz="914400" rtl="0" eaLnBrk="1" latinLnBrk="1" hangingPunct="1">
+      <a:defRPr sz="1200" kern="1200">
+        <a:solidFill>
+          <a:schemeClr val="tx1"/>
+        </a:solidFill>
+        <a:latin typeface="+mn-lt"/>
+        <a:ea typeface="+mn-ea"/>
+        <a:cs typeface="+mn-cs"/>
+      </a:defRPr>
+    </a:lvl2pPr>
+    <a:lvl3pPr marL="914400" algn="l" defTabSz="914400" rtl="0" eaLnBrk="1" latinLnBrk="1" hangingPunct="1">
+      <a:defRPr sz="1200" kern="1200">
+        <a:solidFill>
+          <a:schemeClr val="tx1"/>
+        </a:solidFill>
+        <a:latin typeface="+mn-lt"/>
+        <a:ea typeface="+mn-ea"/>
+        <a:cs typeface="+mn-cs"/>
+      </a:defRPr>
+    </a:lvl3pPr>
+    <a:lvl4pPr marL="1371600" algn="l" defTabSz="914400" rtl="0" eaLnBrk="1" latinLnBrk="1" hangingPunct="1">
+      <a:defRPr sz="1200" kern="1200">
+        <a:solidFill>
+          <a:schemeClr val="tx1"/>
+        </a:solidFill>
+        <a:latin typeface="+mn-lt"/>
+        <a:ea typeface="+mn-ea"/>
+        <a:cs typeface="+mn-cs"/>
+      </a:defRPr>
+    </a:lvl4pPr>
+    <a:lvl5pPr marL="1828800" algn="l" defTabSz="914400" rtl="0" eaLnBrk="1" latinLnBrk="1" hangingPunct="1">
+      <a:defRPr sz="1200" kern="1200">
+        <a:solidFill>
+          <a:schemeClr val="tx1"/>
+        </a:solidFill>
+        <a:latin typeface="+mn-lt"/>
+        <a:ea typeface="+mn-ea"/>
+        <a:cs typeface="+mn-cs"/>
+      </a:defRPr>
+    </a:lvl5pPr>
+    <a:lvl6pPr marL="2286000" algn="l" defTabSz="914400" rtl="0" eaLnBrk="1" latinLnBrk="1" hangingPunct="1">
+      <a:defRPr sz="1200" kern="1200">
+        <a:solidFill>
+          <a:schemeClr val="tx1"/>
+        </a:solidFill>
+        <a:latin typeface="+mn-lt"/>
+        <a:ea typeface="+mn-ea"/>
+        <a:cs typeface="+mn-cs"/>
+      </a:defRPr>
+    </a:lvl6pPr>
+    <a:lvl7pPr marL="2743200" algn="l" defTabSz="914400" rtl="0" eaLnBrk="1" latinLnBrk="1" hangingPunct="1">
+      <a:defRPr sz="1200" kern="1200">
+        <a:solidFill>
+          <a:schemeClr val="tx1"/>
+        </a:solidFill>
+        <a:latin typeface="+mn-lt"/>
+        <a:ea typeface="+mn-ea"/>
+        <a:cs typeface="+mn-cs"/>
+      </a:defRPr>
+    </a:lvl7pPr>
+    <a:lvl8pPr marL="3200400" algn="l" defTabSz="914400" rtl="0" eaLnBrk="1" latinLnBrk="1" hangingPunct="1">
+      <a:defRPr sz="1200" kern="1200">
+        <a:solidFill>
+          <a:schemeClr val="tx1"/>
+        </a:solidFill>
+        <a:latin typeface="+mn-lt"/>
+        <a:ea typeface="+mn-ea"/>
+        <a:cs typeface="+mn-cs"/>
+      </a:defRPr>
+    </a:lvl8pPr>
+    <a:lvl9pPr marL="3657600" algn="l" defTabSz="914400" rtl="0" eaLnBrk="1" latinLnBrk="1" hangingPunct="1">
+      <a:defRPr sz="1200" kern="1200">
+        <a:solidFill>
+          <a:schemeClr val="tx1"/>
+        </a:solidFill>
+        <a:latin typeface="+mn-lt"/>
+        <a:ea typeface="+mn-ea"/>
+        <a:cs typeface="+mn-cs"/>
+      </a:defRPr>
+    </a:lvl9pPr>
+  </p:notesStyle>
+</p:notesMaster>
+</file>
+
+<file path=ppt/notesSlides/notesSlide1.xml><?xml version="1.0" encoding="utf-8"?>
+<p:notes xmlns:a="http://schemas.openxmlformats.org/drawingml/2006/main" xmlns:r="http://schemas.openxmlformats.org/officeDocument/2006/relationships" xmlns:p="http://schemas.openxmlformats.org/presentationml/2006/main">
+  <p:cSld>
+    <p:spTree>
+      <p:nvGrpSpPr>
+        <p:cNvPr id="1" name=""/>
+        <p:cNvGrpSpPr/>
+        <p:nvPr/>
+      </p:nvGrpSpPr>
+      <p:grpSpPr>
+        <a:xfrm>
+          <a:off x="0" y="0"/>
+          <a:ext cx="0" cy="0"/>
+          <a:chOff x="0" y="0"/>
+          <a:chExt cx="0" cy="0"/>
+        </a:xfrm>
+      </p:grpSpPr>
+      <p:sp>
+        <p:nvSpPr>
+          <p:cNvPr id="2" name="슬라이드 이미지 개체 틀 1"/>
+          <p:cNvSpPr>
+            <a:spLocks noGrp="1" noRot="1" noChangeAspect="1"/>
+          </p:cNvSpPr>
+          <p:nvPr>
+            <p:ph type="sldImg"/>
+          </p:nvPr>
+        </p:nvSpPr>
+        <p:spPr/>
+      </p:sp>
+      <p:sp>
+        <p:nvSpPr>
+          <p:cNvPr id="3" name="슬라이드 노트 개체 틀 2"/>
+          <p:cNvSpPr>
+            <a:spLocks noGrp="1"/>
+          </p:cNvSpPr>
+          <p:nvPr>
+            <p:ph type="body" idx="1"/>
+          </p:nvPr>
+        </p:nvSpPr>
+        <p:spPr/>
+        <p:txBody>
+          <a:bodyPr/>
+          <a:lstStyle/>
+          <a:p>
+            <a:r>
+              <a:rPr lang="ko-KR" altLang="en-US" dirty="0"/>
+              <a:t>목표 영상 </a:t>
+            </a:r>
+            <a:r>
+              <a:rPr lang="en-US" altLang="ko-KR" dirty="0"/>
+              <a:t>: </a:t>
+            </a:r>
+          </a:p>
+          <a:p>
+            <a:pPr marL="228600" indent="-228600">
+              <a:buAutoNum type="arabicPeriod"/>
+            </a:pPr>
+            <a:r>
+              <a:rPr lang="ko-KR" altLang="en-US" dirty="0" err="1"/>
+              <a:t>어쌔신크리드</a:t>
+            </a:r>
+            <a:r>
+              <a:rPr lang="ko-KR" altLang="en-US" dirty="0"/>
+              <a:t> </a:t>
+            </a:r>
+            <a:r>
+              <a:rPr lang="ko-KR" altLang="en-US" dirty="0" err="1"/>
+              <a:t>파쿠르</a:t>
+            </a:r>
+            <a:r>
+              <a:rPr lang="ko-KR" altLang="en-US" dirty="0"/>
+              <a:t> 액션 </a:t>
+            </a:r>
+            <a:endParaRPr lang="en-US" altLang="ko-KR" dirty="0"/>
+          </a:p>
+          <a:p>
+            <a:pPr marL="685800" lvl="1" indent="-228600">
+              <a:buAutoNum type="arabicPeriod"/>
+            </a:pPr>
+            <a:r>
+              <a:rPr lang="en-US" altLang="ko-KR" dirty="0"/>
+              <a:t>https://www.youtube.com/shorts/DgF8jxONRSM</a:t>
+            </a:r>
+          </a:p>
+          <a:p>
+            <a:pPr marL="685800" lvl="1" indent="-228600">
+              <a:buAutoNum type="arabicPeriod"/>
+            </a:pPr>
+            <a:r>
+              <a:rPr lang="en-US" altLang="ko-KR" dirty="0"/>
+              <a:t>https://www.youtube.com/shorts/bMgaW5dvLzk</a:t>
+            </a:r>
+          </a:p>
+          <a:p>
+            <a:pPr marL="685800" lvl="1" indent="-228600">
+              <a:buAutoNum type="arabicPeriod"/>
+            </a:pPr>
+            <a:r>
+              <a:rPr lang="en-US" altLang="ko-KR" dirty="0"/>
+              <a:t>https://www.youtube.com/watch?v=1vhC870Phb0</a:t>
+            </a:r>
+          </a:p>
+          <a:p>
+            <a:pPr marL="685800" lvl="1" indent="-228600">
+              <a:buAutoNum type="arabicPeriod"/>
+            </a:pPr>
+            <a:r>
+              <a:rPr lang="en-US" altLang="ko-KR" dirty="0"/>
+              <a:t>https://www.youtube.com/shorts/AZEMIHgBK1E</a:t>
+            </a:r>
+          </a:p>
+          <a:p>
+            <a:pPr marL="228600" lvl="0" indent="-228600">
+              <a:buAutoNum type="arabicPeriod"/>
+            </a:pPr>
+            <a:r>
+              <a:rPr lang="ko-KR" altLang="en-US" dirty="0" err="1"/>
+              <a:t>툼레이더</a:t>
+            </a:r>
+            <a:endParaRPr lang="en-US" altLang="ko-KR" dirty="0"/>
+          </a:p>
+          <a:p>
+            <a:pPr marL="685800" lvl="1" indent="-228600">
+              <a:buAutoNum type="arabicPeriod"/>
+            </a:pPr>
+            <a:r>
+              <a:rPr lang="en-US" altLang="ko-KR" dirty="0"/>
+              <a:t>https://www.youtube.com/watch?v=reqY7n8hdSg</a:t>
+            </a:r>
+          </a:p>
+          <a:p>
+            <a:pPr marL="685800" lvl="1" indent="-228600">
+              <a:buAutoNum type="arabicPeriod"/>
+            </a:pPr>
+            <a:r>
+              <a:rPr lang="en-US" altLang="ko-KR" dirty="0"/>
+              <a:t>https://www.youtube.com/shorts/PLTIvSb6AxM</a:t>
+            </a:r>
+          </a:p>
+        </p:txBody>
+      </p:sp>
+      <p:sp>
+        <p:nvSpPr>
+          <p:cNvPr id="4" name="슬라이드 번호 개체 틀 3"/>
+          <p:cNvSpPr>
+            <a:spLocks noGrp="1"/>
+          </p:cNvSpPr>
+          <p:nvPr>
+            <p:ph type="sldNum" sz="quarter" idx="10"/>
+          </p:nvPr>
+        </p:nvSpPr>
+        <p:spPr/>
+        <p:txBody>
+          <a:bodyPr/>
+          <a:lstStyle/>
+          <a:p>
+            <a:fld id="{0F03AB99-662C-46EC-B86C-F2E227D3EFAD}" type="slidenum">
+              <a:rPr lang="ko-KR" altLang="en-US" smtClean="0"/>
+              <a:t>4</a:t>
+            </a:fld>
+            <a:endParaRPr lang="ko-KR" altLang="en-US"/>
+          </a:p>
+        </p:txBody>
+      </p:sp>
+    </p:spTree>
+    <p:extLst>
+      <p:ext uri="{BB962C8B-B14F-4D97-AF65-F5344CB8AC3E}">
+        <p14:creationId xmlns:p14="http://schemas.microsoft.com/office/powerpoint/2010/main" val="4024578733"/>
+      </p:ext>
+    </p:extLst>
+  </p:cSld>
+  <p:clrMapOvr>
+    <a:masterClrMapping/>
+  </p:clrMapOvr>
+</p:notes>
+</file>
+
 <file path=ppt/slideLayouts/slideLayout1.xml><?xml version="1.0" encoding="utf-8"?>
 <p:sldLayout xmlns:a="http://schemas.openxmlformats.org/drawingml/2006/main" xmlns:r="http://schemas.openxmlformats.org/officeDocument/2006/relationships" xmlns:p="http://schemas.openxmlformats.org/presentationml/2006/main" type="title" preserve="1">
   <p:cSld name="제목 슬라이드">
@@ -136,7 +666,7 @@
           <p:cNvPr id="2" name="제목 1">
             <a:extLst>
               <a:ext uri="{FF2B5EF4-FFF2-40B4-BE49-F238E27FC236}">
-                <a16:creationId xmlns:a16="http://schemas.microsoft.com/office/drawing/2014/main" xmlns="" id="{47C6A88D-EDAF-CEC2-712F-FA6A7E4FF53C}"/>
+                <a16:creationId xmlns:a16="http://schemas.microsoft.com/office/drawing/2014/main" id="{47C6A88D-EDAF-CEC2-712F-FA6A7E4FF53C}"/>
               </a:ext>
             </a:extLst>
           </p:cNvPr>
@@ -173,7 +703,7 @@
           <p:cNvPr id="3" name="부제목 2">
             <a:extLst>
               <a:ext uri="{FF2B5EF4-FFF2-40B4-BE49-F238E27FC236}">
-                <a16:creationId xmlns:a16="http://schemas.microsoft.com/office/drawing/2014/main" xmlns="" id="{1F7A10E8-4E5D-A611-E577-EBA5676A507E}"/>
+                <a16:creationId xmlns:a16="http://schemas.microsoft.com/office/drawing/2014/main" id="{1F7A10E8-4E5D-A611-E577-EBA5676A507E}"/>
               </a:ext>
             </a:extLst>
           </p:cNvPr>
@@ -243,7 +773,7 @@
           <p:cNvPr id="4" name="날짜 개체 틀 3">
             <a:extLst>
               <a:ext uri="{FF2B5EF4-FFF2-40B4-BE49-F238E27FC236}">
-                <a16:creationId xmlns:a16="http://schemas.microsoft.com/office/drawing/2014/main" xmlns="" id="{FA4EF1CD-FA03-944B-0EC0-2AABE3B0C471}"/>
+                <a16:creationId xmlns:a16="http://schemas.microsoft.com/office/drawing/2014/main" id="{FA4EF1CD-FA03-944B-0EC0-2AABE3B0C471}"/>
               </a:ext>
             </a:extLst>
           </p:cNvPr>
@@ -261,7 +791,7 @@
           <a:p>
             <a:fld id="{5850A429-5607-4C3C-9BC0-4142A9E07459}" type="datetimeFigureOut">
               <a:rPr lang="ko-KR" altLang="en-US" smtClean="0"/>
-              <a:t>2026-07-02</a:t>
+              <a:t>2026-07-09</a:t>
             </a:fld>
             <a:endParaRPr lang="ko-KR" altLang="en-US"/>
           </a:p>
@@ -272,7 +802,7 @@
           <p:cNvPr id="5" name="바닥글 개체 틀 4">
             <a:extLst>
               <a:ext uri="{FF2B5EF4-FFF2-40B4-BE49-F238E27FC236}">
-                <a16:creationId xmlns:a16="http://schemas.microsoft.com/office/drawing/2014/main" xmlns="" id="{D7E1904F-F41F-7809-481D-7E79FCD2132E}"/>
+                <a16:creationId xmlns:a16="http://schemas.microsoft.com/office/drawing/2014/main" id="{D7E1904F-F41F-7809-481D-7E79FCD2132E}"/>
               </a:ext>
             </a:extLst>
           </p:cNvPr>
@@ -297,7 +827,7 @@
           <p:cNvPr id="6" name="슬라이드 번호 개체 틀 5">
             <a:extLst>
               <a:ext uri="{FF2B5EF4-FFF2-40B4-BE49-F238E27FC236}">
-                <a16:creationId xmlns:a16="http://schemas.microsoft.com/office/drawing/2014/main" xmlns="" id="{46C721DE-9DEE-BACB-B354-8E260F43215D}"/>
+                <a16:creationId xmlns:a16="http://schemas.microsoft.com/office/drawing/2014/main" id="{46C721DE-9DEE-BACB-B354-8E260F43215D}"/>
               </a:ext>
             </a:extLst>
           </p:cNvPr>
@@ -356,7 +886,7 @@
           <p:cNvPr id="2" name="제목 1">
             <a:extLst>
               <a:ext uri="{FF2B5EF4-FFF2-40B4-BE49-F238E27FC236}">
-                <a16:creationId xmlns:a16="http://schemas.microsoft.com/office/drawing/2014/main" xmlns="" id="{8EC6E50E-2954-B290-1563-C4936B9E8431}"/>
+                <a16:creationId xmlns:a16="http://schemas.microsoft.com/office/drawing/2014/main" id="{8EC6E50E-2954-B290-1563-C4936B9E8431}"/>
               </a:ext>
             </a:extLst>
           </p:cNvPr>
@@ -384,7 +914,7 @@
           <p:cNvPr id="3" name="세로 텍스트 개체 틀 2">
             <a:extLst>
               <a:ext uri="{FF2B5EF4-FFF2-40B4-BE49-F238E27FC236}">
-                <a16:creationId xmlns:a16="http://schemas.microsoft.com/office/drawing/2014/main" xmlns="" id="{5B6A99E4-1414-E268-7B72-A4C896708AE3}"/>
+                <a16:creationId xmlns:a16="http://schemas.microsoft.com/office/drawing/2014/main" id="{5B6A99E4-1414-E268-7B72-A4C896708AE3}"/>
               </a:ext>
             </a:extLst>
           </p:cNvPr>
@@ -441,7 +971,7 @@
           <p:cNvPr id="4" name="날짜 개체 틀 3">
             <a:extLst>
               <a:ext uri="{FF2B5EF4-FFF2-40B4-BE49-F238E27FC236}">
-                <a16:creationId xmlns:a16="http://schemas.microsoft.com/office/drawing/2014/main" xmlns="" id="{3A9BB3C2-1FA4-4151-9ADB-996284F1BDE2}"/>
+                <a16:creationId xmlns:a16="http://schemas.microsoft.com/office/drawing/2014/main" id="{3A9BB3C2-1FA4-4151-9ADB-996284F1BDE2}"/>
               </a:ext>
             </a:extLst>
           </p:cNvPr>
@@ -459,7 +989,7 @@
           <a:p>
             <a:fld id="{5850A429-5607-4C3C-9BC0-4142A9E07459}" type="datetimeFigureOut">
               <a:rPr lang="ko-KR" altLang="en-US" smtClean="0"/>
-              <a:t>2026-07-02</a:t>
+              <a:t>2026-07-09</a:t>
             </a:fld>
             <a:endParaRPr lang="ko-KR" altLang="en-US"/>
           </a:p>
@@ -470,7 +1000,7 @@
           <p:cNvPr id="5" name="바닥글 개체 틀 4">
             <a:extLst>
               <a:ext uri="{FF2B5EF4-FFF2-40B4-BE49-F238E27FC236}">
-                <a16:creationId xmlns:a16="http://schemas.microsoft.com/office/drawing/2014/main" xmlns="" id="{8A27C81A-BE4E-27CE-6CE4-0AE5876D470A}"/>
+                <a16:creationId xmlns:a16="http://schemas.microsoft.com/office/drawing/2014/main" id="{8A27C81A-BE4E-27CE-6CE4-0AE5876D470A}"/>
               </a:ext>
             </a:extLst>
           </p:cNvPr>
@@ -495,7 +1025,7 @@
           <p:cNvPr id="6" name="슬라이드 번호 개체 틀 5">
             <a:extLst>
               <a:ext uri="{FF2B5EF4-FFF2-40B4-BE49-F238E27FC236}">
-                <a16:creationId xmlns:a16="http://schemas.microsoft.com/office/drawing/2014/main" xmlns="" id="{B4E3C814-C417-2E3F-F02B-1B9ED6941FBD}"/>
+                <a16:creationId xmlns:a16="http://schemas.microsoft.com/office/drawing/2014/main" id="{B4E3C814-C417-2E3F-F02B-1B9ED6941FBD}"/>
               </a:ext>
             </a:extLst>
           </p:cNvPr>
@@ -554,7 +1084,7 @@
           <p:cNvPr id="2" name="세로 제목 1">
             <a:extLst>
               <a:ext uri="{FF2B5EF4-FFF2-40B4-BE49-F238E27FC236}">
-                <a16:creationId xmlns:a16="http://schemas.microsoft.com/office/drawing/2014/main" xmlns="" id="{AC1D687F-54E9-57A3-FDA2-5A8060E79A80}"/>
+                <a16:creationId xmlns:a16="http://schemas.microsoft.com/office/drawing/2014/main" id="{AC1D687F-54E9-57A3-FDA2-5A8060E79A80}"/>
               </a:ext>
             </a:extLst>
           </p:cNvPr>
@@ -587,7 +1117,7 @@
           <p:cNvPr id="3" name="세로 텍스트 개체 틀 2">
             <a:extLst>
               <a:ext uri="{FF2B5EF4-FFF2-40B4-BE49-F238E27FC236}">
-                <a16:creationId xmlns:a16="http://schemas.microsoft.com/office/drawing/2014/main" xmlns="" id="{BC846A14-940B-8FE8-A769-3DABAE11AD25}"/>
+                <a16:creationId xmlns:a16="http://schemas.microsoft.com/office/drawing/2014/main" id="{BC846A14-940B-8FE8-A769-3DABAE11AD25}"/>
               </a:ext>
             </a:extLst>
           </p:cNvPr>
@@ -649,7 +1179,7 @@
           <p:cNvPr id="4" name="날짜 개체 틀 3">
             <a:extLst>
               <a:ext uri="{FF2B5EF4-FFF2-40B4-BE49-F238E27FC236}">
-                <a16:creationId xmlns:a16="http://schemas.microsoft.com/office/drawing/2014/main" xmlns="" id="{393732A3-4427-5A76-3A9C-DBE87A4364DD}"/>
+                <a16:creationId xmlns:a16="http://schemas.microsoft.com/office/drawing/2014/main" id="{393732A3-4427-5A76-3A9C-DBE87A4364DD}"/>
               </a:ext>
             </a:extLst>
           </p:cNvPr>
@@ -667,7 +1197,7 @@
           <a:p>
             <a:fld id="{5850A429-5607-4C3C-9BC0-4142A9E07459}" type="datetimeFigureOut">
               <a:rPr lang="ko-KR" altLang="en-US" smtClean="0"/>
-              <a:t>2026-07-02</a:t>
+              <a:t>2026-07-09</a:t>
             </a:fld>
             <a:endParaRPr lang="ko-KR" altLang="en-US"/>
           </a:p>
@@ -678,7 +1208,7 @@
           <p:cNvPr id="5" name="바닥글 개체 틀 4">
             <a:extLst>
               <a:ext uri="{FF2B5EF4-FFF2-40B4-BE49-F238E27FC236}">
-                <a16:creationId xmlns:a16="http://schemas.microsoft.com/office/drawing/2014/main" xmlns="" id="{16A5B672-F383-0FF5-2D72-72E1E7F0F0D3}"/>
+                <a16:creationId xmlns:a16="http://schemas.microsoft.com/office/drawing/2014/main" id="{16A5B672-F383-0FF5-2D72-72E1E7F0F0D3}"/>
               </a:ext>
             </a:extLst>
           </p:cNvPr>
@@ -703,7 +1233,7 @@
           <p:cNvPr id="6" name="슬라이드 번호 개체 틀 5">
             <a:extLst>
               <a:ext uri="{FF2B5EF4-FFF2-40B4-BE49-F238E27FC236}">
-                <a16:creationId xmlns:a16="http://schemas.microsoft.com/office/drawing/2014/main" xmlns="" id="{DE28928A-9906-D889-A8B7-B97D729CDB76}"/>
+                <a16:creationId xmlns:a16="http://schemas.microsoft.com/office/drawing/2014/main" id="{DE28928A-9906-D889-A8B7-B97D729CDB76}"/>
               </a:ext>
             </a:extLst>
           </p:cNvPr>
@@ -762,7 +1292,7 @@
           <p:cNvPr id="2" name="제목 1">
             <a:extLst>
               <a:ext uri="{FF2B5EF4-FFF2-40B4-BE49-F238E27FC236}">
-                <a16:creationId xmlns:a16="http://schemas.microsoft.com/office/drawing/2014/main" xmlns="" id="{54F5793F-94FE-56B0-E0CB-A317DA7FB4BC}"/>
+                <a16:creationId xmlns:a16="http://schemas.microsoft.com/office/drawing/2014/main" id="{54F5793F-94FE-56B0-E0CB-A317DA7FB4BC}"/>
               </a:ext>
             </a:extLst>
           </p:cNvPr>
@@ -790,7 +1320,7 @@
           <p:cNvPr id="3" name="내용 개체 틀 2">
             <a:extLst>
               <a:ext uri="{FF2B5EF4-FFF2-40B4-BE49-F238E27FC236}">
-                <a16:creationId xmlns:a16="http://schemas.microsoft.com/office/drawing/2014/main" xmlns="" id="{BFAF79B8-2AD1-69C6-D4D5-21827C6802F8}"/>
+                <a16:creationId xmlns:a16="http://schemas.microsoft.com/office/drawing/2014/main" id="{BFAF79B8-2AD1-69C6-D4D5-21827C6802F8}"/>
               </a:ext>
             </a:extLst>
           </p:cNvPr>
@@ -847,7 +1377,7 @@
           <p:cNvPr id="4" name="날짜 개체 틀 3">
             <a:extLst>
               <a:ext uri="{FF2B5EF4-FFF2-40B4-BE49-F238E27FC236}">
-                <a16:creationId xmlns:a16="http://schemas.microsoft.com/office/drawing/2014/main" xmlns="" id="{6718AF63-4F49-82B6-24FC-BB457FC964FC}"/>
+                <a16:creationId xmlns:a16="http://schemas.microsoft.com/office/drawing/2014/main" id="{6718AF63-4F49-82B6-24FC-BB457FC964FC}"/>
               </a:ext>
             </a:extLst>
           </p:cNvPr>
@@ -865,7 +1395,7 @@
           <a:p>
             <a:fld id="{5850A429-5607-4C3C-9BC0-4142A9E07459}" type="datetimeFigureOut">
               <a:rPr lang="ko-KR" altLang="en-US" smtClean="0"/>
-              <a:t>2026-07-02</a:t>
+              <a:t>2026-07-09</a:t>
             </a:fld>
             <a:endParaRPr lang="ko-KR" altLang="en-US"/>
           </a:p>
@@ -876,7 +1406,7 @@
           <p:cNvPr id="5" name="바닥글 개체 틀 4">
             <a:extLst>
               <a:ext uri="{FF2B5EF4-FFF2-40B4-BE49-F238E27FC236}">
-                <a16:creationId xmlns:a16="http://schemas.microsoft.com/office/drawing/2014/main" xmlns="" id="{AA45FF19-25D7-1FF3-E311-2C2E07B26764}"/>
+                <a16:creationId xmlns:a16="http://schemas.microsoft.com/office/drawing/2014/main" id="{AA45FF19-25D7-1FF3-E311-2C2E07B26764}"/>
               </a:ext>
             </a:extLst>
           </p:cNvPr>
@@ -901,7 +1431,7 @@
           <p:cNvPr id="6" name="슬라이드 번호 개체 틀 5">
             <a:extLst>
               <a:ext uri="{FF2B5EF4-FFF2-40B4-BE49-F238E27FC236}">
-                <a16:creationId xmlns:a16="http://schemas.microsoft.com/office/drawing/2014/main" xmlns="" id="{6F43D8BF-52A4-97EB-612B-F9899664EFD5}"/>
+                <a16:creationId xmlns:a16="http://schemas.microsoft.com/office/drawing/2014/main" id="{6F43D8BF-52A4-97EB-612B-F9899664EFD5}"/>
               </a:ext>
             </a:extLst>
           </p:cNvPr>
@@ -960,7 +1490,7 @@
           <p:cNvPr id="2" name="제목 1">
             <a:extLst>
               <a:ext uri="{FF2B5EF4-FFF2-40B4-BE49-F238E27FC236}">
-                <a16:creationId xmlns:a16="http://schemas.microsoft.com/office/drawing/2014/main" xmlns="" id="{1EB95909-78E9-5BAC-68EA-7DCA2A1271F7}"/>
+                <a16:creationId xmlns:a16="http://schemas.microsoft.com/office/drawing/2014/main" id="{1EB95909-78E9-5BAC-68EA-7DCA2A1271F7}"/>
               </a:ext>
             </a:extLst>
           </p:cNvPr>
@@ -997,7 +1527,7 @@
           <p:cNvPr id="3" name="텍스트 개체 틀 2">
             <a:extLst>
               <a:ext uri="{FF2B5EF4-FFF2-40B4-BE49-F238E27FC236}">
-                <a16:creationId xmlns:a16="http://schemas.microsoft.com/office/drawing/2014/main" xmlns="" id="{D6B98DAF-2A47-3ECD-807C-96FB70CF9854}"/>
+                <a16:creationId xmlns:a16="http://schemas.microsoft.com/office/drawing/2014/main" id="{D6B98DAF-2A47-3ECD-807C-96FB70CF9854}"/>
               </a:ext>
             </a:extLst>
           </p:cNvPr>
@@ -1122,7 +1652,7 @@
           <p:cNvPr id="4" name="날짜 개체 틀 3">
             <a:extLst>
               <a:ext uri="{FF2B5EF4-FFF2-40B4-BE49-F238E27FC236}">
-                <a16:creationId xmlns:a16="http://schemas.microsoft.com/office/drawing/2014/main" xmlns="" id="{A3AD9670-C268-56FC-281A-FE1F59541EB9}"/>
+                <a16:creationId xmlns:a16="http://schemas.microsoft.com/office/drawing/2014/main" id="{A3AD9670-C268-56FC-281A-FE1F59541EB9}"/>
               </a:ext>
             </a:extLst>
           </p:cNvPr>
@@ -1140,7 +1670,7 @@
           <a:p>
             <a:fld id="{5850A429-5607-4C3C-9BC0-4142A9E07459}" type="datetimeFigureOut">
               <a:rPr lang="ko-KR" altLang="en-US" smtClean="0"/>
-              <a:t>2026-07-02</a:t>
+              <a:t>2026-07-09</a:t>
             </a:fld>
             <a:endParaRPr lang="ko-KR" altLang="en-US"/>
           </a:p>
@@ -1151,7 +1681,7 @@
           <p:cNvPr id="5" name="바닥글 개체 틀 4">
             <a:extLst>
               <a:ext uri="{FF2B5EF4-FFF2-40B4-BE49-F238E27FC236}">
-                <a16:creationId xmlns:a16="http://schemas.microsoft.com/office/drawing/2014/main" xmlns="" id="{A4946F37-FE38-E38E-7339-DC6E4EFA5B3B}"/>
+                <a16:creationId xmlns:a16="http://schemas.microsoft.com/office/drawing/2014/main" id="{A4946F37-FE38-E38E-7339-DC6E4EFA5B3B}"/>
               </a:ext>
             </a:extLst>
           </p:cNvPr>
@@ -1176,7 +1706,7 @@
           <p:cNvPr id="6" name="슬라이드 번호 개체 틀 5">
             <a:extLst>
               <a:ext uri="{FF2B5EF4-FFF2-40B4-BE49-F238E27FC236}">
-                <a16:creationId xmlns:a16="http://schemas.microsoft.com/office/drawing/2014/main" xmlns="" id="{7C17C39B-6348-28CC-59AF-B1A65BE2F149}"/>
+                <a16:creationId xmlns:a16="http://schemas.microsoft.com/office/drawing/2014/main" id="{7C17C39B-6348-28CC-59AF-B1A65BE2F149}"/>
               </a:ext>
             </a:extLst>
           </p:cNvPr>
@@ -1235,7 +1765,7 @@
           <p:cNvPr id="2" name="제목 1">
             <a:extLst>
               <a:ext uri="{FF2B5EF4-FFF2-40B4-BE49-F238E27FC236}">
-                <a16:creationId xmlns:a16="http://schemas.microsoft.com/office/drawing/2014/main" xmlns="" id="{0D0EFA0F-10D7-865F-1370-4EA34C786709}"/>
+                <a16:creationId xmlns:a16="http://schemas.microsoft.com/office/drawing/2014/main" id="{0D0EFA0F-10D7-865F-1370-4EA34C786709}"/>
               </a:ext>
             </a:extLst>
           </p:cNvPr>
@@ -1263,7 +1793,7 @@
           <p:cNvPr id="3" name="내용 개체 틀 2">
             <a:extLst>
               <a:ext uri="{FF2B5EF4-FFF2-40B4-BE49-F238E27FC236}">
-                <a16:creationId xmlns:a16="http://schemas.microsoft.com/office/drawing/2014/main" xmlns="" id="{0498CDB5-9D2B-5F68-9DD8-ED20454B1044}"/>
+                <a16:creationId xmlns:a16="http://schemas.microsoft.com/office/drawing/2014/main" id="{0498CDB5-9D2B-5F68-9DD8-ED20454B1044}"/>
               </a:ext>
             </a:extLst>
           </p:cNvPr>
@@ -1325,7 +1855,7 @@
           <p:cNvPr id="4" name="내용 개체 틀 3">
             <a:extLst>
               <a:ext uri="{FF2B5EF4-FFF2-40B4-BE49-F238E27FC236}">
-                <a16:creationId xmlns:a16="http://schemas.microsoft.com/office/drawing/2014/main" xmlns="" id="{570EB1B7-8EDE-2794-EA53-E0C1972FAF1A}"/>
+                <a16:creationId xmlns:a16="http://schemas.microsoft.com/office/drawing/2014/main" id="{570EB1B7-8EDE-2794-EA53-E0C1972FAF1A}"/>
               </a:ext>
             </a:extLst>
           </p:cNvPr>
@@ -1387,7 +1917,7 @@
           <p:cNvPr id="5" name="날짜 개체 틀 4">
             <a:extLst>
               <a:ext uri="{FF2B5EF4-FFF2-40B4-BE49-F238E27FC236}">
-                <a16:creationId xmlns:a16="http://schemas.microsoft.com/office/drawing/2014/main" xmlns="" id="{31FBCFA4-CF51-706E-F9F0-8B66CA1A0E1B}"/>
+                <a16:creationId xmlns:a16="http://schemas.microsoft.com/office/drawing/2014/main" id="{31FBCFA4-CF51-706E-F9F0-8B66CA1A0E1B}"/>
               </a:ext>
             </a:extLst>
           </p:cNvPr>
@@ -1405,7 +1935,7 @@
           <a:p>
             <a:fld id="{5850A429-5607-4C3C-9BC0-4142A9E07459}" type="datetimeFigureOut">
               <a:rPr lang="ko-KR" altLang="en-US" smtClean="0"/>
-              <a:t>2026-07-02</a:t>
+              <a:t>2026-07-09</a:t>
             </a:fld>
             <a:endParaRPr lang="ko-KR" altLang="en-US"/>
           </a:p>
@@ -1416,7 +1946,7 @@
           <p:cNvPr id="6" name="바닥글 개체 틀 5">
             <a:extLst>
               <a:ext uri="{FF2B5EF4-FFF2-40B4-BE49-F238E27FC236}">
-                <a16:creationId xmlns:a16="http://schemas.microsoft.com/office/drawing/2014/main" xmlns="" id="{FD56636A-469F-7FE9-480E-955BCC0E6D70}"/>
+                <a16:creationId xmlns:a16="http://schemas.microsoft.com/office/drawing/2014/main" id="{FD56636A-469F-7FE9-480E-955BCC0E6D70}"/>
               </a:ext>
             </a:extLst>
           </p:cNvPr>
@@ -1441,7 +1971,7 @@
           <p:cNvPr id="7" name="슬라이드 번호 개체 틀 6">
             <a:extLst>
               <a:ext uri="{FF2B5EF4-FFF2-40B4-BE49-F238E27FC236}">
-                <a16:creationId xmlns:a16="http://schemas.microsoft.com/office/drawing/2014/main" xmlns="" id="{3971D272-167D-EE36-E685-CD8BFE8CC9A6}"/>
+                <a16:creationId xmlns:a16="http://schemas.microsoft.com/office/drawing/2014/main" id="{3971D272-167D-EE36-E685-CD8BFE8CC9A6}"/>
               </a:ext>
             </a:extLst>
           </p:cNvPr>
@@ -1500,7 +2030,7 @@
           <p:cNvPr id="2" name="제목 1">
             <a:extLst>
               <a:ext uri="{FF2B5EF4-FFF2-40B4-BE49-F238E27FC236}">
-                <a16:creationId xmlns:a16="http://schemas.microsoft.com/office/drawing/2014/main" xmlns="" id="{9AC7230E-A2F3-4027-B6F6-9C5C289B1314}"/>
+                <a16:creationId xmlns:a16="http://schemas.microsoft.com/office/drawing/2014/main" id="{9AC7230E-A2F3-4027-B6F6-9C5C289B1314}"/>
               </a:ext>
             </a:extLst>
           </p:cNvPr>
@@ -1533,7 +2063,7 @@
           <p:cNvPr id="3" name="텍스트 개체 틀 2">
             <a:extLst>
               <a:ext uri="{FF2B5EF4-FFF2-40B4-BE49-F238E27FC236}">
-                <a16:creationId xmlns:a16="http://schemas.microsoft.com/office/drawing/2014/main" xmlns="" id="{0C685356-7419-AD93-377A-8D9A0293423E}"/>
+                <a16:creationId xmlns:a16="http://schemas.microsoft.com/office/drawing/2014/main" id="{0C685356-7419-AD93-377A-8D9A0293423E}"/>
               </a:ext>
             </a:extLst>
           </p:cNvPr>
@@ -1604,7 +2134,7 @@
           <p:cNvPr id="4" name="내용 개체 틀 3">
             <a:extLst>
               <a:ext uri="{FF2B5EF4-FFF2-40B4-BE49-F238E27FC236}">
-                <a16:creationId xmlns:a16="http://schemas.microsoft.com/office/drawing/2014/main" xmlns="" id="{CC36E6CA-94A6-3223-C91A-F6E9648C8EAD}"/>
+                <a16:creationId xmlns:a16="http://schemas.microsoft.com/office/drawing/2014/main" id="{CC36E6CA-94A6-3223-C91A-F6E9648C8EAD}"/>
               </a:ext>
             </a:extLst>
           </p:cNvPr>
@@ -1666,7 +2196,7 @@
           <p:cNvPr id="5" name="텍스트 개체 틀 4">
             <a:extLst>
               <a:ext uri="{FF2B5EF4-FFF2-40B4-BE49-F238E27FC236}">
-                <a16:creationId xmlns:a16="http://schemas.microsoft.com/office/drawing/2014/main" xmlns="" id="{F4DFD790-787A-88A3-300F-C173DAD2E1AF}"/>
+                <a16:creationId xmlns:a16="http://schemas.microsoft.com/office/drawing/2014/main" id="{F4DFD790-787A-88A3-300F-C173DAD2E1AF}"/>
               </a:ext>
             </a:extLst>
           </p:cNvPr>
@@ -1737,7 +2267,7 @@
           <p:cNvPr id="6" name="내용 개체 틀 5">
             <a:extLst>
               <a:ext uri="{FF2B5EF4-FFF2-40B4-BE49-F238E27FC236}">
-                <a16:creationId xmlns:a16="http://schemas.microsoft.com/office/drawing/2014/main" xmlns="" id="{012AE83D-2990-A6E4-CC9C-06D342A67C09}"/>
+                <a16:creationId xmlns:a16="http://schemas.microsoft.com/office/drawing/2014/main" id="{012AE83D-2990-A6E4-CC9C-06D342A67C09}"/>
               </a:ext>
             </a:extLst>
           </p:cNvPr>
@@ -1799,7 +2329,7 @@
           <p:cNvPr id="7" name="날짜 개체 틀 6">
             <a:extLst>
               <a:ext uri="{FF2B5EF4-FFF2-40B4-BE49-F238E27FC236}">
-                <a16:creationId xmlns:a16="http://schemas.microsoft.com/office/drawing/2014/main" xmlns="" id="{3C11F8C3-5AD3-730B-8ADB-304185DAA67E}"/>
+                <a16:creationId xmlns:a16="http://schemas.microsoft.com/office/drawing/2014/main" id="{3C11F8C3-5AD3-730B-8ADB-304185DAA67E}"/>
               </a:ext>
             </a:extLst>
           </p:cNvPr>
@@ -1817,7 +2347,7 @@
           <a:p>
             <a:fld id="{5850A429-5607-4C3C-9BC0-4142A9E07459}" type="datetimeFigureOut">
               <a:rPr lang="ko-KR" altLang="en-US" smtClean="0"/>
-              <a:t>2026-07-02</a:t>
+              <a:t>2026-07-09</a:t>
             </a:fld>
             <a:endParaRPr lang="ko-KR" altLang="en-US"/>
           </a:p>
@@ -1828,7 +2358,7 @@
           <p:cNvPr id="8" name="바닥글 개체 틀 7">
             <a:extLst>
               <a:ext uri="{FF2B5EF4-FFF2-40B4-BE49-F238E27FC236}">
-                <a16:creationId xmlns:a16="http://schemas.microsoft.com/office/drawing/2014/main" xmlns="" id="{EF36ABA7-53C4-C11E-CC9D-F5E59BDBBD9B}"/>
+                <a16:creationId xmlns:a16="http://schemas.microsoft.com/office/drawing/2014/main" id="{EF36ABA7-53C4-C11E-CC9D-F5E59BDBBD9B}"/>
               </a:ext>
             </a:extLst>
           </p:cNvPr>
@@ -1853,7 +2383,7 @@
           <p:cNvPr id="9" name="슬라이드 번호 개체 틀 8">
             <a:extLst>
               <a:ext uri="{FF2B5EF4-FFF2-40B4-BE49-F238E27FC236}">
-                <a16:creationId xmlns:a16="http://schemas.microsoft.com/office/drawing/2014/main" xmlns="" id="{5E29E145-D4AE-F9FB-A218-47B323C43E03}"/>
+                <a16:creationId xmlns:a16="http://schemas.microsoft.com/office/drawing/2014/main" id="{5E29E145-D4AE-F9FB-A218-47B323C43E03}"/>
               </a:ext>
             </a:extLst>
           </p:cNvPr>
@@ -1912,7 +2442,7 @@
           <p:cNvPr id="2" name="제목 1">
             <a:extLst>
               <a:ext uri="{FF2B5EF4-FFF2-40B4-BE49-F238E27FC236}">
-                <a16:creationId xmlns:a16="http://schemas.microsoft.com/office/drawing/2014/main" xmlns="" id="{13D855E6-5AD7-B657-346A-38D87715A5E7}"/>
+                <a16:creationId xmlns:a16="http://schemas.microsoft.com/office/drawing/2014/main" id="{13D855E6-5AD7-B657-346A-38D87715A5E7}"/>
               </a:ext>
             </a:extLst>
           </p:cNvPr>
@@ -1940,7 +2470,7 @@
           <p:cNvPr id="3" name="날짜 개체 틀 2">
             <a:extLst>
               <a:ext uri="{FF2B5EF4-FFF2-40B4-BE49-F238E27FC236}">
-                <a16:creationId xmlns:a16="http://schemas.microsoft.com/office/drawing/2014/main" xmlns="" id="{F3052B06-09E1-1CD0-A032-AEB30F69A0E7}"/>
+                <a16:creationId xmlns:a16="http://schemas.microsoft.com/office/drawing/2014/main" id="{F3052B06-09E1-1CD0-A032-AEB30F69A0E7}"/>
               </a:ext>
             </a:extLst>
           </p:cNvPr>
@@ -1958,7 +2488,7 @@
           <a:p>
             <a:fld id="{5850A429-5607-4C3C-9BC0-4142A9E07459}" type="datetimeFigureOut">
               <a:rPr lang="ko-KR" altLang="en-US" smtClean="0"/>
-              <a:t>2026-07-02</a:t>
+              <a:t>2026-07-09</a:t>
             </a:fld>
             <a:endParaRPr lang="ko-KR" altLang="en-US"/>
           </a:p>
@@ -1969,7 +2499,7 @@
           <p:cNvPr id="4" name="바닥글 개체 틀 3">
             <a:extLst>
               <a:ext uri="{FF2B5EF4-FFF2-40B4-BE49-F238E27FC236}">
-                <a16:creationId xmlns:a16="http://schemas.microsoft.com/office/drawing/2014/main" xmlns="" id="{DE18691A-8582-987D-DF06-E6D8B618E7BB}"/>
+                <a16:creationId xmlns:a16="http://schemas.microsoft.com/office/drawing/2014/main" id="{DE18691A-8582-987D-DF06-E6D8B618E7BB}"/>
               </a:ext>
             </a:extLst>
           </p:cNvPr>
@@ -1994,7 +2524,7 @@
           <p:cNvPr id="5" name="슬라이드 번호 개체 틀 4">
             <a:extLst>
               <a:ext uri="{FF2B5EF4-FFF2-40B4-BE49-F238E27FC236}">
-                <a16:creationId xmlns:a16="http://schemas.microsoft.com/office/drawing/2014/main" xmlns="" id="{6F997ACE-7D00-7B35-1F16-F56C5450EF85}"/>
+                <a16:creationId xmlns:a16="http://schemas.microsoft.com/office/drawing/2014/main" id="{6F997ACE-7D00-7B35-1F16-F56C5450EF85}"/>
               </a:ext>
             </a:extLst>
           </p:cNvPr>
@@ -2053,7 +2583,7 @@
           <p:cNvPr id="2" name="날짜 개체 틀 1">
             <a:extLst>
               <a:ext uri="{FF2B5EF4-FFF2-40B4-BE49-F238E27FC236}">
-                <a16:creationId xmlns:a16="http://schemas.microsoft.com/office/drawing/2014/main" xmlns="" id="{2703D88F-9D50-1761-731E-68DD1FC6B740}"/>
+                <a16:creationId xmlns:a16="http://schemas.microsoft.com/office/drawing/2014/main" id="{2703D88F-9D50-1761-731E-68DD1FC6B740}"/>
               </a:ext>
             </a:extLst>
           </p:cNvPr>
@@ -2071,7 +2601,7 @@
           <a:p>
             <a:fld id="{5850A429-5607-4C3C-9BC0-4142A9E07459}" type="datetimeFigureOut">
               <a:rPr lang="ko-KR" altLang="en-US" smtClean="0"/>
-              <a:t>2026-07-02</a:t>
+              <a:t>2026-07-09</a:t>
             </a:fld>
             <a:endParaRPr lang="ko-KR" altLang="en-US"/>
           </a:p>
@@ -2082,7 +2612,7 @@
           <p:cNvPr id="3" name="바닥글 개체 틀 2">
             <a:extLst>
               <a:ext uri="{FF2B5EF4-FFF2-40B4-BE49-F238E27FC236}">
-                <a16:creationId xmlns:a16="http://schemas.microsoft.com/office/drawing/2014/main" xmlns="" id="{70793086-842E-7906-6019-4284A9E469F4}"/>
+                <a16:creationId xmlns:a16="http://schemas.microsoft.com/office/drawing/2014/main" id="{70793086-842E-7906-6019-4284A9E469F4}"/>
               </a:ext>
             </a:extLst>
           </p:cNvPr>
@@ -2107,7 +2637,7 @@
           <p:cNvPr id="4" name="슬라이드 번호 개체 틀 3">
             <a:extLst>
               <a:ext uri="{FF2B5EF4-FFF2-40B4-BE49-F238E27FC236}">
-                <a16:creationId xmlns:a16="http://schemas.microsoft.com/office/drawing/2014/main" xmlns="" id="{6D4FE3DE-7F26-4352-74EE-A720C7AF5564}"/>
+                <a16:creationId xmlns:a16="http://schemas.microsoft.com/office/drawing/2014/main" id="{6D4FE3DE-7F26-4352-74EE-A720C7AF5564}"/>
               </a:ext>
             </a:extLst>
           </p:cNvPr>
@@ -2166,7 +2696,7 @@
           <p:cNvPr id="2" name="제목 1">
             <a:extLst>
               <a:ext uri="{FF2B5EF4-FFF2-40B4-BE49-F238E27FC236}">
-                <a16:creationId xmlns:a16="http://schemas.microsoft.com/office/drawing/2014/main" xmlns="" id="{0AFB6F63-D5C7-EB4A-A651-8DA5561AD0DC}"/>
+                <a16:creationId xmlns:a16="http://schemas.microsoft.com/office/drawing/2014/main" id="{0AFB6F63-D5C7-EB4A-A651-8DA5561AD0DC}"/>
               </a:ext>
             </a:extLst>
           </p:cNvPr>
@@ -2203,7 +2733,7 @@
           <p:cNvPr id="3" name="내용 개체 틀 2">
             <a:extLst>
               <a:ext uri="{FF2B5EF4-FFF2-40B4-BE49-F238E27FC236}">
-                <a16:creationId xmlns:a16="http://schemas.microsoft.com/office/drawing/2014/main" xmlns="" id="{2000FB2D-0CF3-1A3C-E704-F8CA96C2D5D5}"/>
+                <a16:creationId xmlns:a16="http://schemas.microsoft.com/office/drawing/2014/main" id="{2000FB2D-0CF3-1A3C-E704-F8CA96C2D5D5}"/>
               </a:ext>
             </a:extLst>
           </p:cNvPr>
@@ -2293,7 +2823,7 @@
           <p:cNvPr id="4" name="텍스트 개체 틀 3">
             <a:extLst>
               <a:ext uri="{FF2B5EF4-FFF2-40B4-BE49-F238E27FC236}">
-                <a16:creationId xmlns:a16="http://schemas.microsoft.com/office/drawing/2014/main" xmlns="" id="{88C3C47D-E633-BB5D-0FA3-41A5E3C28A6A}"/>
+                <a16:creationId xmlns:a16="http://schemas.microsoft.com/office/drawing/2014/main" id="{88C3C47D-E633-BB5D-0FA3-41A5E3C28A6A}"/>
               </a:ext>
             </a:extLst>
           </p:cNvPr>
@@ -2364,7 +2894,7 @@
           <p:cNvPr id="5" name="날짜 개체 틀 4">
             <a:extLst>
               <a:ext uri="{FF2B5EF4-FFF2-40B4-BE49-F238E27FC236}">
-                <a16:creationId xmlns:a16="http://schemas.microsoft.com/office/drawing/2014/main" xmlns="" id="{603DA118-0D2F-73A1-6311-85E95462C569}"/>
+                <a16:creationId xmlns:a16="http://schemas.microsoft.com/office/drawing/2014/main" id="{603DA118-0D2F-73A1-6311-85E95462C569}"/>
               </a:ext>
             </a:extLst>
           </p:cNvPr>
@@ -2382,7 +2912,7 @@
           <a:p>
             <a:fld id="{5850A429-5607-4C3C-9BC0-4142A9E07459}" type="datetimeFigureOut">
               <a:rPr lang="ko-KR" altLang="en-US" smtClean="0"/>
-              <a:t>2026-07-02</a:t>
+              <a:t>2026-07-09</a:t>
             </a:fld>
             <a:endParaRPr lang="ko-KR" altLang="en-US"/>
           </a:p>
@@ -2393,7 +2923,7 @@
           <p:cNvPr id="6" name="바닥글 개체 틀 5">
             <a:extLst>
               <a:ext uri="{FF2B5EF4-FFF2-40B4-BE49-F238E27FC236}">
-                <a16:creationId xmlns:a16="http://schemas.microsoft.com/office/drawing/2014/main" xmlns="" id="{DE46749A-348F-886F-32BD-A562F1A2A3B9}"/>
+                <a16:creationId xmlns:a16="http://schemas.microsoft.com/office/drawing/2014/main" id="{DE46749A-348F-886F-32BD-A562F1A2A3B9}"/>
               </a:ext>
             </a:extLst>
           </p:cNvPr>
@@ -2418,7 +2948,7 @@
           <p:cNvPr id="7" name="슬라이드 번호 개체 틀 6">
             <a:extLst>
               <a:ext uri="{FF2B5EF4-FFF2-40B4-BE49-F238E27FC236}">
-                <a16:creationId xmlns:a16="http://schemas.microsoft.com/office/drawing/2014/main" xmlns="" id="{0BF22D09-FBE9-294C-014E-9A808723A1A7}"/>
+                <a16:creationId xmlns:a16="http://schemas.microsoft.com/office/drawing/2014/main" id="{0BF22D09-FBE9-294C-014E-9A808723A1A7}"/>
               </a:ext>
             </a:extLst>
           </p:cNvPr>
@@ -2477,7 +3007,7 @@
           <p:cNvPr id="2" name="제목 1">
             <a:extLst>
               <a:ext uri="{FF2B5EF4-FFF2-40B4-BE49-F238E27FC236}">
-                <a16:creationId xmlns:a16="http://schemas.microsoft.com/office/drawing/2014/main" xmlns="" id="{DA50C132-3A30-7E9C-0BBB-1CD1A789CE68}"/>
+                <a16:creationId xmlns:a16="http://schemas.microsoft.com/office/drawing/2014/main" id="{DA50C132-3A30-7E9C-0BBB-1CD1A789CE68}"/>
               </a:ext>
             </a:extLst>
           </p:cNvPr>
@@ -2514,7 +3044,7 @@
           <p:cNvPr id="3" name="그림 개체 틀 2">
             <a:extLst>
               <a:ext uri="{FF2B5EF4-FFF2-40B4-BE49-F238E27FC236}">
-                <a16:creationId xmlns:a16="http://schemas.microsoft.com/office/drawing/2014/main" xmlns="" id="{2F31776A-D32D-34F5-8A99-A26F4F6535B9}"/>
+                <a16:creationId xmlns:a16="http://schemas.microsoft.com/office/drawing/2014/main" id="{2F31776A-D32D-34F5-8A99-A26F4F6535B9}"/>
               </a:ext>
             </a:extLst>
           </p:cNvPr>
@@ -2581,7 +3111,7 @@
           <p:cNvPr id="4" name="텍스트 개체 틀 3">
             <a:extLst>
               <a:ext uri="{FF2B5EF4-FFF2-40B4-BE49-F238E27FC236}">
-                <a16:creationId xmlns:a16="http://schemas.microsoft.com/office/drawing/2014/main" xmlns="" id="{3E500BF3-C366-20F6-6257-8233A0794521}"/>
+                <a16:creationId xmlns:a16="http://schemas.microsoft.com/office/drawing/2014/main" id="{3E500BF3-C366-20F6-6257-8233A0794521}"/>
               </a:ext>
             </a:extLst>
           </p:cNvPr>
@@ -2652,7 +3182,7 @@
           <p:cNvPr id="5" name="날짜 개체 틀 4">
             <a:extLst>
               <a:ext uri="{FF2B5EF4-FFF2-40B4-BE49-F238E27FC236}">
-                <a16:creationId xmlns:a16="http://schemas.microsoft.com/office/drawing/2014/main" xmlns="" id="{DB1C119C-B590-D055-6B10-AAE861F0D2B1}"/>
+                <a16:creationId xmlns:a16="http://schemas.microsoft.com/office/drawing/2014/main" id="{DB1C119C-B590-D055-6B10-AAE861F0D2B1}"/>
               </a:ext>
             </a:extLst>
           </p:cNvPr>
@@ -2670,7 +3200,7 @@
           <a:p>
             <a:fld id="{5850A429-5607-4C3C-9BC0-4142A9E07459}" type="datetimeFigureOut">
               <a:rPr lang="ko-KR" altLang="en-US" smtClean="0"/>
-              <a:t>2026-07-02</a:t>
+              <a:t>2026-07-09</a:t>
             </a:fld>
             <a:endParaRPr lang="ko-KR" altLang="en-US"/>
           </a:p>
@@ -2681,7 +3211,7 @@
           <p:cNvPr id="6" name="바닥글 개체 틀 5">
             <a:extLst>
               <a:ext uri="{FF2B5EF4-FFF2-40B4-BE49-F238E27FC236}">
-                <a16:creationId xmlns:a16="http://schemas.microsoft.com/office/drawing/2014/main" xmlns="" id="{00064F92-4550-973E-464E-89CA3E7EED4F}"/>
+                <a16:creationId xmlns:a16="http://schemas.microsoft.com/office/drawing/2014/main" id="{00064F92-4550-973E-464E-89CA3E7EED4F}"/>
               </a:ext>
             </a:extLst>
           </p:cNvPr>
@@ -2706,7 +3236,7 @@
           <p:cNvPr id="7" name="슬라이드 번호 개체 틀 6">
             <a:extLst>
               <a:ext uri="{FF2B5EF4-FFF2-40B4-BE49-F238E27FC236}">
-                <a16:creationId xmlns:a16="http://schemas.microsoft.com/office/drawing/2014/main" xmlns="" id="{708384D1-792D-8EA8-718E-F756CEE623A7}"/>
+                <a16:creationId xmlns:a16="http://schemas.microsoft.com/office/drawing/2014/main" id="{708384D1-792D-8EA8-718E-F756CEE623A7}"/>
               </a:ext>
             </a:extLst>
           </p:cNvPr>
@@ -2770,7 +3300,7 @@
           <p:cNvPr id="2" name="제목 개체 틀 1">
             <a:extLst>
               <a:ext uri="{FF2B5EF4-FFF2-40B4-BE49-F238E27FC236}">
-                <a16:creationId xmlns:a16="http://schemas.microsoft.com/office/drawing/2014/main" xmlns="" id="{C0AC0570-6E75-D8C0-582D-3A448969CF8B}"/>
+                <a16:creationId xmlns:a16="http://schemas.microsoft.com/office/drawing/2014/main" id="{C0AC0570-6E75-D8C0-582D-3A448969CF8B}"/>
               </a:ext>
             </a:extLst>
           </p:cNvPr>
@@ -2808,7 +3338,7 @@
           <p:cNvPr id="3" name="텍스트 개체 틀 2">
             <a:extLst>
               <a:ext uri="{FF2B5EF4-FFF2-40B4-BE49-F238E27FC236}">
-                <a16:creationId xmlns:a16="http://schemas.microsoft.com/office/drawing/2014/main" xmlns="" id="{79ADFDDF-DF3C-19FA-0ED8-5D640C08DB4B}"/>
+                <a16:creationId xmlns:a16="http://schemas.microsoft.com/office/drawing/2014/main" id="{79ADFDDF-DF3C-19FA-0ED8-5D640C08DB4B}"/>
               </a:ext>
             </a:extLst>
           </p:cNvPr>
@@ -2875,7 +3405,7 @@
           <p:cNvPr id="4" name="날짜 개체 틀 3">
             <a:extLst>
               <a:ext uri="{FF2B5EF4-FFF2-40B4-BE49-F238E27FC236}">
-                <a16:creationId xmlns:a16="http://schemas.microsoft.com/office/drawing/2014/main" xmlns="" id="{AB9AC677-7913-29B2-30F7-969771FA5D05}"/>
+                <a16:creationId xmlns:a16="http://schemas.microsoft.com/office/drawing/2014/main" id="{AB9AC677-7913-29B2-30F7-969771FA5D05}"/>
               </a:ext>
             </a:extLst>
           </p:cNvPr>
@@ -2911,7 +3441,7 @@
           <a:p>
             <a:fld id="{5850A429-5607-4C3C-9BC0-4142A9E07459}" type="datetimeFigureOut">
               <a:rPr lang="ko-KR" altLang="en-US" smtClean="0"/>
-              <a:t>2026-07-02</a:t>
+              <a:t>2026-07-09</a:t>
             </a:fld>
             <a:endParaRPr lang="ko-KR" altLang="en-US"/>
           </a:p>
@@ -2922,7 +3452,7 @@
           <p:cNvPr id="5" name="바닥글 개체 틀 4">
             <a:extLst>
               <a:ext uri="{FF2B5EF4-FFF2-40B4-BE49-F238E27FC236}">
-                <a16:creationId xmlns:a16="http://schemas.microsoft.com/office/drawing/2014/main" xmlns="" id="{3A6836E4-21B2-245A-8933-7F64F64AC382}"/>
+                <a16:creationId xmlns:a16="http://schemas.microsoft.com/office/drawing/2014/main" id="{3A6836E4-21B2-245A-8933-7F64F64AC382}"/>
               </a:ext>
             </a:extLst>
           </p:cNvPr>
@@ -2965,7 +3495,7 @@
           <p:cNvPr id="6" name="슬라이드 번호 개체 틀 5">
             <a:extLst>
               <a:ext uri="{FF2B5EF4-FFF2-40B4-BE49-F238E27FC236}">
-                <a16:creationId xmlns:a16="http://schemas.microsoft.com/office/drawing/2014/main" xmlns="" id="{6F2D0B4E-8F0D-F1B8-2A71-9862FC9749C5}"/>
+                <a16:creationId xmlns:a16="http://schemas.microsoft.com/office/drawing/2014/main" id="{6F2D0B4E-8F0D-F1B8-2A71-9862FC9749C5}"/>
               </a:ext>
             </a:extLst>
           </p:cNvPr>
@@ -3392,7 +3922,6 @@
               <a:rPr lang="ko-KR" altLang="en-US" dirty="0"/>
               <a:t>김정환</a:t>
             </a:r>
-            <a:endParaRPr lang="ko-KR" altLang="en-US" dirty="0"/>
           </a:p>
         </p:txBody>
       </p:sp>
@@ -3417,7 +3946,7 @@
         <p:cNvPr id="1" name="">
           <a:extLst>
             <a:ext uri="{FF2B5EF4-FFF2-40B4-BE49-F238E27FC236}">
-              <a16:creationId xmlns:a16="http://schemas.microsoft.com/office/drawing/2014/main" xmlns="" id="{49DA7EAA-204E-2F90-E52A-6C83B9013025}"/>
+              <a16:creationId xmlns:a16="http://schemas.microsoft.com/office/drawing/2014/main" id="{49DA7EAA-204E-2F90-E52A-6C83B9013025}"/>
             </a:ext>
           </a:extLst>
         </p:cNvPr>
@@ -3437,7 +3966,7 @@
           <p:cNvPr id="4" name="TextBox 3">
             <a:extLst>
               <a:ext uri="{FF2B5EF4-FFF2-40B4-BE49-F238E27FC236}">
-                <a16:creationId xmlns:a16="http://schemas.microsoft.com/office/drawing/2014/main" xmlns="" id="{1D991C93-DF9D-3E4E-5C97-ABAB7565CD54}"/>
+                <a16:creationId xmlns:a16="http://schemas.microsoft.com/office/drawing/2014/main" id="{1D991C93-DF9D-3E4E-5C97-ABAB7565CD54}"/>
               </a:ext>
             </a:extLst>
           </p:cNvPr>
@@ -3620,7 +4149,7 @@
         <p:cNvPr id="1" name="">
           <a:extLst>
             <a:ext uri="{FF2B5EF4-FFF2-40B4-BE49-F238E27FC236}">
-              <a16:creationId xmlns:a16="http://schemas.microsoft.com/office/drawing/2014/main" xmlns="" id="{068E24C7-A429-CDA0-4EB6-16142BB05552}"/>
+              <a16:creationId xmlns:a16="http://schemas.microsoft.com/office/drawing/2014/main" id="{068E24C7-A429-CDA0-4EB6-16142BB05552}"/>
             </a:ext>
           </a:extLst>
         </p:cNvPr>
@@ -3640,7 +4169,7 @@
           <p:cNvPr id="4" name="TextBox 3">
             <a:extLst>
               <a:ext uri="{FF2B5EF4-FFF2-40B4-BE49-F238E27FC236}">
-                <a16:creationId xmlns:a16="http://schemas.microsoft.com/office/drawing/2014/main" xmlns="" id="{4715F932-2F2C-4A3F-7F16-1B13D352985A}"/>
+                <a16:creationId xmlns:a16="http://schemas.microsoft.com/office/drawing/2014/main" id="{4715F932-2F2C-4A3F-7F16-1B13D352985A}"/>
               </a:ext>
             </a:extLst>
           </p:cNvPr>
@@ -3676,7 +4205,7 @@
           <p:cNvPr id="3" name="TextBox 2">
             <a:extLst>
               <a:ext uri="{FF2B5EF4-FFF2-40B4-BE49-F238E27FC236}">
-                <a16:creationId xmlns:a16="http://schemas.microsoft.com/office/drawing/2014/main" xmlns="" id="{6DE5C835-CE30-2461-B5B2-C304088E694A}"/>
+                <a16:creationId xmlns:a16="http://schemas.microsoft.com/office/drawing/2014/main" id="{6DE5C835-CE30-2461-B5B2-C304088E694A}"/>
               </a:ext>
             </a:extLst>
           </p:cNvPr>
@@ -3801,6 +4330,992 @@
     <p:extLst>
       <p:ext uri="{BB962C8B-B14F-4D97-AF65-F5344CB8AC3E}">
         <p14:creationId xmlns:p14="http://schemas.microsoft.com/office/powerpoint/2010/main" val="2118968564"/>
+      </p:ext>
+    </p:extLst>
+  </p:cSld>
+  <p:clrMapOvr>
+    <a:masterClrMapping/>
+  </p:clrMapOvr>
+</p:sld>
+</file>
+
+<file path=ppt/slides/slide4.xml><?xml version="1.0" encoding="utf-8"?>
+<p:sld xmlns:a="http://schemas.openxmlformats.org/drawingml/2006/main" xmlns:r="http://schemas.openxmlformats.org/officeDocument/2006/relationships" xmlns:p="http://schemas.openxmlformats.org/presentationml/2006/main">
+  <p:cSld>
+    <p:spTree>
+      <p:nvGrpSpPr>
+        <p:cNvPr id="1" name="">
+          <a:extLst>
+            <a:ext uri="{FF2B5EF4-FFF2-40B4-BE49-F238E27FC236}">
+              <a16:creationId xmlns:a16="http://schemas.microsoft.com/office/drawing/2014/main" id="{49DA7EAA-204E-2F90-E52A-6C83B9013025}"/>
+            </a:ext>
+          </a:extLst>
+        </p:cNvPr>
+        <p:cNvGrpSpPr/>
+        <p:nvPr/>
+      </p:nvGrpSpPr>
+      <p:grpSpPr>
+        <a:xfrm>
+          <a:off x="0" y="0"/>
+          <a:ext cx="0" cy="0"/>
+          <a:chOff x="0" y="0"/>
+          <a:chExt cx="0" cy="0"/>
+        </a:xfrm>
+      </p:grpSpPr>
+      <p:sp>
+        <p:nvSpPr>
+          <p:cNvPr id="5" name="TextBox 4">
+            <a:extLst>
+              <a:ext uri="{FF2B5EF4-FFF2-40B4-BE49-F238E27FC236}">
+                <a16:creationId xmlns:a16="http://schemas.microsoft.com/office/drawing/2014/main" id="{4715F932-2F2C-4A3F-7F16-1B13D352985A}"/>
+              </a:ext>
+            </a:extLst>
+          </p:cNvPr>
+          <p:cNvSpPr txBox="1"/>
+          <p:nvPr/>
+        </p:nvSpPr>
+        <p:spPr>
+          <a:xfrm>
+            <a:off x="302451" y="315453"/>
+            <a:ext cx="4944140" cy="369332"/>
+          </a:xfrm>
+          <a:prstGeom prst="rect">
+            <a:avLst/>
+          </a:prstGeom>
+          <a:noFill/>
+        </p:spPr>
+        <p:txBody>
+          <a:bodyPr wrap="square" rtlCol="0">
+            <a:spAutoFit/>
+          </a:bodyPr>
+          <a:lstStyle/>
+          <a:p>
+            <a:r>
+              <a:rPr lang="ko-KR" altLang="en-US" dirty="0"/>
+              <a:t>진행 계획</a:t>
+            </a:r>
+            <a:r>
+              <a:rPr lang="en-US" altLang="ko-KR" dirty="0"/>
+              <a:t> (</a:t>
+            </a:r>
+            <a:r>
+              <a:rPr lang="ko-KR" altLang="en-US" dirty="0" err="1"/>
+              <a:t>주차별</a:t>
+            </a:r>
+            <a:r>
+              <a:rPr lang="ko-KR" altLang="en-US" dirty="0"/>
+              <a:t> 목표</a:t>
+            </a:r>
+            <a:r>
+              <a:rPr lang="en-US" altLang="ko-KR" dirty="0"/>
+              <a:t>)</a:t>
+            </a:r>
+          </a:p>
+        </p:txBody>
+      </p:sp>
+      <p:graphicFrame>
+        <p:nvGraphicFramePr>
+          <p:cNvPr id="2" name="표 1"/>
+          <p:cNvGraphicFramePr>
+            <a:graphicFrameLocks noGrp="1"/>
+          </p:cNvGraphicFramePr>
+          <p:nvPr/>
+        </p:nvGraphicFramePr>
+        <p:xfrm>
+          <a:off x="420856" y="870858"/>
+          <a:ext cx="11318860" cy="5538105"/>
+        </p:xfrm>
+        <a:graphic>
+          <a:graphicData uri="http://schemas.openxmlformats.org/drawingml/2006/table">
+            <a:tbl>
+              <a:tblPr firstRow="1" bandRow="1">
+                <a:tableStyleId>{5C22544A-7EE6-4342-B048-85BDC9FD1C3A}</a:tableStyleId>
+              </a:tblPr>
+              <a:tblGrid>
+                <a:gridCol w="791436">
+                  <a:extLst>
+                    <a:ext uri="{9D8B030D-6E8A-4147-A177-3AD203B41FA5}">
+                      <a16:colId xmlns:a16="http://schemas.microsoft.com/office/drawing/2014/main" val="20000"/>
+                    </a:ext>
+                  </a:extLst>
+                </a:gridCol>
+                <a:gridCol w="4207281">
+                  <a:extLst>
+                    <a:ext uri="{9D8B030D-6E8A-4147-A177-3AD203B41FA5}">
+                      <a16:colId xmlns:a16="http://schemas.microsoft.com/office/drawing/2014/main" val="20001"/>
+                    </a:ext>
+                  </a:extLst>
+                </a:gridCol>
+                <a:gridCol w="6320143">
+                  <a:extLst>
+                    <a:ext uri="{9D8B030D-6E8A-4147-A177-3AD203B41FA5}">
+                      <a16:colId xmlns:a16="http://schemas.microsoft.com/office/drawing/2014/main" val="20002"/>
+                    </a:ext>
+                  </a:extLst>
+                </a:gridCol>
+              </a:tblGrid>
+              <a:tr h="547281">
+                <a:tc>
+                  <a:txBody>
+                    <a:bodyPr/>
+                    <a:lstStyle/>
+                    <a:p>
+                      <a:pPr algn="ctr" latinLnBrk="1"/>
+                      <a:endParaRPr lang="ko-KR" altLang="en-US" sz="1400" b="0" dirty="0"/>
+                    </a:p>
+                  </a:txBody>
+                  <a:tcPr/>
+                </a:tc>
+                <a:tc>
+                  <a:txBody>
+                    <a:bodyPr/>
+                    <a:lstStyle/>
+                    <a:p>
+                      <a:pPr algn="ctr" latinLnBrk="1"/>
+                      <a:r>
+                        <a:rPr lang="ko-KR" altLang="en-US" sz="2000" b="0" dirty="0"/>
+                        <a:t>작업 목표</a:t>
+                      </a:r>
+                    </a:p>
+                  </a:txBody>
+                  <a:tcPr/>
+                </a:tc>
+                <a:tc>
+                  <a:txBody>
+                    <a:bodyPr/>
+                    <a:lstStyle/>
+                    <a:p>
+                      <a:pPr algn="ctr" latinLnBrk="1"/>
+                      <a:r>
+                        <a:rPr lang="ko-KR" altLang="en-US" sz="2000" b="0" dirty="0"/>
+                        <a:t>작업 세부 내용</a:t>
+                      </a:r>
+                    </a:p>
+                  </a:txBody>
+                  <a:tcPr/>
+                </a:tc>
+                <a:extLst>
+                  <a:ext uri="{0D108BD9-81ED-4DB2-BD59-A6C34878D82A}">
+                    <a16:rowId xmlns:a16="http://schemas.microsoft.com/office/drawing/2014/main" val="10000"/>
+                  </a:ext>
+                </a:extLst>
+              </a:tr>
+              <a:tr h="627956">
+                <a:tc>
+                  <a:txBody>
+                    <a:bodyPr/>
+                    <a:lstStyle/>
+                    <a:p>
+                      <a:pPr algn="ctr" latinLnBrk="1"/>
+                      <a:r>
+                        <a:rPr lang="en-US" altLang="ko-KR" dirty="0"/>
+                        <a:t>1</a:t>
+                      </a:r>
+                      <a:endParaRPr lang="ko-KR" altLang="en-US" dirty="0"/>
+                    </a:p>
+                  </a:txBody>
+                  <a:tcPr/>
+                </a:tc>
+                <a:tc>
+                  <a:txBody>
+                    <a:bodyPr/>
+                    <a:lstStyle/>
+                    <a:p>
+                      <a:pPr marL="0" marR="0" lvl="1" indent="0" algn="l" defTabSz="914400" rtl="0" eaLnBrk="1" fontAlgn="auto" latinLnBrk="1" hangingPunct="1">
+                        <a:lnSpc>
+                          <a:spcPct val="100000"/>
+                        </a:lnSpc>
+                        <a:spcBef>
+                          <a:spcPts val="0"/>
+                        </a:spcBef>
+                        <a:spcAft>
+                          <a:spcPts val="0"/>
+                        </a:spcAft>
+                        <a:buClrTx/>
+                        <a:buSzTx/>
+                        <a:buFontTx/>
+                        <a:buNone/>
+                        <a:tabLst/>
+                        <a:defRPr/>
+                      </a:pPr>
+                      <a:r>
+                        <a:rPr lang="ko-KR" altLang="en-US" sz="1600" dirty="0"/>
+                        <a:t>미니엔진 구조 파악 및 기반 클래스</a:t>
+                      </a:r>
+                      <a:r>
+                        <a:rPr lang="ko-KR" altLang="en-US" sz="1600" baseline="0" dirty="0"/>
+                        <a:t> 구성</a:t>
+                      </a:r>
+                      <a:endParaRPr lang="en-US" altLang="ko-KR" sz="1600" dirty="0"/>
+                    </a:p>
+                  </a:txBody>
+                  <a:tcPr/>
+                </a:tc>
+                <a:tc>
+                  <a:txBody>
+                    <a:bodyPr/>
+                    <a:lstStyle/>
+                    <a:p>
+                      <a:pPr marL="0" indent="0" latinLnBrk="1">
+                        <a:buFontTx/>
+                        <a:buNone/>
+                      </a:pPr>
+                      <a:r>
+                        <a:rPr lang="ko-KR" altLang="en-US" sz="1600" dirty="0"/>
+                        <a:t>미니엔진 파악</a:t>
+                      </a:r>
+                      <a:r>
+                        <a:rPr lang="en-US" altLang="ko-KR" sz="1600" dirty="0"/>
+                        <a:t>, </a:t>
+                      </a:r>
+                      <a:r>
+                        <a:rPr lang="ko-KR" altLang="en-US" sz="1600" dirty="0"/>
+                        <a:t>게임 기반 클래스 작성</a:t>
+                      </a:r>
+                      <a:r>
+                        <a:rPr lang="en-US" altLang="ko-KR" sz="1600" dirty="0"/>
+                        <a:t>, </a:t>
+                      </a:r>
+                      <a:br>
+                        <a:rPr lang="en-US" altLang="ko-KR" sz="1600" dirty="0"/>
+                      </a:br>
+                      <a:r>
+                        <a:rPr lang="en-US" altLang="ko-KR" sz="1600" dirty="0" err="1"/>
+                        <a:t>fbx</a:t>
+                      </a:r>
+                      <a:r>
+                        <a:rPr lang="en-US" altLang="ko-KR" sz="1600" dirty="0"/>
+                        <a:t> </a:t>
+                      </a:r>
+                      <a:r>
+                        <a:rPr lang="ko-KR" altLang="en-US" sz="1600" dirty="0"/>
+                        <a:t>파일 </a:t>
+                      </a:r>
+                      <a:r>
+                        <a:rPr lang="ko-KR" altLang="en-US" sz="1600" dirty="0" err="1"/>
+                        <a:t>파싱</a:t>
+                      </a:r>
+                      <a:r>
+                        <a:rPr lang="en-US" altLang="ko-KR" sz="1600" baseline="0" dirty="0"/>
+                        <a:t>, </a:t>
+                      </a:r>
+                      <a:r>
+                        <a:rPr lang="ko-KR" altLang="en-US" sz="1600" baseline="0" dirty="0"/>
+                        <a:t>렌더링</a:t>
+                      </a:r>
+                      <a:r>
+                        <a:rPr lang="en-US" altLang="ko-KR" sz="1600" baseline="0" dirty="0"/>
+                        <a:t>, </a:t>
+                      </a:r>
+                      <a:r>
+                        <a:rPr lang="ko-KR" altLang="en-US" sz="1600" baseline="0" dirty="0"/>
+                        <a:t>애니메이션 재생</a:t>
+                      </a:r>
+                      <a:endParaRPr lang="ko-KR" altLang="en-US" sz="1600" dirty="0"/>
+                    </a:p>
+                  </a:txBody>
+                  <a:tcPr/>
+                </a:tc>
+                <a:extLst>
+                  <a:ext uri="{0D108BD9-81ED-4DB2-BD59-A6C34878D82A}">
+                    <a16:rowId xmlns:a16="http://schemas.microsoft.com/office/drawing/2014/main" val="10001"/>
+                  </a:ext>
+                </a:extLst>
+              </a:tr>
+              <a:tr h="627956">
+                <a:tc>
+                  <a:txBody>
+                    <a:bodyPr/>
+                    <a:lstStyle/>
+                    <a:p>
+                      <a:pPr algn="ctr" latinLnBrk="1"/>
+                      <a:r>
+                        <a:rPr lang="en-US" altLang="ko-KR" dirty="0"/>
+                        <a:t>2</a:t>
+                      </a:r>
+                      <a:endParaRPr lang="ko-KR" altLang="en-US" dirty="0"/>
+                    </a:p>
+                  </a:txBody>
+                  <a:tcPr/>
+                </a:tc>
+                <a:tc>
+                  <a:txBody>
+                    <a:bodyPr/>
+                    <a:lstStyle/>
+                    <a:p>
+                      <a:pPr latinLnBrk="1"/>
+                      <a:r>
+                        <a:rPr lang="ko-KR" altLang="en-US" sz="1600" dirty="0"/>
+                        <a:t>애니메이션 시스템</a:t>
+                      </a:r>
+                      <a:r>
+                        <a:rPr lang="en-US" altLang="ko-KR" sz="1600" dirty="0"/>
+                        <a:t>, </a:t>
+                      </a:r>
+                      <a:r>
+                        <a:rPr lang="ko-KR" altLang="en-US" sz="1600" dirty="0"/>
+                        <a:t>물리엔진 적용</a:t>
+                      </a:r>
+                      <a:r>
+                        <a:rPr lang="en-US" altLang="ko-KR" sz="1600" dirty="0"/>
+                        <a:t>,</a:t>
+                      </a:r>
+                    </a:p>
+                    <a:p>
+                      <a:pPr latinLnBrk="1"/>
+                      <a:r>
+                        <a:rPr lang="ko-KR" altLang="en-US" sz="1600" dirty="0"/>
+                        <a:t>입력 바인딩</a:t>
+                      </a:r>
+                    </a:p>
+                  </a:txBody>
+                  <a:tcPr/>
+                </a:tc>
+                <a:tc>
+                  <a:txBody>
+                    <a:bodyPr/>
+                    <a:lstStyle/>
+                    <a:p>
+                      <a:pPr latinLnBrk="1"/>
+                      <a:r>
+                        <a:rPr lang="ko-KR" altLang="en-US" sz="1600" dirty="0"/>
+                        <a:t>캐릭터 애니메이션 </a:t>
+                      </a:r>
+                      <a:r>
+                        <a:rPr lang="ko-KR" altLang="en-US" sz="1600" dirty="0" err="1"/>
+                        <a:t>블렌드</a:t>
+                      </a:r>
+                      <a:r>
+                        <a:rPr lang="en-US" altLang="ko-KR" sz="1600" dirty="0"/>
+                        <a:t>, </a:t>
+                      </a:r>
+                      <a:r>
+                        <a:rPr lang="ko-KR" altLang="en-US" sz="1600" dirty="0"/>
+                        <a:t>애니메이션 </a:t>
+                      </a:r>
+                      <a:r>
+                        <a:rPr lang="ko-KR" altLang="en-US" sz="1600" dirty="0" err="1"/>
+                        <a:t>상태머신</a:t>
+                      </a:r>
+                      <a:r>
+                        <a:rPr lang="en-US" altLang="ko-KR" sz="1600" dirty="0"/>
+                        <a:t>,</a:t>
+                      </a:r>
+                    </a:p>
+                    <a:p>
+                      <a:pPr latinLnBrk="1"/>
+                      <a:r>
+                        <a:rPr lang="ko-KR" altLang="en-US" sz="1600" dirty="0"/>
+                        <a:t>물리엔진</a:t>
+                      </a:r>
+                      <a:r>
+                        <a:rPr lang="en-US" altLang="ko-KR" sz="1600" dirty="0"/>
+                        <a:t>(PhysX) </a:t>
+                      </a:r>
+                      <a:r>
+                        <a:rPr lang="ko-KR" altLang="en-US" sz="1600" dirty="0"/>
+                        <a:t>적용</a:t>
+                      </a:r>
+                      <a:r>
+                        <a:rPr lang="en-US" altLang="ko-KR" sz="1600" dirty="0"/>
+                        <a:t>, </a:t>
+                      </a:r>
+                      <a:r>
+                        <a:rPr lang="ko-KR" altLang="en-US" sz="1600" dirty="0"/>
+                        <a:t>캐릭터 입력 바인딩</a:t>
+                      </a:r>
+                      <a:r>
+                        <a:rPr lang="en-US" altLang="ko-KR" sz="1600" dirty="0"/>
+                        <a:t>, </a:t>
+                      </a:r>
+                      <a:r>
+                        <a:rPr lang="ko-KR" altLang="en-US" sz="1600" dirty="0"/>
+                        <a:t>캐릭터 </a:t>
+                      </a:r>
+                      <a:r>
+                        <a:rPr lang="ko-KR" altLang="en-US" sz="1600" dirty="0" err="1"/>
+                        <a:t>로코모션</a:t>
+                      </a:r>
+                      <a:r>
+                        <a:rPr lang="ko-KR" altLang="en-US" sz="1600" dirty="0"/>
+                        <a:t> 적용</a:t>
+                      </a:r>
+                    </a:p>
+                  </a:txBody>
+                  <a:tcPr/>
+                </a:tc>
+                <a:extLst>
+                  <a:ext uri="{0D108BD9-81ED-4DB2-BD59-A6C34878D82A}">
+                    <a16:rowId xmlns:a16="http://schemas.microsoft.com/office/drawing/2014/main" val="10002"/>
+                  </a:ext>
+                </a:extLst>
+              </a:tr>
+              <a:tr h="627956">
+                <a:tc>
+                  <a:txBody>
+                    <a:bodyPr/>
+                    <a:lstStyle/>
+                    <a:p>
+                      <a:pPr algn="ctr" latinLnBrk="1"/>
+                      <a:r>
+                        <a:rPr lang="en-US" altLang="ko-KR" dirty="0"/>
+                        <a:t>3</a:t>
+                      </a:r>
+                      <a:endParaRPr lang="ko-KR" altLang="en-US" dirty="0"/>
+                    </a:p>
+                  </a:txBody>
+                  <a:tcPr/>
+                </a:tc>
+                <a:tc>
+                  <a:txBody>
+                    <a:bodyPr/>
+                    <a:lstStyle/>
+                    <a:p>
+                      <a:pPr latinLnBrk="1"/>
+                      <a:r>
+                        <a:rPr lang="ko-KR" altLang="en-US" sz="1600" dirty="0"/>
+                        <a:t>씬 배치</a:t>
+                      </a:r>
+                      <a:r>
+                        <a:rPr lang="en-US" altLang="ko-KR" sz="1600" dirty="0"/>
+                        <a:t>, </a:t>
+                      </a:r>
+                      <a:r>
+                        <a:rPr lang="ko-KR" altLang="en-US" sz="1600" dirty="0"/>
+                        <a:t>캐릭터</a:t>
+                      </a:r>
+                      <a:r>
+                        <a:rPr lang="en-US" altLang="ko-KR" sz="1600" dirty="0"/>
+                        <a:t> </a:t>
+                      </a:r>
+                      <a:r>
+                        <a:rPr lang="ko-KR" altLang="en-US" sz="1600" dirty="0" err="1"/>
+                        <a:t>파쿠르</a:t>
+                      </a:r>
+                      <a:r>
+                        <a:rPr lang="ko-KR" altLang="en-US" sz="1600" dirty="0"/>
+                        <a:t> 애니메이션 적용</a:t>
+                      </a:r>
+                    </a:p>
+                  </a:txBody>
+                  <a:tcPr/>
+                </a:tc>
+                <a:tc>
+                  <a:txBody>
+                    <a:bodyPr/>
+                    <a:lstStyle/>
+                    <a:p>
+                      <a:pPr latinLnBrk="1"/>
+                      <a:r>
+                        <a:rPr lang="ko-KR" altLang="en-US" sz="1600" dirty="0"/>
+                        <a:t>씬</a:t>
+                      </a:r>
+                      <a:r>
+                        <a:rPr lang="en-US" altLang="ko-KR" sz="1600" baseline="0" dirty="0"/>
+                        <a:t> </a:t>
+                      </a:r>
+                      <a:r>
+                        <a:rPr lang="ko-KR" altLang="en-US" sz="1600" baseline="0" dirty="0"/>
+                        <a:t>데이터 직렬화 </a:t>
+                      </a:r>
+                      <a:r>
+                        <a:rPr lang="en-US" altLang="ko-KR" sz="1600" baseline="0" dirty="0"/>
+                        <a:t>(</a:t>
+                      </a:r>
+                      <a:r>
+                        <a:rPr lang="ko-KR" altLang="en-US" sz="1600" baseline="0" dirty="0"/>
+                        <a:t>장애물 배치 정보</a:t>
+                      </a:r>
+                      <a:r>
+                        <a:rPr lang="en-US" altLang="ko-KR" sz="1600" baseline="0" dirty="0"/>
+                        <a:t>), </a:t>
+                      </a:r>
+                      <a:r>
+                        <a:rPr lang="ko-KR" altLang="en-US" sz="1600" baseline="0" dirty="0"/>
+                        <a:t>장애물 높이 인식</a:t>
+                      </a:r>
+                      <a:r>
+                        <a:rPr lang="en-US" altLang="ko-KR" sz="1600" baseline="0" dirty="0"/>
+                        <a:t>, </a:t>
+                      </a:r>
+                      <a:br>
+                        <a:rPr lang="en-US" altLang="ko-KR" sz="1600" baseline="0" dirty="0"/>
+                      </a:br>
+                      <a:r>
+                        <a:rPr lang="ko-KR" altLang="en-US" sz="1600" baseline="0" dirty="0"/>
+                        <a:t>인식한 장애물에 대한 </a:t>
+                      </a:r>
+                      <a:r>
+                        <a:rPr lang="ko-KR" altLang="en-US" sz="1600" baseline="0" dirty="0" err="1"/>
+                        <a:t>파쿠르</a:t>
+                      </a:r>
+                      <a:r>
+                        <a:rPr lang="ko-KR" altLang="en-US" sz="1600" baseline="0" dirty="0"/>
+                        <a:t> 애니메이션 선택</a:t>
+                      </a:r>
+                      <a:r>
+                        <a:rPr lang="en-US" altLang="ko-KR" sz="1600" baseline="0" dirty="0"/>
+                        <a:t> </a:t>
+                      </a:r>
+                      <a:r>
+                        <a:rPr lang="ko-KR" altLang="en-US" sz="1600" baseline="0" dirty="0"/>
+                        <a:t>및 출력</a:t>
+                      </a:r>
+                      <a:endParaRPr lang="ko-KR" altLang="en-US" sz="1600" dirty="0"/>
+                    </a:p>
+                  </a:txBody>
+                  <a:tcPr/>
+                </a:tc>
+                <a:extLst>
+                  <a:ext uri="{0D108BD9-81ED-4DB2-BD59-A6C34878D82A}">
+                    <a16:rowId xmlns:a16="http://schemas.microsoft.com/office/drawing/2014/main" val="10003"/>
+                  </a:ext>
+                </a:extLst>
+              </a:tr>
+              <a:tr h="627956">
+                <a:tc>
+                  <a:txBody>
+                    <a:bodyPr/>
+                    <a:lstStyle/>
+                    <a:p>
+                      <a:pPr algn="ctr" latinLnBrk="1"/>
+                      <a:r>
+                        <a:rPr lang="en-US" altLang="ko-KR" dirty="0"/>
+                        <a:t>4</a:t>
+                      </a:r>
+                      <a:endParaRPr lang="ko-KR" altLang="en-US" dirty="0"/>
+                    </a:p>
+                  </a:txBody>
+                  <a:tcPr/>
+                </a:tc>
+                <a:tc>
+                  <a:txBody>
+                    <a:bodyPr/>
+                    <a:lstStyle/>
+                    <a:p>
+                      <a:pPr latinLnBrk="1"/>
+                      <a:r>
+                        <a:rPr lang="ko-KR" altLang="en-US" sz="1600" dirty="0" err="1"/>
+                        <a:t>파쿠르</a:t>
+                      </a:r>
+                      <a:r>
+                        <a:rPr lang="ko-KR" altLang="en-US" sz="1600" dirty="0"/>
+                        <a:t> </a:t>
+                      </a:r>
+                      <a:r>
+                        <a:rPr lang="ko-KR" altLang="en-US" sz="1600" dirty="0" err="1"/>
+                        <a:t>프로토타입</a:t>
+                      </a:r>
+                      <a:endParaRPr lang="ko-KR" altLang="en-US" sz="1600" dirty="0"/>
+                    </a:p>
+                  </a:txBody>
+                  <a:tcPr/>
+                </a:tc>
+                <a:tc>
+                  <a:txBody>
+                    <a:bodyPr/>
+                    <a:lstStyle/>
+                    <a:p>
+                      <a:pPr latinLnBrk="1"/>
+                      <a:r>
+                        <a:rPr lang="ko-KR" altLang="en-US" sz="1600" dirty="0"/>
+                        <a:t>높이에 따른 장애물</a:t>
+                      </a:r>
+                      <a:r>
+                        <a:rPr lang="ko-KR" altLang="en-US" sz="1600" baseline="0" dirty="0"/>
+                        <a:t> </a:t>
+                      </a:r>
+                      <a:r>
+                        <a:rPr lang="ko-KR" altLang="en-US" sz="1600" baseline="0" dirty="0" err="1"/>
+                        <a:t>파쿠르</a:t>
+                      </a:r>
+                      <a:r>
+                        <a:rPr lang="ko-KR" altLang="en-US" sz="1600" baseline="0" dirty="0"/>
+                        <a:t> 처리</a:t>
+                      </a:r>
+                      <a:r>
+                        <a:rPr lang="en-US" altLang="ko-KR" sz="1600" baseline="0" dirty="0"/>
+                        <a:t>, </a:t>
+                      </a:r>
+                      <a:r>
+                        <a:rPr lang="ko-KR" altLang="en-US" sz="1600" dirty="0"/>
+                        <a:t>평지</a:t>
+                      </a:r>
+                      <a:r>
+                        <a:rPr lang="en-US" altLang="ko-KR" sz="1600" dirty="0"/>
+                        <a:t>-</a:t>
+                      </a:r>
+                      <a:r>
+                        <a:rPr lang="ko-KR" altLang="en-US" sz="1600" dirty="0"/>
+                        <a:t>벽면 간 애니메이션</a:t>
+                      </a:r>
+                      <a:r>
+                        <a:rPr lang="ko-KR" altLang="en-US" sz="1600" baseline="0" dirty="0"/>
+                        <a:t> 상태</a:t>
+                      </a:r>
+                      <a:r>
+                        <a:rPr lang="ko-KR" altLang="en-US" sz="1600" dirty="0"/>
+                        <a:t> 전환</a:t>
+                      </a:r>
+                      <a:r>
+                        <a:rPr lang="en-US" altLang="ko-KR" sz="1600" baseline="0" dirty="0"/>
+                        <a:t> (</a:t>
+                      </a:r>
+                      <a:r>
+                        <a:rPr lang="ko-KR" altLang="en-US" sz="1600" baseline="0" dirty="0"/>
+                        <a:t>벽면을 올라 평지에 도달</a:t>
+                      </a:r>
+                      <a:r>
+                        <a:rPr lang="en-US" altLang="ko-KR" sz="1600" baseline="0" dirty="0"/>
+                        <a:t>, </a:t>
+                      </a:r>
+                      <a:r>
+                        <a:rPr lang="ko-KR" altLang="en-US" sz="1600" baseline="0" dirty="0"/>
+                        <a:t>벽면에서 내려와 평지에 도달 등</a:t>
+                      </a:r>
+                      <a:r>
+                        <a:rPr lang="en-US" altLang="ko-KR" sz="1600" baseline="0" dirty="0"/>
+                        <a:t>)</a:t>
+                      </a:r>
+                      <a:endParaRPr lang="en-US" altLang="ko-KR" sz="1600" dirty="0"/>
+                    </a:p>
+                  </a:txBody>
+                  <a:tcPr/>
+                </a:tc>
+                <a:extLst>
+                  <a:ext uri="{0D108BD9-81ED-4DB2-BD59-A6C34878D82A}">
+                    <a16:rowId xmlns:a16="http://schemas.microsoft.com/office/drawing/2014/main" val="10004"/>
+                  </a:ext>
+                </a:extLst>
+              </a:tr>
+              <a:tr h="627956">
+                <a:tc>
+                  <a:txBody>
+                    <a:bodyPr/>
+                    <a:lstStyle/>
+                    <a:p>
+                      <a:pPr algn="ctr" latinLnBrk="1"/>
+                      <a:r>
+                        <a:rPr lang="en-US" altLang="ko-KR" dirty="0"/>
+                        <a:t>5</a:t>
+                      </a:r>
+                      <a:endParaRPr lang="ko-KR" altLang="en-US" dirty="0"/>
+                    </a:p>
+                  </a:txBody>
+                  <a:tcPr/>
+                </a:tc>
+                <a:tc>
+                  <a:txBody>
+                    <a:bodyPr/>
+                    <a:lstStyle/>
+                    <a:p>
+                      <a:pPr latinLnBrk="1"/>
+                      <a:r>
+                        <a:rPr lang="ko-KR" altLang="en-US" sz="1600" dirty="0" err="1"/>
+                        <a:t>파쿠르</a:t>
+                      </a:r>
+                      <a:r>
+                        <a:rPr lang="ko-KR" altLang="en-US" sz="1600" dirty="0"/>
+                        <a:t> 시스템 보완</a:t>
+                      </a:r>
+                    </a:p>
+                  </a:txBody>
+                  <a:tcPr/>
+                </a:tc>
+                <a:tc>
+                  <a:txBody>
+                    <a:bodyPr/>
+                    <a:lstStyle/>
+                    <a:p>
+                      <a:pPr latinLnBrk="1"/>
+                      <a:r>
+                        <a:rPr lang="ko-KR" altLang="en-US" sz="1600" dirty="0"/>
+                        <a:t>애니메이션 </a:t>
+                      </a:r>
+                      <a:r>
+                        <a:rPr lang="en-US" altLang="ko-KR" sz="1600" dirty="0"/>
+                        <a:t>IK </a:t>
+                      </a:r>
+                      <a:r>
+                        <a:rPr lang="ko-KR" altLang="en-US" sz="1600" dirty="0"/>
+                        <a:t>적용</a:t>
+                      </a:r>
+                      <a:r>
+                        <a:rPr lang="en-US" altLang="ko-KR" sz="1600" dirty="0"/>
+                        <a:t>, </a:t>
+                      </a:r>
+                      <a:r>
+                        <a:rPr lang="ko-KR" altLang="en-US" sz="1600" dirty="0" err="1"/>
+                        <a:t>파쿠르</a:t>
+                      </a:r>
+                      <a:r>
+                        <a:rPr lang="ko-KR" altLang="en-US" sz="1600" dirty="0"/>
+                        <a:t> 시</a:t>
+                      </a:r>
+                      <a:r>
+                        <a:rPr lang="en-US" altLang="ko-KR" sz="1600" dirty="0"/>
+                        <a:t> </a:t>
+                      </a:r>
+                      <a:r>
+                        <a:rPr lang="ko-KR" altLang="en-US" sz="1600" dirty="0"/>
+                        <a:t>캐릭터 손 위치 </a:t>
+                      </a:r>
+                      <a:r>
+                        <a:rPr lang="en-US" altLang="ko-KR" sz="1600" dirty="0"/>
+                        <a:t>IK</a:t>
+                      </a:r>
+                      <a:r>
+                        <a:rPr lang="ko-KR" altLang="en-US" sz="1600" dirty="0"/>
+                        <a:t>를 통해 보정</a:t>
+                      </a:r>
+                      <a:endParaRPr lang="en-US" altLang="ko-KR" sz="1600" dirty="0"/>
+                    </a:p>
+                  </a:txBody>
+                  <a:tcPr/>
+                </a:tc>
+                <a:extLst>
+                  <a:ext uri="{0D108BD9-81ED-4DB2-BD59-A6C34878D82A}">
+                    <a16:rowId xmlns:a16="http://schemas.microsoft.com/office/drawing/2014/main" val="10005"/>
+                  </a:ext>
+                </a:extLst>
+              </a:tr>
+              <a:tr h="627956">
+                <a:tc>
+                  <a:txBody>
+                    <a:bodyPr/>
+                    <a:lstStyle/>
+                    <a:p>
+                      <a:pPr algn="ctr" latinLnBrk="1"/>
+                      <a:r>
+                        <a:rPr lang="en-US" altLang="ko-KR" dirty="0"/>
+                        <a:t>6</a:t>
+                      </a:r>
+                      <a:endParaRPr lang="ko-KR" altLang="en-US" dirty="0"/>
+                    </a:p>
+                  </a:txBody>
+                  <a:tcPr/>
+                </a:tc>
+                <a:tc>
+                  <a:txBody>
+                    <a:bodyPr/>
+                    <a:lstStyle/>
+                    <a:p>
+                      <a:pPr latinLnBrk="1"/>
+                      <a:r>
+                        <a:rPr lang="ko-KR" altLang="en-US" sz="1600" dirty="0"/>
+                        <a:t>복잡한 지형 애니메이션 처리 </a:t>
+                      </a:r>
+                      <a:r>
+                        <a:rPr lang="en-US" altLang="ko-KR" sz="1600" dirty="0"/>
+                        <a:t>1</a:t>
+                      </a:r>
+                      <a:endParaRPr lang="ko-KR" altLang="en-US" sz="1600" dirty="0"/>
+                    </a:p>
+                  </a:txBody>
+                  <a:tcPr/>
+                </a:tc>
+                <a:tc>
+                  <a:txBody>
+                    <a:bodyPr/>
+                    <a:lstStyle/>
+                    <a:p>
+                      <a:pPr latinLnBrk="1"/>
+                      <a:r>
+                        <a:rPr lang="ko-KR" altLang="en-US" sz="1600" baseline="0" dirty="0"/>
+                        <a:t>벽면 중간에 지붕</a:t>
+                      </a:r>
+                      <a:r>
+                        <a:rPr lang="en-US" altLang="ko-KR" sz="1600" baseline="0" dirty="0"/>
+                        <a:t>, </a:t>
+                      </a:r>
+                      <a:r>
+                        <a:rPr lang="ko-KR" altLang="en-US" sz="1600" baseline="0" dirty="0"/>
+                        <a:t>경사로</a:t>
+                      </a:r>
+                      <a:r>
+                        <a:rPr lang="en-US" altLang="ko-KR" sz="1600" baseline="0" dirty="0"/>
+                        <a:t>, </a:t>
+                      </a:r>
+                      <a:r>
+                        <a:rPr lang="ko-KR" altLang="en-US" sz="1600" baseline="0" dirty="0"/>
+                        <a:t>철봉 나열된 환경</a:t>
+                      </a:r>
+                      <a:br>
+                        <a:rPr lang="en-US" altLang="ko-KR" sz="1600" baseline="0" dirty="0"/>
+                      </a:br>
+                      <a:r>
+                        <a:rPr lang="ko-KR" altLang="en-US" sz="1600" baseline="0" dirty="0" err="1"/>
+                        <a:t>파쿠르</a:t>
+                      </a:r>
+                      <a:r>
+                        <a:rPr lang="ko-KR" altLang="en-US" sz="1600" baseline="0" dirty="0"/>
+                        <a:t> 애니메이션 처리</a:t>
+                      </a:r>
+                      <a:endParaRPr lang="ko-KR" altLang="en-US" sz="1600" dirty="0"/>
+                    </a:p>
+                  </a:txBody>
+                  <a:tcPr/>
+                </a:tc>
+                <a:extLst>
+                  <a:ext uri="{0D108BD9-81ED-4DB2-BD59-A6C34878D82A}">
+                    <a16:rowId xmlns:a16="http://schemas.microsoft.com/office/drawing/2014/main" val="10006"/>
+                  </a:ext>
+                </a:extLst>
+              </a:tr>
+              <a:tr h="611544">
+                <a:tc>
+                  <a:txBody>
+                    <a:bodyPr/>
+                    <a:lstStyle/>
+                    <a:p>
+                      <a:pPr algn="ctr" latinLnBrk="1"/>
+                      <a:r>
+                        <a:rPr lang="en-US" altLang="ko-KR" dirty="0"/>
+                        <a:t>7</a:t>
+                      </a:r>
+                      <a:endParaRPr lang="ko-KR" altLang="en-US" dirty="0"/>
+                    </a:p>
+                  </a:txBody>
+                  <a:tcPr/>
+                </a:tc>
+                <a:tc>
+                  <a:txBody>
+                    <a:bodyPr/>
+                    <a:lstStyle/>
+                    <a:p>
+                      <a:pPr marL="0" marR="0" indent="0" algn="l" defTabSz="914400" rtl="0" eaLnBrk="1" fontAlgn="auto" latinLnBrk="1" hangingPunct="1">
+                        <a:lnSpc>
+                          <a:spcPct val="100000"/>
+                        </a:lnSpc>
+                        <a:spcBef>
+                          <a:spcPts val="0"/>
+                        </a:spcBef>
+                        <a:spcAft>
+                          <a:spcPts val="0"/>
+                        </a:spcAft>
+                        <a:buClrTx/>
+                        <a:buSzTx/>
+                        <a:buFontTx/>
+                        <a:buNone/>
+                        <a:tabLst/>
+                        <a:defRPr/>
+                      </a:pPr>
+                      <a:r>
+                        <a:rPr lang="ko-KR" altLang="en-US" sz="1600" dirty="0"/>
+                        <a:t>복잡한 지형 애니메이션 처리 </a:t>
+                      </a:r>
+                      <a:r>
+                        <a:rPr lang="en-US" altLang="ko-KR" sz="1600" dirty="0"/>
+                        <a:t>2</a:t>
+                      </a:r>
+                      <a:endParaRPr lang="ko-KR" altLang="en-US" sz="1600" dirty="0"/>
+                    </a:p>
+                    <a:p>
+                      <a:pPr latinLnBrk="1"/>
+                      <a:endParaRPr lang="ko-KR" altLang="en-US" sz="1600" dirty="0"/>
+                    </a:p>
+                  </a:txBody>
+                  <a:tcPr/>
+                </a:tc>
+                <a:tc>
+                  <a:txBody>
+                    <a:bodyPr/>
+                    <a:lstStyle/>
+                    <a:p>
+                      <a:pPr latinLnBrk="1"/>
+                      <a:r>
+                        <a:rPr lang="ko-KR" altLang="en-US" sz="1600" dirty="0"/>
+                        <a:t>직각으로 만나는 벽면 간 이동 처리</a:t>
+                      </a:r>
+                      <a:r>
+                        <a:rPr lang="en-US" altLang="ko-KR" sz="1600" dirty="0"/>
+                        <a:t>, </a:t>
+                      </a:r>
+                      <a:r>
+                        <a:rPr lang="ko-KR" altLang="en-US" sz="1600" dirty="0"/>
+                        <a:t>벽면에 뻗어 나온 줄 또는 기둥</a:t>
+                      </a:r>
+                      <a:r>
+                        <a:rPr lang="ko-KR" altLang="en-US" sz="1600" baseline="0" dirty="0"/>
+                        <a:t> 환경 </a:t>
+                      </a:r>
+                      <a:r>
+                        <a:rPr lang="ko-KR" altLang="en-US" sz="1600" baseline="0" dirty="0" err="1"/>
+                        <a:t>파쿠르</a:t>
+                      </a:r>
+                      <a:r>
+                        <a:rPr lang="ko-KR" altLang="en-US" sz="1600" baseline="0" dirty="0"/>
+                        <a:t> 애니메이션 처리</a:t>
+                      </a:r>
+                      <a:endParaRPr lang="ko-KR" altLang="en-US" sz="1600" dirty="0"/>
+                    </a:p>
+                  </a:txBody>
+                  <a:tcPr/>
+                </a:tc>
+                <a:extLst>
+                  <a:ext uri="{0D108BD9-81ED-4DB2-BD59-A6C34878D82A}">
+                    <a16:rowId xmlns:a16="http://schemas.microsoft.com/office/drawing/2014/main" val="10007"/>
+                  </a:ext>
+                </a:extLst>
+              </a:tr>
+              <a:tr h="611544">
+                <a:tc>
+                  <a:txBody>
+                    <a:bodyPr/>
+                    <a:lstStyle/>
+                    <a:p>
+                      <a:pPr algn="ctr" latinLnBrk="1"/>
+                      <a:r>
+                        <a:rPr lang="en-US" altLang="ko-KR" dirty="0"/>
+                        <a:t>8</a:t>
+                      </a:r>
+                      <a:endParaRPr lang="ko-KR" altLang="en-US" dirty="0"/>
+                    </a:p>
+                  </a:txBody>
+                  <a:tcPr/>
+                </a:tc>
+                <a:tc>
+                  <a:txBody>
+                    <a:bodyPr/>
+                    <a:lstStyle/>
+                    <a:p>
+                      <a:pPr latinLnBrk="1"/>
+                      <a:r>
+                        <a:rPr lang="ko-KR" altLang="en-US" sz="1600" dirty="0"/>
+                        <a:t>마무리 및 보완</a:t>
+                      </a:r>
+                    </a:p>
+                  </a:txBody>
+                  <a:tcPr/>
+                </a:tc>
+                <a:tc>
+                  <a:txBody>
+                    <a:bodyPr/>
+                    <a:lstStyle/>
+                    <a:p>
+                      <a:pPr latinLnBrk="1"/>
+                      <a:r>
+                        <a:rPr lang="ko-KR" altLang="en-US" sz="1600" dirty="0"/>
+                        <a:t>미흡사항 보완</a:t>
+                      </a:r>
+                    </a:p>
+                  </a:txBody>
+                  <a:tcPr/>
+                </a:tc>
+                <a:extLst>
+                  <a:ext uri="{0D108BD9-81ED-4DB2-BD59-A6C34878D82A}">
+                    <a16:rowId xmlns:a16="http://schemas.microsoft.com/office/drawing/2014/main" val="10008"/>
+                  </a:ext>
+                </a:extLst>
+              </a:tr>
+            </a:tbl>
+          </a:graphicData>
+        </a:graphic>
+      </p:graphicFrame>
+    </p:spTree>
+    <p:extLst>
+      <p:ext uri="{BB962C8B-B14F-4D97-AF65-F5344CB8AC3E}">
+        <p14:creationId xmlns:p14="http://schemas.microsoft.com/office/powerpoint/2010/main" val="3401005513"/>
       </p:ext>
     </p:extLst>
   </p:cSld>
@@ -4123,4 +5638,319 @@
     </a:ext>
   </a:extLst>
 </a:theme>
+</file>
+
+<file path=ppt/theme/theme2.xml><?xml version="1.0" encoding="utf-8"?>
+<a:theme xmlns:a="http://schemas.openxmlformats.org/drawingml/2006/main" name="Office 테마">
+  <a:themeElements>
+    <a:clrScheme name="Office">
+      <a:dk1>
+        <a:sysClr val="windowText" lastClr="000000"/>
+      </a:dk1>
+      <a:lt1>
+        <a:sysClr val="window" lastClr="FFFFFF"/>
+      </a:lt1>
+      <a:dk2>
+        <a:srgbClr val="0E2841"/>
+      </a:dk2>
+      <a:lt2>
+        <a:srgbClr val="E8E8E8"/>
+      </a:lt2>
+      <a:accent1>
+        <a:srgbClr val="156082"/>
+      </a:accent1>
+      <a:accent2>
+        <a:srgbClr val="E97132"/>
+      </a:accent2>
+      <a:accent3>
+        <a:srgbClr val="196B24"/>
+      </a:accent3>
+      <a:accent4>
+        <a:srgbClr val="0F9ED5"/>
+      </a:accent4>
+      <a:accent5>
+        <a:srgbClr val="A02B93"/>
+      </a:accent5>
+      <a:accent6>
+        <a:srgbClr val="4EA72E"/>
+      </a:accent6>
+      <a:hlink>
+        <a:srgbClr val="467886"/>
+      </a:hlink>
+      <a:folHlink>
+        <a:srgbClr val="96607D"/>
+      </a:folHlink>
+    </a:clrScheme>
+    <a:fontScheme name="Office">
+      <a:majorFont>
+        <a:latin typeface="맑은 고딕" panose="02110004020202020204"/>
+        <a:ea typeface=""/>
+        <a:cs typeface=""/>
+        <a:font script="Jpan" typeface="游ゴシック Light"/>
+        <a:font script="Hang" typeface="맑은 고딕"/>
+        <a:font script="Hans" typeface="等线 Light"/>
+        <a:font script="Hant" typeface="新細明體"/>
+        <a:font script="Arab" typeface="Times New Roman"/>
+        <a:font script="Hebr" typeface="Times New Roman"/>
+        <a:font script="Thai" typeface="Angsana New"/>
+        <a:font script="Ethi" typeface="Nyala"/>
+        <a:font script="Beng" typeface="Vrinda"/>
+        <a:font script="Gujr" typeface="Shruti"/>
+        <a:font script="Khmr" typeface="MoolBoran"/>
+        <a:font script="Knda" typeface="Tunga"/>
+        <a:font script="Guru" typeface="Raavi"/>
+        <a:font script="Cans" typeface="Euphemia"/>
+        <a:font script="Cher" typeface="Plantagenet Cherokee"/>
+        <a:font script="Yiii" typeface="Microsoft Yi Baiti"/>
+        <a:font script="Tibt" typeface="Microsoft Himalaya"/>
+        <a:font script="Thaa" typeface="MV Boli"/>
+        <a:font script="Deva" typeface="Mangal"/>
+        <a:font script="Telu" typeface="Gautami"/>
+        <a:font script="Taml" typeface="Latha"/>
+        <a:font script="Syrc" typeface="Estrangelo Edessa"/>
+        <a:font script="Orya" typeface="Kalinga"/>
+        <a:font script="Mlym" typeface="Kartika"/>
+        <a:font script="Laoo" typeface="DokChampa"/>
+        <a:font script="Sinh" typeface="Iskoola Pota"/>
+        <a:font script="Mong" typeface="Mongolian Baiti"/>
+        <a:font script="Viet" typeface="Times New Roman"/>
+        <a:font script="Uigh" typeface="Microsoft Uighur"/>
+        <a:font script="Geor" typeface="Sylfaen"/>
+        <a:font script="Armn" typeface="Arial"/>
+        <a:font script="Bugi" typeface="Leelawadee UI"/>
+        <a:font script="Bopo" typeface="Microsoft JhengHei"/>
+        <a:font script="Java" typeface="Javanese Text"/>
+        <a:font script="Lisu" typeface="Segoe UI"/>
+        <a:font script="Mymr" typeface="Myanmar Text"/>
+        <a:font script="Nkoo" typeface="Ebrima"/>
+        <a:font script="Olck" typeface="Nirmala UI"/>
+        <a:font script="Osma" typeface="Ebrima"/>
+        <a:font script="Phag" typeface="Phagspa"/>
+        <a:font script="Syrn" typeface="Estrangelo Edessa"/>
+        <a:font script="Syrj" typeface="Estrangelo Edessa"/>
+        <a:font script="Syre" typeface="Estrangelo Edessa"/>
+        <a:font script="Sora" typeface="Nirmala UI"/>
+        <a:font script="Tale" typeface="Microsoft Tai Le"/>
+        <a:font script="Talu" typeface="Microsoft New Tai Lue"/>
+        <a:font script="Tfng" typeface="Ebrima"/>
+      </a:majorFont>
+      <a:minorFont>
+        <a:latin typeface="맑은 고딕" panose="02110004020202020204"/>
+        <a:ea typeface=""/>
+        <a:cs typeface=""/>
+        <a:font script="Jpan" typeface="游ゴシック"/>
+        <a:font script="Hang" typeface="맑은 고딕"/>
+        <a:font script="Hans" typeface="等线"/>
+        <a:font script="Hant" typeface="新細明體"/>
+        <a:font script="Arab" typeface="Arial"/>
+        <a:font script="Hebr" typeface="Arial"/>
+        <a:font script="Thai" typeface="Cordia New"/>
+        <a:font script="Ethi" typeface="Nyala"/>
+        <a:font script="Beng" typeface="Vrinda"/>
+        <a:font script="Gujr" typeface="Shruti"/>
+        <a:font script="Khmr" typeface="DaunPenh"/>
+        <a:font script="Knda" typeface="Tunga"/>
+        <a:font script="Guru" typeface="Raavi"/>
+        <a:font script="Cans" typeface="Euphemia"/>
+        <a:font script="Cher" typeface="Plantagenet Cherokee"/>
+        <a:font script="Yiii" typeface="Microsoft Yi Baiti"/>
+        <a:font script="Tibt" typeface="Microsoft Himalaya"/>
+        <a:font script="Thaa" typeface="MV Boli"/>
+        <a:font script="Deva" typeface="Mangal"/>
+        <a:font script="Telu" typeface="Gautami"/>
+        <a:font script="Taml" typeface="Latha"/>
+        <a:font script="Syrc" typeface="Estrangelo Edessa"/>
+        <a:font script="Orya" typeface="Kalinga"/>
+        <a:font script="Mlym" typeface="Kartika"/>
+        <a:font script="Laoo" typeface="DokChampa"/>
+        <a:font script="Sinh" typeface="Iskoola Pota"/>
+        <a:font script="Mong" typeface="Mongolian Baiti"/>
+        <a:font script="Viet" typeface="Arial"/>
+        <a:font script="Uigh" typeface="Microsoft Uighur"/>
+        <a:font script="Geor" typeface="Sylfaen"/>
+        <a:font script="Armn" typeface="Arial"/>
+        <a:font script="Bugi" typeface="Leelawadee UI"/>
+        <a:font script="Bopo" typeface="Microsoft JhengHei"/>
+        <a:font script="Java" typeface="Javanese Text"/>
+        <a:font script="Lisu" typeface="Segoe UI"/>
+        <a:font script="Mymr" typeface="Myanmar Text"/>
+        <a:font script="Nkoo" typeface="Ebrima"/>
+        <a:font script="Olck" typeface="Nirmala UI"/>
+        <a:font script="Osma" typeface="Ebrima"/>
+        <a:font script="Phag" typeface="Phagspa"/>
+        <a:font script="Syrn" typeface="Estrangelo Edessa"/>
+        <a:font script="Syrj" typeface="Estrangelo Edessa"/>
+        <a:font script="Syre" typeface="Estrangelo Edessa"/>
+        <a:font script="Sora" typeface="Nirmala UI"/>
+        <a:font script="Tale" typeface="Microsoft Tai Le"/>
+        <a:font script="Talu" typeface="Microsoft New Tai Lue"/>
+        <a:font script="Tfng" typeface="Ebrima"/>
+      </a:minorFont>
+    </a:fontScheme>
+    <a:fmtScheme name="Office">
+      <a:fillStyleLst>
+        <a:solidFill>
+          <a:schemeClr val="phClr"/>
+        </a:solidFill>
+        <a:gradFill rotWithShape="1">
+          <a:gsLst>
+            <a:gs pos="0">
+              <a:schemeClr val="phClr">
+                <a:lumMod val="110000"/>
+                <a:satMod val="105000"/>
+                <a:tint val="67000"/>
+              </a:schemeClr>
+            </a:gs>
+            <a:gs pos="50000">
+              <a:schemeClr val="phClr">
+                <a:lumMod val="105000"/>
+                <a:satMod val="103000"/>
+                <a:tint val="73000"/>
+              </a:schemeClr>
+            </a:gs>
+            <a:gs pos="100000">
+              <a:schemeClr val="phClr">
+                <a:lumMod val="105000"/>
+                <a:satMod val="109000"/>
+                <a:tint val="81000"/>
+              </a:schemeClr>
+            </a:gs>
+          </a:gsLst>
+          <a:lin ang="5400000" scaled="0"/>
+        </a:gradFill>
+        <a:gradFill rotWithShape="1">
+          <a:gsLst>
+            <a:gs pos="0">
+              <a:schemeClr val="phClr">
+                <a:satMod val="103000"/>
+                <a:lumMod val="102000"/>
+                <a:tint val="94000"/>
+              </a:schemeClr>
+            </a:gs>
+            <a:gs pos="50000">
+              <a:schemeClr val="phClr">
+                <a:satMod val="110000"/>
+                <a:lumMod val="100000"/>
+                <a:shade val="100000"/>
+              </a:schemeClr>
+            </a:gs>
+            <a:gs pos="100000">
+              <a:schemeClr val="phClr">
+                <a:lumMod val="99000"/>
+                <a:satMod val="120000"/>
+                <a:shade val="78000"/>
+              </a:schemeClr>
+            </a:gs>
+          </a:gsLst>
+          <a:lin ang="5400000" scaled="0"/>
+        </a:gradFill>
+      </a:fillStyleLst>
+      <a:lnStyleLst>
+        <a:ln w="12700" cap="flat" cmpd="sng" algn="ctr">
+          <a:solidFill>
+            <a:schemeClr val="phClr"/>
+          </a:solidFill>
+          <a:prstDash val="solid"/>
+          <a:miter lim="800000"/>
+        </a:ln>
+        <a:ln w="19050" cap="flat" cmpd="sng" algn="ctr">
+          <a:solidFill>
+            <a:schemeClr val="phClr"/>
+          </a:solidFill>
+          <a:prstDash val="solid"/>
+          <a:miter lim="800000"/>
+        </a:ln>
+        <a:ln w="25400" cap="flat" cmpd="sng" algn="ctr">
+          <a:solidFill>
+            <a:schemeClr val="phClr"/>
+          </a:solidFill>
+          <a:prstDash val="solid"/>
+          <a:miter lim="800000"/>
+        </a:ln>
+      </a:lnStyleLst>
+      <a:effectStyleLst>
+        <a:effectStyle>
+          <a:effectLst/>
+        </a:effectStyle>
+        <a:effectStyle>
+          <a:effectLst/>
+        </a:effectStyle>
+        <a:effectStyle>
+          <a:effectLst>
+            <a:outerShdw blurRad="57150" dist="19050" dir="5400000" algn="ctr" rotWithShape="0">
+              <a:srgbClr val="000000">
+                <a:alpha val="63000"/>
+              </a:srgbClr>
+            </a:outerShdw>
+          </a:effectLst>
+        </a:effectStyle>
+      </a:effectStyleLst>
+      <a:bgFillStyleLst>
+        <a:solidFill>
+          <a:schemeClr val="phClr"/>
+        </a:solidFill>
+        <a:solidFill>
+          <a:schemeClr val="phClr">
+            <a:tint val="95000"/>
+            <a:satMod val="170000"/>
+          </a:schemeClr>
+        </a:solidFill>
+        <a:gradFill rotWithShape="1">
+          <a:gsLst>
+            <a:gs pos="0">
+              <a:schemeClr val="phClr">
+                <a:tint val="93000"/>
+                <a:satMod val="150000"/>
+                <a:shade val="98000"/>
+                <a:lumMod val="102000"/>
+              </a:schemeClr>
+            </a:gs>
+            <a:gs pos="50000">
+              <a:schemeClr val="phClr">
+                <a:tint val="98000"/>
+                <a:satMod val="130000"/>
+                <a:shade val="90000"/>
+                <a:lumMod val="103000"/>
+              </a:schemeClr>
+            </a:gs>
+            <a:gs pos="100000">
+              <a:schemeClr val="phClr">
+                <a:shade val="63000"/>
+                <a:satMod val="120000"/>
+              </a:schemeClr>
+            </a:gs>
+          </a:gsLst>
+          <a:lin ang="5400000" scaled="0"/>
+        </a:gradFill>
+      </a:bgFillStyleLst>
+    </a:fmtScheme>
+  </a:themeElements>
+  <a:objectDefaults>
+    <a:lnDef>
+      <a:spPr/>
+      <a:bodyPr/>
+      <a:lstStyle/>
+      <a:style>
+        <a:lnRef idx="2">
+          <a:schemeClr val="accent1"/>
+        </a:lnRef>
+        <a:fillRef idx="0">
+          <a:schemeClr val="accent1"/>
+        </a:fillRef>
+        <a:effectRef idx="1">
+          <a:schemeClr val="accent1"/>
+        </a:effectRef>
+        <a:fontRef idx="minor">
+          <a:schemeClr val="tx1"/>
+        </a:fontRef>
+      </a:style>
+    </a:lnDef>
+  </a:objectDefaults>
+  <a:extraClrSchemeLst/>
+  <a:extLst>
+    <a:ext uri="{05A4C25C-085E-4340-85A3-A5531E510DB2}">
+      <thm15:themeFamily xmlns:thm15="http://schemas.microsoft.com/office/thememl/2012/main" name="Office Theme" id="{2E142A2C-CD16-42D6-873A-C26D2A0506FA}" vid="{1BDDFF52-6CD6-40A5-AB3C-68EB2F1E4D0A}"/>
+    </a:ext>
+  </a:extLst>
+</a:theme>
 </file>
--- a/PPT/template/주차별 발표.pptx
+++ b/PPT/template/주차별 발표.pptx
@@ -666,7 +666,7 @@
           <p:cNvPr id="2" name="제목 1">
             <a:extLst>
               <a:ext uri="{FF2B5EF4-FFF2-40B4-BE49-F238E27FC236}">
-                <a16:creationId xmlns:a16="http://schemas.microsoft.com/office/drawing/2014/main" id="{47C6A88D-EDAF-CEC2-712F-FA6A7E4FF53C}"/>
+                <a16:creationId xmlns:a16="http://schemas.microsoft.com/office/drawing/2014/main" xmlns="" id="{47C6A88D-EDAF-CEC2-712F-FA6A7E4FF53C}"/>
               </a:ext>
             </a:extLst>
           </p:cNvPr>
@@ -703,7 +703,7 @@
           <p:cNvPr id="3" name="부제목 2">
             <a:extLst>
               <a:ext uri="{FF2B5EF4-FFF2-40B4-BE49-F238E27FC236}">
-                <a16:creationId xmlns:a16="http://schemas.microsoft.com/office/drawing/2014/main" id="{1F7A10E8-4E5D-A611-E577-EBA5676A507E}"/>
+                <a16:creationId xmlns:a16="http://schemas.microsoft.com/office/drawing/2014/main" xmlns="" id="{1F7A10E8-4E5D-A611-E577-EBA5676A507E}"/>
               </a:ext>
             </a:extLst>
           </p:cNvPr>
@@ -773,7 +773,7 @@
           <p:cNvPr id="4" name="날짜 개체 틀 3">
             <a:extLst>
               <a:ext uri="{FF2B5EF4-FFF2-40B4-BE49-F238E27FC236}">
-                <a16:creationId xmlns:a16="http://schemas.microsoft.com/office/drawing/2014/main" id="{FA4EF1CD-FA03-944B-0EC0-2AABE3B0C471}"/>
+                <a16:creationId xmlns:a16="http://schemas.microsoft.com/office/drawing/2014/main" xmlns="" id="{FA4EF1CD-FA03-944B-0EC0-2AABE3B0C471}"/>
               </a:ext>
             </a:extLst>
           </p:cNvPr>
@@ -802,7 +802,7 @@
           <p:cNvPr id="5" name="바닥글 개체 틀 4">
             <a:extLst>
               <a:ext uri="{FF2B5EF4-FFF2-40B4-BE49-F238E27FC236}">
-                <a16:creationId xmlns:a16="http://schemas.microsoft.com/office/drawing/2014/main" id="{D7E1904F-F41F-7809-481D-7E79FCD2132E}"/>
+                <a16:creationId xmlns:a16="http://schemas.microsoft.com/office/drawing/2014/main" xmlns="" id="{D7E1904F-F41F-7809-481D-7E79FCD2132E}"/>
               </a:ext>
             </a:extLst>
           </p:cNvPr>
@@ -827,7 +827,7 @@
           <p:cNvPr id="6" name="슬라이드 번호 개체 틀 5">
             <a:extLst>
               <a:ext uri="{FF2B5EF4-FFF2-40B4-BE49-F238E27FC236}">
-                <a16:creationId xmlns:a16="http://schemas.microsoft.com/office/drawing/2014/main" id="{46C721DE-9DEE-BACB-B354-8E260F43215D}"/>
+                <a16:creationId xmlns:a16="http://schemas.microsoft.com/office/drawing/2014/main" xmlns="" id="{46C721DE-9DEE-BACB-B354-8E260F43215D}"/>
               </a:ext>
             </a:extLst>
           </p:cNvPr>
@@ -886,7 +886,7 @@
           <p:cNvPr id="2" name="제목 1">
             <a:extLst>
               <a:ext uri="{FF2B5EF4-FFF2-40B4-BE49-F238E27FC236}">
-                <a16:creationId xmlns:a16="http://schemas.microsoft.com/office/drawing/2014/main" id="{8EC6E50E-2954-B290-1563-C4936B9E8431}"/>
+                <a16:creationId xmlns:a16="http://schemas.microsoft.com/office/drawing/2014/main" xmlns="" id="{8EC6E50E-2954-B290-1563-C4936B9E8431}"/>
               </a:ext>
             </a:extLst>
           </p:cNvPr>
@@ -914,7 +914,7 @@
           <p:cNvPr id="3" name="세로 텍스트 개체 틀 2">
             <a:extLst>
               <a:ext uri="{FF2B5EF4-FFF2-40B4-BE49-F238E27FC236}">
-                <a16:creationId xmlns:a16="http://schemas.microsoft.com/office/drawing/2014/main" id="{5B6A99E4-1414-E268-7B72-A4C896708AE3}"/>
+                <a16:creationId xmlns:a16="http://schemas.microsoft.com/office/drawing/2014/main" xmlns="" id="{5B6A99E4-1414-E268-7B72-A4C896708AE3}"/>
               </a:ext>
             </a:extLst>
           </p:cNvPr>
@@ -971,7 +971,7 @@
           <p:cNvPr id="4" name="날짜 개체 틀 3">
             <a:extLst>
               <a:ext uri="{FF2B5EF4-FFF2-40B4-BE49-F238E27FC236}">
-                <a16:creationId xmlns:a16="http://schemas.microsoft.com/office/drawing/2014/main" id="{3A9BB3C2-1FA4-4151-9ADB-996284F1BDE2}"/>
+                <a16:creationId xmlns:a16="http://schemas.microsoft.com/office/drawing/2014/main" xmlns="" id="{3A9BB3C2-1FA4-4151-9ADB-996284F1BDE2}"/>
               </a:ext>
             </a:extLst>
           </p:cNvPr>
@@ -1000,7 +1000,7 @@
           <p:cNvPr id="5" name="바닥글 개체 틀 4">
             <a:extLst>
               <a:ext uri="{FF2B5EF4-FFF2-40B4-BE49-F238E27FC236}">
-                <a16:creationId xmlns:a16="http://schemas.microsoft.com/office/drawing/2014/main" id="{8A27C81A-BE4E-27CE-6CE4-0AE5876D470A}"/>
+                <a16:creationId xmlns:a16="http://schemas.microsoft.com/office/drawing/2014/main" xmlns="" id="{8A27C81A-BE4E-27CE-6CE4-0AE5876D470A}"/>
               </a:ext>
             </a:extLst>
           </p:cNvPr>
@@ -1025,7 +1025,7 @@
           <p:cNvPr id="6" name="슬라이드 번호 개체 틀 5">
             <a:extLst>
               <a:ext uri="{FF2B5EF4-FFF2-40B4-BE49-F238E27FC236}">
-                <a16:creationId xmlns:a16="http://schemas.microsoft.com/office/drawing/2014/main" id="{B4E3C814-C417-2E3F-F02B-1B9ED6941FBD}"/>
+                <a16:creationId xmlns:a16="http://schemas.microsoft.com/office/drawing/2014/main" xmlns="" id="{B4E3C814-C417-2E3F-F02B-1B9ED6941FBD}"/>
               </a:ext>
             </a:extLst>
           </p:cNvPr>
@@ -1084,7 +1084,7 @@
           <p:cNvPr id="2" name="세로 제목 1">
             <a:extLst>
               <a:ext uri="{FF2B5EF4-FFF2-40B4-BE49-F238E27FC236}">
-                <a16:creationId xmlns:a16="http://schemas.microsoft.com/office/drawing/2014/main" id="{AC1D687F-54E9-57A3-FDA2-5A8060E79A80}"/>
+                <a16:creationId xmlns:a16="http://schemas.microsoft.com/office/drawing/2014/main" xmlns="" id="{AC1D687F-54E9-57A3-FDA2-5A8060E79A80}"/>
               </a:ext>
             </a:extLst>
           </p:cNvPr>
@@ -1117,7 +1117,7 @@
           <p:cNvPr id="3" name="세로 텍스트 개체 틀 2">
             <a:extLst>
               <a:ext uri="{FF2B5EF4-FFF2-40B4-BE49-F238E27FC236}">
-                <a16:creationId xmlns:a16="http://schemas.microsoft.com/office/drawing/2014/main" id="{BC846A14-940B-8FE8-A769-3DABAE11AD25}"/>
+                <a16:creationId xmlns:a16="http://schemas.microsoft.com/office/drawing/2014/main" xmlns="" id="{BC846A14-940B-8FE8-A769-3DABAE11AD25}"/>
               </a:ext>
             </a:extLst>
           </p:cNvPr>
@@ -1179,7 +1179,7 @@
           <p:cNvPr id="4" name="날짜 개체 틀 3">
             <a:extLst>
               <a:ext uri="{FF2B5EF4-FFF2-40B4-BE49-F238E27FC236}">
-                <a16:creationId xmlns:a16="http://schemas.microsoft.com/office/drawing/2014/main" id="{393732A3-4427-5A76-3A9C-DBE87A4364DD}"/>
+                <a16:creationId xmlns:a16="http://schemas.microsoft.com/office/drawing/2014/main" xmlns="" id="{393732A3-4427-5A76-3A9C-DBE87A4364DD}"/>
               </a:ext>
             </a:extLst>
           </p:cNvPr>
@@ -1208,7 +1208,7 @@
           <p:cNvPr id="5" name="바닥글 개체 틀 4">
             <a:extLst>
               <a:ext uri="{FF2B5EF4-FFF2-40B4-BE49-F238E27FC236}">
-                <a16:creationId xmlns:a16="http://schemas.microsoft.com/office/drawing/2014/main" id="{16A5B672-F383-0FF5-2D72-72E1E7F0F0D3}"/>
+                <a16:creationId xmlns:a16="http://schemas.microsoft.com/office/drawing/2014/main" xmlns="" id="{16A5B672-F383-0FF5-2D72-72E1E7F0F0D3}"/>
               </a:ext>
             </a:extLst>
           </p:cNvPr>
@@ -1233,7 +1233,7 @@
           <p:cNvPr id="6" name="슬라이드 번호 개체 틀 5">
             <a:extLst>
               <a:ext uri="{FF2B5EF4-FFF2-40B4-BE49-F238E27FC236}">
-                <a16:creationId xmlns:a16="http://schemas.microsoft.com/office/drawing/2014/main" id="{DE28928A-9906-D889-A8B7-B97D729CDB76}"/>
+                <a16:creationId xmlns:a16="http://schemas.microsoft.com/office/drawing/2014/main" xmlns="" id="{DE28928A-9906-D889-A8B7-B97D729CDB76}"/>
               </a:ext>
             </a:extLst>
           </p:cNvPr>
@@ -1292,7 +1292,7 @@
           <p:cNvPr id="2" name="제목 1">
             <a:extLst>
               <a:ext uri="{FF2B5EF4-FFF2-40B4-BE49-F238E27FC236}">
-                <a16:creationId xmlns:a16="http://schemas.microsoft.com/office/drawing/2014/main" id="{54F5793F-94FE-56B0-E0CB-A317DA7FB4BC}"/>
+                <a16:creationId xmlns:a16="http://schemas.microsoft.com/office/drawing/2014/main" xmlns="" id="{54F5793F-94FE-56B0-E0CB-A317DA7FB4BC}"/>
               </a:ext>
             </a:extLst>
           </p:cNvPr>
@@ -1320,7 +1320,7 @@
           <p:cNvPr id="3" name="내용 개체 틀 2">
             <a:extLst>
               <a:ext uri="{FF2B5EF4-FFF2-40B4-BE49-F238E27FC236}">
-                <a16:creationId xmlns:a16="http://schemas.microsoft.com/office/drawing/2014/main" id="{BFAF79B8-2AD1-69C6-D4D5-21827C6802F8}"/>
+                <a16:creationId xmlns:a16="http://schemas.microsoft.com/office/drawing/2014/main" xmlns="" id="{BFAF79B8-2AD1-69C6-D4D5-21827C6802F8}"/>
               </a:ext>
             </a:extLst>
           </p:cNvPr>
@@ -1377,7 +1377,7 @@
           <p:cNvPr id="4" name="날짜 개체 틀 3">
             <a:extLst>
               <a:ext uri="{FF2B5EF4-FFF2-40B4-BE49-F238E27FC236}">
-                <a16:creationId xmlns:a16="http://schemas.microsoft.com/office/drawing/2014/main" id="{6718AF63-4F49-82B6-24FC-BB457FC964FC}"/>
+                <a16:creationId xmlns:a16="http://schemas.microsoft.com/office/drawing/2014/main" xmlns="" id="{6718AF63-4F49-82B6-24FC-BB457FC964FC}"/>
               </a:ext>
             </a:extLst>
           </p:cNvPr>
@@ -1406,7 +1406,7 @@
           <p:cNvPr id="5" name="바닥글 개체 틀 4">
             <a:extLst>
               <a:ext uri="{FF2B5EF4-FFF2-40B4-BE49-F238E27FC236}">
-                <a16:creationId xmlns:a16="http://schemas.microsoft.com/office/drawing/2014/main" id="{AA45FF19-25D7-1FF3-E311-2C2E07B26764}"/>
+                <a16:creationId xmlns:a16="http://schemas.microsoft.com/office/drawing/2014/main" xmlns="" id="{AA45FF19-25D7-1FF3-E311-2C2E07B26764}"/>
               </a:ext>
             </a:extLst>
           </p:cNvPr>
@@ -1431,7 +1431,7 @@
           <p:cNvPr id="6" name="슬라이드 번호 개체 틀 5">
             <a:extLst>
               <a:ext uri="{FF2B5EF4-FFF2-40B4-BE49-F238E27FC236}">
-                <a16:creationId xmlns:a16="http://schemas.microsoft.com/office/drawing/2014/main" id="{6F43D8BF-52A4-97EB-612B-F9899664EFD5}"/>
+                <a16:creationId xmlns:a16="http://schemas.microsoft.com/office/drawing/2014/main" xmlns="" id="{6F43D8BF-52A4-97EB-612B-F9899664EFD5}"/>
               </a:ext>
             </a:extLst>
           </p:cNvPr>
@@ -1490,7 +1490,7 @@
           <p:cNvPr id="2" name="제목 1">
             <a:extLst>
               <a:ext uri="{FF2B5EF4-FFF2-40B4-BE49-F238E27FC236}">
-                <a16:creationId xmlns:a16="http://schemas.microsoft.com/office/drawing/2014/main" id="{1EB95909-78E9-5BAC-68EA-7DCA2A1271F7}"/>
+                <a16:creationId xmlns:a16="http://schemas.microsoft.com/office/drawing/2014/main" xmlns="" id="{1EB95909-78E9-5BAC-68EA-7DCA2A1271F7}"/>
               </a:ext>
             </a:extLst>
           </p:cNvPr>
@@ -1527,7 +1527,7 @@
           <p:cNvPr id="3" name="텍스트 개체 틀 2">
             <a:extLst>
               <a:ext uri="{FF2B5EF4-FFF2-40B4-BE49-F238E27FC236}">
-                <a16:creationId xmlns:a16="http://schemas.microsoft.com/office/drawing/2014/main" id="{D6B98DAF-2A47-3ECD-807C-96FB70CF9854}"/>
+                <a16:creationId xmlns:a16="http://schemas.microsoft.com/office/drawing/2014/main" xmlns="" id="{D6B98DAF-2A47-3ECD-807C-96FB70CF9854}"/>
               </a:ext>
             </a:extLst>
           </p:cNvPr>
@@ -1652,7 +1652,7 @@
           <p:cNvPr id="4" name="날짜 개체 틀 3">
             <a:extLst>
               <a:ext uri="{FF2B5EF4-FFF2-40B4-BE49-F238E27FC236}">
-                <a16:creationId xmlns:a16="http://schemas.microsoft.com/office/drawing/2014/main" id="{A3AD9670-C268-56FC-281A-FE1F59541EB9}"/>
+                <a16:creationId xmlns:a16="http://schemas.microsoft.com/office/drawing/2014/main" xmlns="" id="{A3AD9670-C268-56FC-281A-FE1F59541EB9}"/>
               </a:ext>
             </a:extLst>
           </p:cNvPr>
@@ -1681,7 +1681,7 @@
           <p:cNvPr id="5" name="바닥글 개체 틀 4">
             <a:extLst>
               <a:ext uri="{FF2B5EF4-FFF2-40B4-BE49-F238E27FC236}">
-                <a16:creationId xmlns:a16="http://schemas.microsoft.com/office/drawing/2014/main" id="{A4946F37-FE38-E38E-7339-DC6E4EFA5B3B}"/>
+                <a16:creationId xmlns:a16="http://schemas.microsoft.com/office/drawing/2014/main" xmlns="" id="{A4946F37-FE38-E38E-7339-DC6E4EFA5B3B}"/>
               </a:ext>
             </a:extLst>
           </p:cNvPr>
@@ -1706,7 +1706,7 @@
           <p:cNvPr id="6" name="슬라이드 번호 개체 틀 5">
             <a:extLst>
               <a:ext uri="{FF2B5EF4-FFF2-40B4-BE49-F238E27FC236}">
-                <a16:creationId xmlns:a16="http://schemas.microsoft.com/office/drawing/2014/main" id="{7C17C39B-6348-28CC-59AF-B1A65BE2F149}"/>
+                <a16:creationId xmlns:a16="http://schemas.microsoft.com/office/drawing/2014/main" xmlns="" id="{7C17C39B-6348-28CC-59AF-B1A65BE2F149}"/>
               </a:ext>
             </a:extLst>
           </p:cNvPr>
@@ -1765,7 +1765,7 @@
           <p:cNvPr id="2" name="제목 1">
             <a:extLst>
               <a:ext uri="{FF2B5EF4-FFF2-40B4-BE49-F238E27FC236}">
-                <a16:creationId xmlns:a16="http://schemas.microsoft.com/office/drawing/2014/main" id="{0D0EFA0F-10D7-865F-1370-4EA34C786709}"/>
+                <a16:creationId xmlns:a16="http://schemas.microsoft.com/office/drawing/2014/main" xmlns="" id="{0D0EFA0F-10D7-865F-1370-4EA34C786709}"/>
               </a:ext>
             </a:extLst>
           </p:cNvPr>
@@ -1793,7 +1793,7 @@
           <p:cNvPr id="3" name="내용 개체 틀 2">
             <a:extLst>
               <a:ext uri="{FF2B5EF4-FFF2-40B4-BE49-F238E27FC236}">
-                <a16:creationId xmlns:a16="http://schemas.microsoft.com/office/drawing/2014/main" id="{0498CDB5-9D2B-5F68-9DD8-ED20454B1044}"/>
+                <a16:creationId xmlns:a16="http://schemas.microsoft.com/office/drawing/2014/main" xmlns="" id="{0498CDB5-9D2B-5F68-9DD8-ED20454B1044}"/>
               </a:ext>
             </a:extLst>
           </p:cNvPr>
@@ -1855,7 +1855,7 @@
           <p:cNvPr id="4" name="내용 개체 틀 3">
             <a:extLst>
               <a:ext uri="{FF2B5EF4-FFF2-40B4-BE49-F238E27FC236}">
-                <a16:creationId xmlns:a16="http://schemas.microsoft.com/office/drawing/2014/main" id="{570EB1B7-8EDE-2794-EA53-E0C1972FAF1A}"/>
+                <a16:creationId xmlns:a16="http://schemas.microsoft.com/office/drawing/2014/main" xmlns="" id="{570EB1B7-8EDE-2794-EA53-E0C1972FAF1A}"/>
               </a:ext>
             </a:extLst>
           </p:cNvPr>
@@ -1917,7 +1917,7 @@
           <p:cNvPr id="5" name="날짜 개체 틀 4">
             <a:extLst>
               <a:ext uri="{FF2B5EF4-FFF2-40B4-BE49-F238E27FC236}">
-                <a16:creationId xmlns:a16="http://schemas.microsoft.com/office/drawing/2014/main" id="{31FBCFA4-CF51-706E-F9F0-8B66CA1A0E1B}"/>
+                <a16:creationId xmlns:a16="http://schemas.microsoft.com/office/drawing/2014/main" xmlns="" id="{31FBCFA4-CF51-706E-F9F0-8B66CA1A0E1B}"/>
               </a:ext>
             </a:extLst>
           </p:cNvPr>
@@ -1946,7 +1946,7 @@
           <p:cNvPr id="6" name="바닥글 개체 틀 5">
             <a:extLst>
               <a:ext uri="{FF2B5EF4-FFF2-40B4-BE49-F238E27FC236}">
-                <a16:creationId xmlns:a16="http://schemas.microsoft.com/office/drawing/2014/main" id="{FD56636A-469F-7FE9-480E-955BCC0E6D70}"/>
+                <a16:creationId xmlns:a16="http://schemas.microsoft.com/office/drawing/2014/main" xmlns="" id="{FD56636A-469F-7FE9-480E-955BCC0E6D70}"/>
               </a:ext>
             </a:extLst>
           </p:cNvPr>
@@ -1971,7 +1971,7 @@
           <p:cNvPr id="7" name="슬라이드 번호 개체 틀 6">
             <a:extLst>
               <a:ext uri="{FF2B5EF4-FFF2-40B4-BE49-F238E27FC236}">
-                <a16:creationId xmlns:a16="http://schemas.microsoft.com/office/drawing/2014/main" id="{3971D272-167D-EE36-E685-CD8BFE8CC9A6}"/>
+                <a16:creationId xmlns:a16="http://schemas.microsoft.com/office/drawing/2014/main" xmlns="" id="{3971D272-167D-EE36-E685-CD8BFE8CC9A6}"/>
               </a:ext>
             </a:extLst>
           </p:cNvPr>
@@ -2030,7 +2030,7 @@
           <p:cNvPr id="2" name="제목 1">
             <a:extLst>
               <a:ext uri="{FF2B5EF4-FFF2-40B4-BE49-F238E27FC236}">
-                <a16:creationId xmlns:a16="http://schemas.microsoft.com/office/drawing/2014/main" id="{9AC7230E-A2F3-4027-B6F6-9C5C289B1314}"/>
+                <a16:creationId xmlns:a16="http://schemas.microsoft.com/office/drawing/2014/main" xmlns="" id="{9AC7230E-A2F3-4027-B6F6-9C5C289B1314}"/>
               </a:ext>
             </a:extLst>
           </p:cNvPr>
@@ -2063,7 +2063,7 @@
           <p:cNvPr id="3" name="텍스트 개체 틀 2">
             <a:extLst>
               <a:ext uri="{FF2B5EF4-FFF2-40B4-BE49-F238E27FC236}">
-                <a16:creationId xmlns:a16="http://schemas.microsoft.com/office/drawing/2014/main" id="{0C685356-7419-AD93-377A-8D9A0293423E}"/>
+                <a16:creationId xmlns:a16="http://schemas.microsoft.com/office/drawing/2014/main" xmlns="" id="{0C685356-7419-AD93-377A-8D9A0293423E}"/>
               </a:ext>
             </a:extLst>
           </p:cNvPr>
@@ -2134,7 +2134,7 @@
           <p:cNvPr id="4" name="내용 개체 틀 3">
             <a:extLst>
               <a:ext uri="{FF2B5EF4-FFF2-40B4-BE49-F238E27FC236}">
-                <a16:creationId xmlns:a16="http://schemas.microsoft.com/office/drawing/2014/main" id="{CC36E6CA-94A6-3223-C91A-F6E9648C8EAD}"/>
+                <a16:creationId xmlns:a16="http://schemas.microsoft.com/office/drawing/2014/main" xmlns="" id="{CC36E6CA-94A6-3223-C91A-F6E9648C8EAD}"/>
               </a:ext>
             </a:extLst>
           </p:cNvPr>
@@ -2196,7 +2196,7 @@
           <p:cNvPr id="5" name="텍스트 개체 틀 4">
             <a:extLst>
               <a:ext uri="{FF2B5EF4-FFF2-40B4-BE49-F238E27FC236}">
-                <a16:creationId xmlns:a16="http://schemas.microsoft.com/office/drawing/2014/main" id="{F4DFD790-787A-88A3-300F-C173DAD2E1AF}"/>
+                <a16:creationId xmlns:a16="http://schemas.microsoft.com/office/drawing/2014/main" xmlns="" id="{F4DFD790-787A-88A3-300F-C173DAD2E1AF}"/>
               </a:ext>
             </a:extLst>
           </p:cNvPr>
@@ -2267,7 +2267,7 @@
           <p:cNvPr id="6" name="내용 개체 틀 5">
             <a:extLst>
               <a:ext uri="{FF2B5EF4-FFF2-40B4-BE49-F238E27FC236}">
-                <a16:creationId xmlns:a16="http://schemas.microsoft.com/office/drawing/2014/main" id="{012AE83D-2990-A6E4-CC9C-06D342A67C09}"/>
+                <a16:creationId xmlns:a16="http://schemas.microsoft.com/office/drawing/2014/main" xmlns="" id="{012AE83D-2990-A6E4-CC9C-06D342A67C09}"/>
               </a:ext>
             </a:extLst>
           </p:cNvPr>
@@ -2329,7 +2329,7 @@
           <p:cNvPr id="7" name="날짜 개체 틀 6">
             <a:extLst>
               <a:ext uri="{FF2B5EF4-FFF2-40B4-BE49-F238E27FC236}">
-                <a16:creationId xmlns:a16="http://schemas.microsoft.com/office/drawing/2014/main" id="{3C11F8C3-5AD3-730B-8ADB-304185DAA67E}"/>
+                <a16:creationId xmlns:a16="http://schemas.microsoft.com/office/drawing/2014/main" xmlns="" id="{3C11F8C3-5AD3-730B-8ADB-304185DAA67E}"/>
               </a:ext>
             </a:extLst>
           </p:cNvPr>
@@ -2358,7 +2358,7 @@
           <p:cNvPr id="8" name="바닥글 개체 틀 7">
             <a:extLst>
               <a:ext uri="{FF2B5EF4-FFF2-40B4-BE49-F238E27FC236}">
-                <a16:creationId xmlns:a16="http://schemas.microsoft.com/office/drawing/2014/main" id="{EF36ABA7-53C4-C11E-CC9D-F5E59BDBBD9B}"/>
+                <a16:creationId xmlns:a16="http://schemas.microsoft.com/office/drawing/2014/main" xmlns="" id="{EF36ABA7-53C4-C11E-CC9D-F5E59BDBBD9B}"/>
               </a:ext>
             </a:extLst>
           </p:cNvPr>
@@ -2383,7 +2383,7 @@
           <p:cNvPr id="9" name="슬라이드 번호 개체 틀 8">
             <a:extLst>
               <a:ext uri="{FF2B5EF4-FFF2-40B4-BE49-F238E27FC236}">
-                <a16:creationId xmlns:a16="http://schemas.microsoft.com/office/drawing/2014/main" id="{5E29E145-D4AE-F9FB-A218-47B323C43E03}"/>
+                <a16:creationId xmlns:a16="http://schemas.microsoft.com/office/drawing/2014/main" xmlns="" id="{5E29E145-D4AE-F9FB-A218-47B323C43E03}"/>
               </a:ext>
             </a:extLst>
           </p:cNvPr>
@@ -2442,7 +2442,7 @@
           <p:cNvPr id="2" name="제목 1">
             <a:extLst>
               <a:ext uri="{FF2B5EF4-FFF2-40B4-BE49-F238E27FC236}">
-                <a16:creationId xmlns:a16="http://schemas.microsoft.com/office/drawing/2014/main" id="{13D855E6-5AD7-B657-346A-38D87715A5E7}"/>
+                <a16:creationId xmlns:a16="http://schemas.microsoft.com/office/drawing/2014/main" xmlns="" id="{13D855E6-5AD7-B657-346A-38D87715A5E7}"/>
               </a:ext>
             </a:extLst>
           </p:cNvPr>
@@ -2470,7 +2470,7 @@
           <p:cNvPr id="3" name="날짜 개체 틀 2">
             <a:extLst>
               <a:ext uri="{FF2B5EF4-FFF2-40B4-BE49-F238E27FC236}">
-                <a16:creationId xmlns:a16="http://schemas.microsoft.com/office/drawing/2014/main" id="{F3052B06-09E1-1CD0-A032-AEB30F69A0E7}"/>
+                <a16:creationId xmlns:a16="http://schemas.microsoft.com/office/drawing/2014/main" xmlns="" id="{F3052B06-09E1-1CD0-A032-AEB30F69A0E7}"/>
               </a:ext>
             </a:extLst>
           </p:cNvPr>
@@ -2499,7 +2499,7 @@
           <p:cNvPr id="4" name="바닥글 개체 틀 3">
             <a:extLst>
               <a:ext uri="{FF2B5EF4-FFF2-40B4-BE49-F238E27FC236}">
-                <a16:creationId xmlns:a16="http://schemas.microsoft.com/office/drawing/2014/main" id="{DE18691A-8582-987D-DF06-E6D8B618E7BB}"/>
+                <a16:creationId xmlns:a16="http://schemas.microsoft.com/office/drawing/2014/main" xmlns="" id="{DE18691A-8582-987D-DF06-E6D8B618E7BB}"/>
               </a:ext>
             </a:extLst>
           </p:cNvPr>
@@ -2524,7 +2524,7 @@
           <p:cNvPr id="5" name="슬라이드 번호 개체 틀 4">
             <a:extLst>
               <a:ext uri="{FF2B5EF4-FFF2-40B4-BE49-F238E27FC236}">
-                <a16:creationId xmlns:a16="http://schemas.microsoft.com/office/drawing/2014/main" id="{6F997ACE-7D00-7B35-1F16-F56C5450EF85}"/>
+                <a16:creationId xmlns:a16="http://schemas.microsoft.com/office/drawing/2014/main" xmlns="" id="{6F997ACE-7D00-7B35-1F16-F56C5450EF85}"/>
               </a:ext>
             </a:extLst>
           </p:cNvPr>
@@ -2583,7 +2583,7 @@
           <p:cNvPr id="2" name="날짜 개체 틀 1">
             <a:extLst>
               <a:ext uri="{FF2B5EF4-FFF2-40B4-BE49-F238E27FC236}">
-                <a16:creationId xmlns:a16="http://schemas.microsoft.com/office/drawing/2014/main" id="{2703D88F-9D50-1761-731E-68DD1FC6B740}"/>
+                <a16:creationId xmlns:a16="http://schemas.microsoft.com/office/drawing/2014/main" xmlns="" id="{2703D88F-9D50-1761-731E-68DD1FC6B740}"/>
               </a:ext>
             </a:extLst>
           </p:cNvPr>
@@ -2612,7 +2612,7 @@
           <p:cNvPr id="3" name="바닥글 개체 틀 2">
             <a:extLst>
               <a:ext uri="{FF2B5EF4-FFF2-40B4-BE49-F238E27FC236}">
-                <a16:creationId xmlns:a16="http://schemas.microsoft.com/office/drawing/2014/main" id="{70793086-842E-7906-6019-4284A9E469F4}"/>
+                <a16:creationId xmlns:a16="http://schemas.microsoft.com/office/drawing/2014/main" xmlns="" id="{70793086-842E-7906-6019-4284A9E469F4}"/>
               </a:ext>
             </a:extLst>
           </p:cNvPr>
@@ -2637,7 +2637,7 @@
           <p:cNvPr id="4" name="슬라이드 번호 개체 틀 3">
             <a:extLst>
               <a:ext uri="{FF2B5EF4-FFF2-40B4-BE49-F238E27FC236}">
-                <a16:creationId xmlns:a16="http://schemas.microsoft.com/office/drawing/2014/main" id="{6D4FE3DE-7F26-4352-74EE-A720C7AF5564}"/>
+                <a16:creationId xmlns:a16="http://schemas.microsoft.com/office/drawing/2014/main" xmlns="" id="{6D4FE3DE-7F26-4352-74EE-A720C7AF5564}"/>
               </a:ext>
             </a:extLst>
           </p:cNvPr>
@@ -2696,7 +2696,7 @@
           <p:cNvPr id="2" name="제목 1">
             <a:extLst>
               <a:ext uri="{FF2B5EF4-FFF2-40B4-BE49-F238E27FC236}">
-                <a16:creationId xmlns:a16="http://schemas.microsoft.com/office/drawing/2014/main" id="{0AFB6F63-D5C7-EB4A-A651-8DA5561AD0DC}"/>
+                <a16:creationId xmlns:a16="http://schemas.microsoft.com/office/drawing/2014/main" xmlns="" id="{0AFB6F63-D5C7-EB4A-A651-8DA5561AD0DC}"/>
               </a:ext>
             </a:extLst>
           </p:cNvPr>
@@ -2733,7 +2733,7 @@
           <p:cNvPr id="3" name="내용 개체 틀 2">
             <a:extLst>
               <a:ext uri="{FF2B5EF4-FFF2-40B4-BE49-F238E27FC236}">
-                <a16:creationId xmlns:a16="http://schemas.microsoft.com/office/drawing/2014/main" id="{2000FB2D-0CF3-1A3C-E704-F8CA96C2D5D5}"/>
+                <a16:creationId xmlns:a16="http://schemas.microsoft.com/office/drawing/2014/main" xmlns="" id="{2000FB2D-0CF3-1A3C-E704-F8CA96C2D5D5}"/>
               </a:ext>
             </a:extLst>
           </p:cNvPr>
@@ -2823,7 +2823,7 @@
           <p:cNvPr id="4" name="텍스트 개체 틀 3">
             <a:extLst>
               <a:ext uri="{FF2B5EF4-FFF2-40B4-BE49-F238E27FC236}">
-                <a16:creationId xmlns:a16="http://schemas.microsoft.com/office/drawing/2014/main" id="{88C3C47D-E633-BB5D-0FA3-41A5E3C28A6A}"/>
+                <a16:creationId xmlns:a16="http://schemas.microsoft.com/office/drawing/2014/main" xmlns="" id="{88C3C47D-E633-BB5D-0FA3-41A5E3C28A6A}"/>
               </a:ext>
             </a:extLst>
           </p:cNvPr>
@@ -2894,7 +2894,7 @@
           <p:cNvPr id="5" name="날짜 개체 틀 4">
             <a:extLst>
               <a:ext uri="{FF2B5EF4-FFF2-40B4-BE49-F238E27FC236}">
-                <a16:creationId xmlns:a16="http://schemas.microsoft.com/office/drawing/2014/main" id="{603DA118-0D2F-73A1-6311-85E95462C569}"/>
+                <a16:creationId xmlns:a16="http://schemas.microsoft.com/office/drawing/2014/main" xmlns="" id="{603DA118-0D2F-73A1-6311-85E95462C569}"/>
               </a:ext>
             </a:extLst>
           </p:cNvPr>
@@ -2923,7 +2923,7 @@
           <p:cNvPr id="6" name="바닥글 개체 틀 5">
             <a:extLst>
               <a:ext uri="{FF2B5EF4-FFF2-40B4-BE49-F238E27FC236}">
-                <a16:creationId xmlns:a16="http://schemas.microsoft.com/office/drawing/2014/main" id="{DE46749A-348F-886F-32BD-A562F1A2A3B9}"/>
+                <a16:creationId xmlns:a16="http://schemas.microsoft.com/office/drawing/2014/main" xmlns="" id="{DE46749A-348F-886F-32BD-A562F1A2A3B9}"/>
               </a:ext>
             </a:extLst>
           </p:cNvPr>
@@ -2948,7 +2948,7 @@
           <p:cNvPr id="7" name="슬라이드 번호 개체 틀 6">
             <a:extLst>
               <a:ext uri="{FF2B5EF4-FFF2-40B4-BE49-F238E27FC236}">
-                <a16:creationId xmlns:a16="http://schemas.microsoft.com/office/drawing/2014/main" id="{0BF22D09-FBE9-294C-014E-9A808723A1A7}"/>
+                <a16:creationId xmlns:a16="http://schemas.microsoft.com/office/drawing/2014/main" xmlns="" id="{0BF22D09-FBE9-294C-014E-9A808723A1A7}"/>
               </a:ext>
             </a:extLst>
           </p:cNvPr>
@@ -3007,7 +3007,7 @@
           <p:cNvPr id="2" name="제목 1">
             <a:extLst>
               <a:ext uri="{FF2B5EF4-FFF2-40B4-BE49-F238E27FC236}">
-                <a16:creationId xmlns:a16="http://schemas.microsoft.com/office/drawing/2014/main" id="{DA50C132-3A30-7E9C-0BBB-1CD1A789CE68}"/>
+                <a16:creationId xmlns:a16="http://schemas.microsoft.com/office/drawing/2014/main" xmlns="" id="{DA50C132-3A30-7E9C-0BBB-1CD1A789CE68}"/>
               </a:ext>
             </a:extLst>
           </p:cNvPr>
@@ -3044,7 +3044,7 @@
           <p:cNvPr id="3" name="그림 개체 틀 2">
             <a:extLst>
               <a:ext uri="{FF2B5EF4-FFF2-40B4-BE49-F238E27FC236}">
-                <a16:creationId xmlns:a16="http://schemas.microsoft.com/office/drawing/2014/main" id="{2F31776A-D32D-34F5-8A99-A26F4F6535B9}"/>
+                <a16:creationId xmlns:a16="http://schemas.microsoft.com/office/drawing/2014/main" xmlns="" id="{2F31776A-D32D-34F5-8A99-A26F4F6535B9}"/>
               </a:ext>
             </a:extLst>
           </p:cNvPr>
@@ -3111,7 +3111,7 @@
           <p:cNvPr id="4" name="텍스트 개체 틀 3">
             <a:extLst>
               <a:ext uri="{FF2B5EF4-FFF2-40B4-BE49-F238E27FC236}">
-                <a16:creationId xmlns:a16="http://schemas.microsoft.com/office/drawing/2014/main" id="{3E500BF3-C366-20F6-6257-8233A0794521}"/>
+                <a16:creationId xmlns:a16="http://schemas.microsoft.com/office/drawing/2014/main" xmlns="" id="{3E500BF3-C366-20F6-6257-8233A0794521}"/>
               </a:ext>
             </a:extLst>
           </p:cNvPr>
@@ -3182,7 +3182,7 @@
           <p:cNvPr id="5" name="날짜 개체 틀 4">
             <a:extLst>
               <a:ext uri="{FF2B5EF4-FFF2-40B4-BE49-F238E27FC236}">
-                <a16:creationId xmlns:a16="http://schemas.microsoft.com/office/drawing/2014/main" id="{DB1C119C-B590-D055-6B10-AAE861F0D2B1}"/>
+                <a16:creationId xmlns:a16="http://schemas.microsoft.com/office/drawing/2014/main" xmlns="" id="{DB1C119C-B590-D055-6B10-AAE861F0D2B1}"/>
               </a:ext>
             </a:extLst>
           </p:cNvPr>
@@ -3211,7 +3211,7 @@
           <p:cNvPr id="6" name="바닥글 개체 틀 5">
             <a:extLst>
               <a:ext uri="{FF2B5EF4-FFF2-40B4-BE49-F238E27FC236}">
-                <a16:creationId xmlns:a16="http://schemas.microsoft.com/office/drawing/2014/main" id="{00064F92-4550-973E-464E-89CA3E7EED4F}"/>
+                <a16:creationId xmlns:a16="http://schemas.microsoft.com/office/drawing/2014/main" xmlns="" id="{00064F92-4550-973E-464E-89CA3E7EED4F}"/>
               </a:ext>
             </a:extLst>
           </p:cNvPr>
@@ -3236,7 +3236,7 @@
           <p:cNvPr id="7" name="슬라이드 번호 개체 틀 6">
             <a:extLst>
               <a:ext uri="{FF2B5EF4-FFF2-40B4-BE49-F238E27FC236}">
-                <a16:creationId xmlns:a16="http://schemas.microsoft.com/office/drawing/2014/main" id="{708384D1-792D-8EA8-718E-F756CEE623A7}"/>
+                <a16:creationId xmlns:a16="http://schemas.microsoft.com/office/drawing/2014/main" xmlns="" id="{708384D1-792D-8EA8-718E-F756CEE623A7}"/>
               </a:ext>
             </a:extLst>
           </p:cNvPr>
@@ -3300,7 +3300,7 @@
           <p:cNvPr id="2" name="제목 개체 틀 1">
             <a:extLst>
               <a:ext uri="{FF2B5EF4-FFF2-40B4-BE49-F238E27FC236}">
-                <a16:creationId xmlns:a16="http://schemas.microsoft.com/office/drawing/2014/main" id="{C0AC0570-6E75-D8C0-582D-3A448969CF8B}"/>
+                <a16:creationId xmlns:a16="http://schemas.microsoft.com/office/drawing/2014/main" xmlns="" id="{C0AC0570-6E75-D8C0-582D-3A448969CF8B}"/>
               </a:ext>
             </a:extLst>
           </p:cNvPr>
@@ -3338,7 +3338,7 @@
           <p:cNvPr id="3" name="텍스트 개체 틀 2">
             <a:extLst>
               <a:ext uri="{FF2B5EF4-FFF2-40B4-BE49-F238E27FC236}">
-                <a16:creationId xmlns:a16="http://schemas.microsoft.com/office/drawing/2014/main" id="{79ADFDDF-DF3C-19FA-0ED8-5D640C08DB4B}"/>
+                <a16:creationId xmlns:a16="http://schemas.microsoft.com/office/drawing/2014/main" xmlns="" id="{79ADFDDF-DF3C-19FA-0ED8-5D640C08DB4B}"/>
               </a:ext>
             </a:extLst>
           </p:cNvPr>
@@ -3405,7 +3405,7 @@
           <p:cNvPr id="4" name="날짜 개체 틀 3">
             <a:extLst>
               <a:ext uri="{FF2B5EF4-FFF2-40B4-BE49-F238E27FC236}">
-                <a16:creationId xmlns:a16="http://schemas.microsoft.com/office/drawing/2014/main" id="{AB9AC677-7913-29B2-30F7-969771FA5D05}"/>
+                <a16:creationId xmlns:a16="http://schemas.microsoft.com/office/drawing/2014/main" xmlns="" id="{AB9AC677-7913-29B2-30F7-969771FA5D05}"/>
               </a:ext>
             </a:extLst>
           </p:cNvPr>
@@ -3452,7 +3452,7 @@
           <p:cNvPr id="5" name="바닥글 개체 틀 4">
             <a:extLst>
               <a:ext uri="{FF2B5EF4-FFF2-40B4-BE49-F238E27FC236}">
-                <a16:creationId xmlns:a16="http://schemas.microsoft.com/office/drawing/2014/main" id="{3A6836E4-21B2-245A-8933-7F64F64AC382}"/>
+                <a16:creationId xmlns:a16="http://schemas.microsoft.com/office/drawing/2014/main" xmlns="" id="{3A6836E4-21B2-245A-8933-7F64F64AC382}"/>
               </a:ext>
             </a:extLst>
           </p:cNvPr>
@@ -3495,7 +3495,7 @@
           <p:cNvPr id="6" name="슬라이드 번호 개체 틀 5">
             <a:extLst>
               <a:ext uri="{FF2B5EF4-FFF2-40B4-BE49-F238E27FC236}">
-                <a16:creationId xmlns:a16="http://schemas.microsoft.com/office/drawing/2014/main" id="{6F2D0B4E-8F0D-F1B8-2A71-9862FC9749C5}"/>
+                <a16:creationId xmlns:a16="http://schemas.microsoft.com/office/drawing/2014/main" xmlns="" id="{6F2D0B4E-8F0D-F1B8-2A71-9862FC9749C5}"/>
               </a:ext>
             </a:extLst>
           </p:cNvPr>
@@ -3866,8 +3866,8 @@
         </p:nvSpPr>
         <p:spPr>
           <a:xfrm>
-            <a:off x="540190" y="2698430"/>
-            <a:ext cx="7417806" cy="738664"/>
+            <a:off x="540190" y="2959688"/>
+            <a:ext cx="7417806" cy="461665"/>
           </a:xfrm>
           <a:prstGeom prst="rect">
             <a:avLst/>
@@ -3880,48 +3880,107 @@
           <a:lstStyle/>
           <a:p>
             <a:r>
-              <a:rPr lang="ko-KR" altLang="en-US" sz="2400" dirty="0"/>
+              <a:rPr lang="ko-KR" altLang="en-US" sz="2400" dirty="0">
+                <a:latin typeface="나눔바른고딕" panose="020B0603020101020101" pitchFamily="34" charset="-127"/>
+                <a:ea typeface="나눔바른고딕" panose="020B0603020101020101" pitchFamily="34" charset="-127"/>
+              </a:rPr>
               <a:t>주제 </a:t>
             </a:r>
             <a:r>
-              <a:rPr lang="en-US" altLang="ko-KR" sz="2400" dirty="0"/>
+              <a:rPr lang="en-US" altLang="ko-KR" sz="2400" dirty="0">
+                <a:latin typeface="나눔바른고딕" panose="020B0603020101020101" pitchFamily="34" charset="-127"/>
+                <a:ea typeface="나눔바른고딕" panose="020B0603020101020101" pitchFamily="34" charset="-127"/>
+              </a:rPr>
               <a:t>: </a:t>
             </a:r>
             <a:r>
-              <a:rPr lang="ko-KR" altLang="en-US" sz="2400" dirty="0"/>
+              <a:rPr lang="ko-KR" altLang="en-US" sz="2400" dirty="0">
+                <a:latin typeface="나눔바른고딕" panose="020B0603020101020101" pitchFamily="34" charset="-127"/>
+                <a:ea typeface="나눔바른고딕" panose="020B0603020101020101" pitchFamily="34" charset="-127"/>
+              </a:rPr>
               <a:t>캐릭터 애니메이션 </a:t>
             </a:r>
             <a:r>
-              <a:rPr lang="ko-KR" altLang="en-US" sz="2400" dirty="0" err="1"/>
+              <a:rPr lang="ko-KR" altLang="en-US" sz="2400" dirty="0" err="1">
+                <a:latin typeface="나눔바른고딕" panose="020B0603020101020101" pitchFamily="34" charset="-127"/>
+                <a:ea typeface="나눔바른고딕" panose="020B0603020101020101" pitchFamily="34" charset="-127"/>
+              </a:rPr>
               <a:t>파쿠르</a:t>
             </a:r>
             <a:r>
-              <a:rPr lang="ko-KR" altLang="en-US" sz="2400" dirty="0"/>
+              <a:rPr lang="ko-KR" altLang="en-US" sz="2400" dirty="0">
+                <a:latin typeface="나눔바른고딕" panose="020B0603020101020101" pitchFamily="34" charset="-127"/>
+                <a:ea typeface="나눔바른고딕" panose="020B0603020101020101" pitchFamily="34" charset="-127"/>
+              </a:rPr>
               <a:t> 시스템 </a:t>
             </a:r>
             <a:r>
-              <a:rPr lang="en-US" altLang="ko-KR" sz="2400" dirty="0"/>
+              <a:rPr lang="en-US" altLang="ko-KR" sz="2400" dirty="0">
+                <a:latin typeface="나눔바른고딕" panose="020B0603020101020101" pitchFamily="34" charset="-127"/>
+                <a:ea typeface="나눔바른고딕" panose="020B0603020101020101" pitchFamily="34" charset="-127"/>
+              </a:rPr>
               <a:t>1</a:t>
             </a:r>
             <a:r>
-              <a:rPr lang="ko-KR" altLang="en-US" sz="2400" dirty="0"/>
+              <a:rPr lang="ko-KR" altLang="en-US" sz="2400" dirty="0" smtClean="0">
+                <a:latin typeface="나눔바른고딕" panose="020B0603020101020101" pitchFamily="34" charset="-127"/>
+                <a:ea typeface="나눔바른고딕" panose="020B0603020101020101" pitchFamily="34" charset="-127"/>
+              </a:rPr>
               <a:t>주차</a:t>
             </a:r>
-            <a:endParaRPr lang="en-US" altLang="ko-KR" sz="2400" dirty="0"/>
-          </a:p>
-          <a:p>
-            <a:r>
-              <a:rPr lang="ko-KR" altLang="en-US" dirty="0"/>
+            <a:endParaRPr lang="en-US" altLang="ko-KR" sz="2400" dirty="0">
+              <a:latin typeface="나눔바른고딕" panose="020B0603020101020101" pitchFamily="34" charset="-127"/>
+              <a:ea typeface="나눔바른고딕" panose="020B0603020101020101" pitchFamily="34" charset="-127"/>
+            </a:endParaRPr>
+          </a:p>
+        </p:txBody>
+      </p:sp>
+      <p:sp>
+        <p:nvSpPr>
+          <p:cNvPr id="3" name="직사각형 2"/>
+          <p:cNvSpPr/>
+          <p:nvPr/>
+        </p:nvSpPr>
+        <p:spPr>
+          <a:xfrm>
+            <a:off x="540190" y="3421353"/>
+            <a:ext cx="1587294" cy="369332"/>
+          </a:xfrm>
+          <a:prstGeom prst="rect">
+            <a:avLst/>
+          </a:prstGeom>
+        </p:spPr>
+        <p:txBody>
+          <a:bodyPr wrap="none">
+            <a:spAutoFit/>
+          </a:bodyPr>
+          <a:lstStyle/>
+          <a:p>
+            <a:r>
+              <a:rPr lang="ko-KR" altLang="en-US" dirty="0">
+                <a:latin typeface="나눔바른고딕" panose="020B0603020101020101" pitchFamily="34" charset="-127"/>
+                <a:ea typeface="나눔바른고딕" panose="020B0603020101020101" pitchFamily="34" charset="-127"/>
+              </a:rPr>
               <a:t>발표자 </a:t>
             </a:r>
             <a:r>
-              <a:rPr lang="en-US" altLang="ko-KR" dirty="0"/>
+              <a:rPr lang="en-US" altLang="ko-KR" dirty="0">
+                <a:latin typeface="나눔바른고딕" panose="020B0603020101020101" pitchFamily="34" charset="-127"/>
+                <a:ea typeface="나눔바른고딕" panose="020B0603020101020101" pitchFamily="34" charset="-127"/>
+              </a:rPr>
               <a:t>: </a:t>
             </a:r>
             <a:r>
-              <a:rPr lang="ko-KR" altLang="en-US" dirty="0"/>
+              <a:rPr lang="ko-KR" altLang="en-US" dirty="0">
+                <a:latin typeface="나눔바른고딕" panose="020B0603020101020101" pitchFamily="34" charset="-127"/>
+                <a:ea typeface="나눔바른고딕" panose="020B0603020101020101" pitchFamily="34" charset="-127"/>
+              </a:rPr>
               <a:t>김정환</a:t>
             </a:r>
+            <a:endParaRPr lang="ko-KR" altLang="en-US" dirty="0">
+              <a:latin typeface="나눔바른고딕" panose="020B0603020101020101" pitchFamily="34" charset="-127"/>
+              <a:ea typeface="나눔바른고딕" panose="020B0603020101020101" pitchFamily="34" charset="-127"/>
+            </a:endParaRPr>
           </a:p>
         </p:txBody>
       </p:sp>
@@ -3946,7 +4005,7 @@
         <p:cNvPr id="1" name="">
           <a:extLst>
             <a:ext uri="{FF2B5EF4-FFF2-40B4-BE49-F238E27FC236}">
-              <a16:creationId xmlns:a16="http://schemas.microsoft.com/office/drawing/2014/main" id="{49DA7EAA-204E-2F90-E52A-6C83B9013025}"/>
+              <a16:creationId xmlns:a16="http://schemas.microsoft.com/office/drawing/2014/main" xmlns="" id="{49DA7EAA-204E-2F90-E52A-6C83B9013025}"/>
             </a:ext>
           </a:extLst>
         </p:cNvPr>
@@ -3966,7 +4025,7 @@
           <p:cNvPr id="4" name="TextBox 3">
             <a:extLst>
               <a:ext uri="{FF2B5EF4-FFF2-40B4-BE49-F238E27FC236}">
-                <a16:creationId xmlns:a16="http://schemas.microsoft.com/office/drawing/2014/main" id="{1D991C93-DF9D-3E4E-5C97-ABAB7565CD54}"/>
+                <a16:creationId xmlns:a16="http://schemas.microsoft.com/office/drawing/2014/main" xmlns="" id="{1D991C93-DF9D-3E4E-5C97-ABAB7565CD54}"/>
               </a:ext>
             </a:extLst>
           </p:cNvPr>
@@ -3994,11 +4053,17 @@
               <a:buChar char="•"/>
             </a:pPr>
             <a:r>
-              <a:rPr lang="ko-KR" altLang="en-US" dirty="0"/>
+              <a:rPr lang="ko-KR" altLang="en-US" dirty="0">
+                <a:latin typeface="나눔바른고딕" panose="020B0603020101020101" pitchFamily="34" charset="-127"/>
+                <a:ea typeface="나눔바른고딕" panose="020B0603020101020101" pitchFamily="34" charset="-127"/>
+              </a:rPr>
               <a:t>목표 </a:t>
             </a:r>
             <a:r>
-              <a:rPr lang="en-US" altLang="ko-KR" dirty="0"/>
+              <a:rPr lang="en-US" altLang="ko-KR" dirty="0">
+                <a:latin typeface="나눔바른고딕" panose="020B0603020101020101" pitchFamily="34" charset="-127"/>
+                <a:ea typeface="나눔바른고딕" panose="020B0603020101020101" pitchFamily="34" charset="-127"/>
+              </a:rPr>
               <a:t>: </a:t>
             </a:r>
           </a:p>
@@ -4008,19 +4073,31 @@
               <a:buChar char="•"/>
             </a:pPr>
             <a:r>
-              <a:rPr lang="ko-KR" altLang="en-US" dirty="0"/>
+              <a:rPr lang="ko-KR" altLang="en-US" dirty="0">
+                <a:latin typeface="나눔바른고딕" panose="020B0603020101020101" pitchFamily="34" charset="-127"/>
+                <a:ea typeface="나눔바른고딕" panose="020B0603020101020101" pitchFamily="34" charset="-127"/>
+              </a:rPr>
               <a:t>진행 계획</a:t>
             </a:r>
             <a:r>
-              <a:rPr lang="en-US" altLang="ko-KR" dirty="0"/>
+              <a:rPr lang="en-US" altLang="ko-KR" dirty="0">
+                <a:latin typeface="나눔바른고딕" panose="020B0603020101020101" pitchFamily="34" charset="-127"/>
+                <a:ea typeface="나눔바른고딕" panose="020B0603020101020101" pitchFamily="34" charset="-127"/>
+              </a:rPr>
               <a:t> (</a:t>
             </a:r>
             <a:r>
-              <a:rPr lang="ko-KR" altLang="en-US" dirty="0"/>
+              <a:rPr lang="ko-KR" altLang="en-US" dirty="0">
+                <a:latin typeface="나눔바른고딕" panose="020B0603020101020101" pitchFamily="34" charset="-127"/>
+                <a:ea typeface="나눔바른고딕" panose="020B0603020101020101" pitchFamily="34" charset="-127"/>
+              </a:rPr>
               <a:t>주차별</a:t>
             </a:r>
             <a:r>
-              <a:rPr lang="en-US" altLang="ko-KR" dirty="0"/>
+              <a:rPr lang="en-US" altLang="ko-KR" dirty="0">
+                <a:latin typeface="나눔바른고딕" panose="020B0603020101020101" pitchFamily="34" charset="-127"/>
+                <a:ea typeface="나눔바른고딕" panose="020B0603020101020101" pitchFamily="34" charset="-127"/>
+              </a:rPr>
               <a:t>)</a:t>
             </a:r>
           </a:p>
@@ -4030,10 +4107,16 @@
               <a:buAutoNum type="arabicPeriod"/>
             </a:pPr>
             <a:r>
-              <a:rPr lang="ko-KR" altLang="en-US" dirty="0"/>
+              <a:rPr lang="ko-KR" altLang="en-US" dirty="0">
+                <a:latin typeface="나눔바른고딕" panose="020B0603020101020101" pitchFamily="34" charset="-127"/>
+                <a:ea typeface="나눔바른고딕" panose="020B0603020101020101" pitchFamily="34" charset="-127"/>
+              </a:rPr>
               <a:t>미니엔진 기반 준비</a:t>
             </a:r>
-            <a:endParaRPr lang="en-US" altLang="ko-KR" dirty="0"/>
+            <a:endParaRPr lang="en-US" altLang="ko-KR" dirty="0">
+              <a:latin typeface="나눔바른고딕" panose="020B0603020101020101" pitchFamily="34" charset="-127"/>
+              <a:ea typeface="나눔바른고딕" panose="020B0603020101020101" pitchFamily="34" charset="-127"/>
+            </a:endParaRPr>
           </a:p>
           <a:p>
             <a:pPr marL="800100" lvl="1" indent="-342900">
@@ -4041,10 +4124,16 @@
               <a:buAutoNum type="arabicPeriod"/>
             </a:pPr>
             <a:r>
-              <a:rPr lang="ko-KR" altLang="en-US" dirty="0"/>
+              <a:rPr lang="ko-KR" altLang="en-US" dirty="0">
+                <a:latin typeface="나눔바른고딕" panose="020B0603020101020101" pitchFamily="34" charset="-127"/>
+                <a:ea typeface="나눔바른고딕" panose="020B0603020101020101" pitchFamily="34" charset="-127"/>
+              </a:rPr>
               <a:t>애니메이션 시스템</a:t>
             </a:r>
-            <a:endParaRPr lang="en-US" altLang="ko-KR" dirty="0"/>
+            <a:endParaRPr lang="en-US" altLang="ko-KR" dirty="0">
+              <a:latin typeface="나눔바른고딕" panose="020B0603020101020101" pitchFamily="34" charset="-127"/>
+              <a:ea typeface="나눔바른고딕" panose="020B0603020101020101" pitchFamily="34" charset="-127"/>
+            </a:endParaRPr>
           </a:p>
           <a:p>
             <a:pPr marL="800100" lvl="1" indent="-342900">
@@ -4052,14 +4141,23 @@
               <a:buAutoNum type="arabicPeriod"/>
             </a:pPr>
             <a:r>
-              <a:rPr lang="ko-KR" altLang="en-US" dirty="0" err="1"/>
+              <a:rPr lang="ko-KR" altLang="en-US" dirty="0" err="1">
+                <a:latin typeface="나눔바른고딕" panose="020B0603020101020101" pitchFamily="34" charset="-127"/>
+                <a:ea typeface="나눔바른고딕" panose="020B0603020101020101" pitchFamily="34" charset="-127"/>
+              </a:rPr>
               <a:t>파쿠르</a:t>
             </a:r>
             <a:r>
-              <a:rPr lang="ko-KR" altLang="en-US" dirty="0"/>
+              <a:rPr lang="ko-KR" altLang="en-US" dirty="0">
+                <a:latin typeface="나눔바른고딕" panose="020B0603020101020101" pitchFamily="34" charset="-127"/>
+                <a:ea typeface="나눔바른고딕" panose="020B0603020101020101" pitchFamily="34" charset="-127"/>
+              </a:rPr>
               <a:t> 애니메이션 적용</a:t>
             </a:r>
-            <a:endParaRPr lang="en-US" altLang="ko-KR" dirty="0"/>
+            <a:endParaRPr lang="en-US" altLang="ko-KR" dirty="0">
+              <a:latin typeface="나눔바른고딕" panose="020B0603020101020101" pitchFamily="34" charset="-127"/>
+              <a:ea typeface="나눔바른고딕" panose="020B0603020101020101" pitchFamily="34" charset="-127"/>
+            </a:endParaRPr>
           </a:p>
           <a:p>
             <a:pPr marL="800100" lvl="1" indent="-342900">
@@ -4067,14 +4165,23 @@
               <a:buAutoNum type="arabicPeriod"/>
             </a:pPr>
             <a:r>
-              <a:rPr lang="ko-KR" altLang="en-US" dirty="0" err="1"/>
+              <a:rPr lang="ko-KR" altLang="en-US" dirty="0" err="1">
+                <a:latin typeface="나눔바른고딕" panose="020B0603020101020101" pitchFamily="34" charset="-127"/>
+                <a:ea typeface="나눔바른고딕" panose="020B0603020101020101" pitchFamily="34" charset="-127"/>
+              </a:rPr>
               <a:t>파쿠르</a:t>
             </a:r>
             <a:r>
-              <a:rPr lang="ko-KR" altLang="en-US" dirty="0"/>
+              <a:rPr lang="ko-KR" altLang="en-US" dirty="0">
+                <a:latin typeface="나눔바른고딕" panose="020B0603020101020101" pitchFamily="34" charset="-127"/>
+                <a:ea typeface="나눔바른고딕" panose="020B0603020101020101" pitchFamily="34" charset="-127"/>
+              </a:rPr>
               <a:t> 시스템 프로토타입</a:t>
             </a:r>
-            <a:endParaRPr lang="en-US" altLang="ko-KR" dirty="0"/>
+            <a:endParaRPr lang="en-US" altLang="ko-KR" dirty="0">
+              <a:latin typeface="나눔바른고딕" panose="020B0603020101020101" pitchFamily="34" charset="-127"/>
+              <a:ea typeface="나눔바른고딕" panose="020B0603020101020101" pitchFamily="34" charset="-127"/>
+            </a:endParaRPr>
           </a:p>
           <a:p>
             <a:pPr marL="800100" lvl="1" indent="-342900">
@@ -4082,10 +4189,16 @@
               <a:buAutoNum type="arabicPeriod"/>
             </a:pPr>
             <a:r>
-              <a:rPr lang="ko-KR" altLang="en-US" dirty="0"/>
+              <a:rPr lang="ko-KR" altLang="en-US" dirty="0">
+                <a:latin typeface="나눔바른고딕" panose="020B0603020101020101" pitchFamily="34" charset="-127"/>
+                <a:ea typeface="나눔바른고딕" panose="020B0603020101020101" pitchFamily="34" charset="-127"/>
+              </a:rPr>
               <a:t>미흡 사항 보완 및 디테일 보정</a:t>
             </a:r>
-            <a:endParaRPr lang="en-US" altLang="ko-KR" dirty="0"/>
+            <a:endParaRPr lang="en-US" altLang="ko-KR" dirty="0">
+              <a:latin typeface="나눔바른고딕" panose="020B0603020101020101" pitchFamily="34" charset="-127"/>
+              <a:ea typeface="나눔바른고딕" panose="020B0603020101020101" pitchFamily="34" charset="-127"/>
+            </a:endParaRPr>
           </a:p>
           <a:p>
             <a:pPr marL="800100" lvl="1" indent="-342900">
@@ -4093,18 +4206,30 @@
               <a:buAutoNum type="arabicPeriod"/>
             </a:pPr>
             <a:r>
-              <a:rPr lang="ko-KR" altLang="en-US" dirty="0"/>
+              <a:rPr lang="ko-KR" altLang="en-US" dirty="0">
+                <a:latin typeface="나눔바른고딕" panose="020B0603020101020101" pitchFamily="34" charset="-127"/>
+                <a:ea typeface="나눔바른고딕" panose="020B0603020101020101" pitchFamily="34" charset="-127"/>
+              </a:rPr>
               <a:t>복잡한 지형 내 </a:t>
             </a:r>
             <a:r>
-              <a:rPr lang="ko-KR" altLang="en-US" dirty="0" err="1"/>
+              <a:rPr lang="ko-KR" altLang="en-US" dirty="0" err="1">
+                <a:latin typeface="나눔바른고딕" panose="020B0603020101020101" pitchFamily="34" charset="-127"/>
+                <a:ea typeface="나눔바른고딕" panose="020B0603020101020101" pitchFamily="34" charset="-127"/>
+              </a:rPr>
               <a:t>파쿠르</a:t>
             </a:r>
             <a:r>
-              <a:rPr lang="ko-KR" altLang="en-US" dirty="0"/>
+              <a:rPr lang="ko-KR" altLang="en-US" dirty="0">
+                <a:latin typeface="나눔바른고딕" panose="020B0603020101020101" pitchFamily="34" charset="-127"/>
+                <a:ea typeface="나눔바른고딕" panose="020B0603020101020101" pitchFamily="34" charset="-127"/>
+              </a:rPr>
               <a:t> 시스템</a:t>
             </a:r>
-            <a:endParaRPr lang="en-US" altLang="ko-KR" dirty="0"/>
+            <a:endParaRPr lang="en-US" altLang="ko-KR" dirty="0">
+              <a:latin typeface="나눔바른고딕" panose="020B0603020101020101" pitchFamily="34" charset="-127"/>
+              <a:ea typeface="나눔바른고딕" panose="020B0603020101020101" pitchFamily="34" charset="-127"/>
+            </a:endParaRPr>
           </a:p>
           <a:p>
             <a:pPr marL="800100" lvl="1" indent="-342900">
@@ -4112,7 +4237,10 @@
               <a:buAutoNum type="arabicPeriod"/>
             </a:pPr>
             <a:r>
-              <a:rPr lang="en-US" altLang="ko-KR" dirty="0"/>
+              <a:rPr lang="en-US" altLang="ko-KR" dirty="0">
+                <a:latin typeface="나눔바른고딕" panose="020B0603020101020101" pitchFamily="34" charset="-127"/>
+                <a:ea typeface="나눔바른고딕" panose="020B0603020101020101" pitchFamily="34" charset="-127"/>
+              </a:rPr>
               <a:t>-</a:t>
             </a:r>
           </a:p>
@@ -4122,7 +4250,10 @@
               <a:buAutoNum type="arabicPeriod"/>
             </a:pPr>
             <a:r>
-              <a:rPr lang="en-US" altLang="ko-KR" dirty="0"/>
+              <a:rPr lang="en-US" altLang="ko-KR" dirty="0">
+                <a:latin typeface="나눔바른고딕" panose="020B0603020101020101" pitchFamily="34" charset="-127"/>
+                <a:ea typeface="나눔바른고딕" panose="020B0603020101020101" pitchFamily="34" charset="-127"/>
+              </a:rPr>
               <a:t>-</a:t>
             </a:r>
           </a:p>
@@ -4149,7 +4280,7 @@
         <p:cNvPr id="1" name="">
           <a:extLst>
             <a:ext uri="{FF2B5EF4-FFF2-40B4-BE49-F238E27FC236}">
-              <a16:creationId xmlns:a16="http://schemas.microsoft.com/office/drawing/2014/main" id="{068E24C7-A429-CDA0-4EB6-16142BB05552}"/>
+              <a16:creationId xmlns:a16="http://schemas.microsoft.com/office/drawing/2014/main" xmlns="" id="{068E24C7-A429-CDA0-4EB6-16142BB05552}"/>
             </a:ext>
           </a:extLst>
         </p:cNvPr>
@@ -4169,7 +4300,7 @@
           <p:cNvPr id="4" name="TextBox 3">
             <a:extLst>
               <a:ext uri="{FF2B5EF4-FFF2-40B4-BE49-F238E27FC236}">
-                <a16:creationId xmlns:a16="http://schemas.microsoft.com/office/drawing/2014/main" id="{4715F932-2F2C-4A3F-7F16-1B13D352985A}"/>
+                <a16:creationId xmlns:a16="http://schemas.microsoft.com/office/drawing/2014/main" xmlns="" id="{4715F932-2F2C-4A3F-7F16-1B13D352985A}"/>
               </a:ext>
             </a:extLst>
           </p:cNvPr>
@@ -4193,10 +4324,16 @@
           <a:lstStyle/>
           <a:p>
             <a:r>
-              <a:rPr lang="ko-KR" altLang="en-US" dirty="0"/>
+              <a:rPr lang="ko-KR" altLang="en-US" dirty="0">
+                <a:latin typeface="나눔바른고딕" panose="020B0603020101020101" pitchFamily="34" charset="-127"/>
+                <a:ea typeface="나눔바른고딕" panose="020B0603020101020101" pitchFamily="34" charset="-127"/>
+              </a:rPr>
               <a:t>이번 주 작업 내역</a:t>
             </a:r>
-            <a:endParaRPr lang="en-US" altLang="ko-KR" dirty="0"/>
+            <a:endParaRPr lang="en-US" altLang="ko-KR" dirty="0">
+              <a:latin typeface="나눔바른고딕" panose="020B0603020101020101" pitchFamily="34" charset="-127"/>
+              <a:ea typeface="나눔바른고딕" panose="020B0603020101020101" pitchFamily="34" charset="-127"/>
+            </a:endParaRPr>
           </a:p>
         </p:txBody>
       </p:sp>
@@ -4205,7 +4342,7 @@
           <p:cNvPr id="3" name="TextBox 2">
             <a:extLst>
               <a:ext uri="{FF2B5EF4-FFF2-40B4-BE49-F238E27FC236}">
-                <a16:creationId xmlns:a16="http://schemas.microsoft.com/office/drawing/2014/main" id="{6DE5C835-CE30-2461-B5B2-C304088E694A}"/>
+                <a16:creationId xmlns:a16="http://schemas.microsoft.com/office/drawing/2014/main" xmlns="" id="{6DE5C835-CE30-2461-B5B2-C304088E694A}"/>
               </a:ext>
             </a:extLst>
           </p:cNvPr>
@@ -4233,10 +4370,16 @@
               <a:buChar char="•"/>
             </a:pPr>
             <a:r>
-              <a:rPr lang="ko-KR" altLang="en-US" dirty="0"/>
+              <a:rPr lang="ko-KR" altLang="en-US" dirty="0">
+                <a:latin typeface="나눔바른고딕" panose="020B0603020101020101" pitchFamily="34" charset="-127"/>
+                <a:ea typeface="나눔바른고딕" panose="020B0603020101020101" pitchFamily="34" charset="-127"/>
+              </a:rPr>
               <a:t>미니엔진 기반 구성</a:t>
             </a:r>
-            <a:endParaRPr lang="en-US" altLang="ko-KR" dirty="0"/>
+            <a:endParaRPr lang="en-US" altLang="ko-KR" dirty="0">
+              <a:latin typeface="나눔바른고딕" panose="020B0603020101020101" pitchFamily="34" charset="-127"/>
+              <a:ea typeface="나눔바른고딕" panose="020B0603020101020101" pitchFamily="34" charset="-127"/>
+            </a:endParaRPr>
           </a:p>
           <a:p>
             <a:pPr marL="285750" indent="-285750">
@@ -4244,23 +4387,38 @@
               <a:buChar char="•"/>
             </a:pPr>
             <a:r>
-              <a:rPr lang="en-US" altLang="ko-KR" dirty="0"/>
+              <a:rPr lang="en-US" altLang="ko-KR" dirty="0">
+                <a:latin typeface="나눔바른고딕" panose="020B0603020101020101" pitchFamily="34" charset="-127"/>
+                <a:ea typeface="나눔바른고딕" panose="020B0603020101020101" pitchFamily="34" charset="-127"/>
+              </a:rPr>
               <a:t>3D</a:t>
             </a:r>
             <a:r>
-              <a:rPr lang="ko-KR" altLang="en-US" dirty="0"/>
+              <a:rPr lang="ko-KR" altLang="en-US" dirty="0">
+                <a:latin typeface="나눔바른고딕" panose="020B0603020101020101" pitchFamily="34" charset="-127"/>
+                <a:ea typeface="나눔바른고딕" panose="020B0603020101020101" pitchFamily="34" charset="-127"/>
+              </a:rPr>
               <a:t> 파일 파싱 </a:t>
             </a:r>
             <a:r>
-              <a:rPr lang="en-US" altLang="ko-KR" dirty="0"/>
+              <a:rPr lang="en-US" altLang="ko-KR" dirty="0">
+                <a:latin typeface="나눔바른고딕" panose="020B0603020101020101" pitchFamily="34" charset="-127"/>
+                <a:ea typeface="나눔바른고딕" panose="020B0603020101020101" pitchFamily="34" charset="-127"/>
+              </a:rPr>
               <a:t>(FBX SDK </a:t>
             </a:r>
             <a:r>
-              <a:rPr lang="ko-KR" altLang="en-US" dirty="0"/>
+              <a:rPr lang="ko-KR" altLang="en-US" dirty="0">
+                <a:latin typeface="나눔바른고딕" panose="020B0603020101020101" pitchFamily="34" charset="-127"/>
+                <a:ea typeface="나눔바른고딕" panose="020B0603020101020101" pitchFamily="34" charset="-127"/>
+              </a:rPr>
               <a:t>활용</a:t>
             </a:r>
             <a:r>
-              <a:rPr lang="en-US" altLang="ko-KR" dirty="0"/>
+              <a:rPr lang="en-US" altLang="ko-KR" dirty="0">
+                <a:latin typeface="나눔바른고딕" panose="020B0603020101020101" pitchFamily="34" charset="-127"/>
+                <a:ea typeface="나눔바른고딕" panose="020B0603020101020101" pitchFamily="34" charset="-127"/>
+              </a:rPr>
               <a:t>)</a:t>
             </a:r>
           </a:p>
@@ -4270,26 +4428,44 @@
               <a:buChar char="•"/>
             </a:pPr>
             <a:r>
-              <a:rPr lang="en-US" altLang="ko-KR" dirty="0" err="1"/>
+              <a:rPr lang="en-US" altLang="ko-KR" dirty="0" err="1">
+                <a:latin typeface="나눔바른고딕" panose="020B0603020101020101" pitchFamily="34" charset="-127"/>
+                <a:ea typeface="나눔바른고딕" panose="020B0603020101020101" pitchFamily="34" charset="-127"/>
+              </a:rPr>
               <a:t>Assimp</a:t>
             </a:r>
             <a:r>
-              <a:rPr lang="en-US" altLang="ko-KR" dirty="0"/>
+              <a:rPr lang="en-US" altLang="ko-KR" dirty="0">
+                <a:latin typeface="나눔바른고딕" panose="020B0603020101020101" pitchFamily="34" charset="-127"/>
+                <a:ea typeface="나눔바른고딕" panose="020B0603020101020101" pitchFamily="34" charset="-127"/>
+              </a:rPr>
               <a:t> </a:t>
             </a:r>
             <a:r>
-              <a:rPr lang="ko-KR" altLang="en-US" dirty="0"/>
+              <a:rPr lang="ko-KR" altLang="en-US" dirty="0">
+                <a:latin typeface="나눔바른고딕" panose="020B0603020101020101" pitchFamily="34" charset="-127"/>
+                <a:ea typeface="나눔바른고딕" panose="020B0603020101020101" pitchFamily="34" charset="-127"/>
+              </a:rPr>
               <a:t>활용하여 </a:t>
             </a:r>
             <a:r>
-              <a:rPr lang="en-US" altLang="ko-KR" dirty="0"/>
+              <a:rPr lang="en-US" altLang="ko-KR" dirty="0">
+                <a:latin typeface="나눔바른고딕" panose="020B0603020101020101" pitchFamily="34" charset="-127"/>
+                <a:ea typeface="나눔바른고딕" panose="020B0603020101020101" pitchFamily="34" charset="-127"/>
+              </a:rPr>
               <a:t>FBX</a:t>
             </a:r>
             <a:r>
-              <a:rPr lang="ko-KR" altLang="en-US" dirty="0"/>
+              <a:rPr lang="ko-KR" altLang="en-US" dirty="0">
+                <a:latin typeface="나눔바른고딕" panose="020B0603020101020101" pitchFamily="34" charset="-127"/>
+                <a:ea typeface="나눔바른고딕" panose="020B0603020101020101" pitchFamily="34" charset="-127"/>
+              </a:rPr>
               <a:t>에 한정되지 않도록 수정 진행 중</a:t>
             </a:r>
-            <a:endParaRPr lang="en-US" altLang="ko-KR" dirty="0"/>
+            <a:endParaRPr lang="en-US" altLang="ko-KR" dirty="0">
+              <a:latin typeface="나눔바른고딕" panose="020B0603020101020101" pitchFamily="34" charset="-127"/>
+              <a:ea typeface="나눔바른고딕" panose="020B0603020101020101" pitchFamily="34" charset="-127"/>
+            </a:endParaRPr>
           </a:p>
           <a:p>
             <a:pPr marL="285750" indent="-285750">
@@ -4297,10 +4473,16 @@
               <a:buChar char="•"/>
             </a:pPr>
             <a:r>
-              <a:rPr lang="ko-KR" altLang="en-US" dirty="0"/>
+              <a:rPr lang="ko-KR" altLang="en-US" dirty="0">
+                <a:latin typeface="나눔바른고딕" panose="020B0603020101020101" pitchFamily="34" charset="-127"/>
+                <a:ea typeface="나눔바른고딕" panose="020B0603020101020101" pitchFamily="34" charset="-127"/>
+              </a:rPr>
               <a:t>모델링 렌더링</a:t>
             </a:r>
-            <a:endParaRPr lang="en-US" altLang="ko-KR" dirty="0"/>
+            <a:endParaRPr lang="en-US" altLang="ko-KR" dirty="0">
+              <a:latin typeface="나눔바른고딕" panose="020B0603020101020101" pitchFamily="34" charset="-127"/>
+              <a:ea typeface="나눔바른고딕" panose="020B0603020101020101" pitchFamily="34" charset="-127"/>
+            </a:endParaRPr>
           </a:p>
           <a:p>
             <a:pPr marL="285750" indent="-285750">
@@ -4308,10 +4490,16 @@
               <a:buChar char="•"/>
             </a:pPr>
             <a:r>
-              <a:rPr lang="ko-KR" altLang="en-US" dirty="0"/>
+              <a:rPr lang="ko-KR" altLang="en-US" dirty="0">
+                <a:latin typeface="나눔바른고딕" panose="020B0603020101020101" pitchFamily="34" charset="-127"/>
+                <a:ea typeface="나눔바른고딕" panose="020B0603020101020101" pitchFamily="34" charset="-127"/>
+              </a:rPr>
               <a:t>애니메이션 로드 및 재생</a:t>
             </a:r>
-            <a:endParaRPr lang="en-US" altLang="ko-KR" dirty="0"/>
+            <a:endParaRPr lang="en-US" altLang="ko-KR" dirty="0">
+              <a:latin typeface="나눔바른고딕" panose="020B0603020101020101" pitchFamily="34" charset="-127"/>
+              <a:ea typeface="나눔바른고딕" panose="020B0603020101020101" pitchFamily="34" charset="-127"/>
+            </a:endParaRPr>
           </a:p>
           <a:p>
             <a:pPr marL="285750" indent="-285750">
@@ -4319,10 +4507,16 @@
               <a:buChar char="•"/>
             </a:pPr>
             <a:r>
-              <a:rPr lang="ko-KR" altLang="en-US" dirty="0"/>
+              <a:rPr lang="ko-KR" altLang="en-US" dirty="0">
+                <a:latin typeface="나눔바른고딕" panose="020B0603020101020101" pitchFamily="34" charset="-127"/>
+                <a:ea typeface="나눔바른고딕" panose="020B0603020101020101" pitchFamily="34" charset="-127"/>
+              </a:rPr>
               <a:t>다중 애니메이션 구성</a:t>
             </a:r>
-            <a:endParaRPr lang="en-US" altLang="ko-KR" dirty="0"/>
+            <a:endParaRPr lang="en-US" altLang="ko-KR" dirty="0">
+              <a:latin typeface="나눔바른고딕" panose="020B0603020101020101" pitchFamily="34" charset="-127"/>
+              <a:ea typeface="나눔바른고딕" panose="020B0603020101020101" pitchFamily="34" charset="-127"/>
+            </a:endParaRPr>
           </a:p>
         </p:txBody>
       </p:sp>
@@ -4347,7 +4541,7 @@
         <p:cNvPr id="1" name="">
           <a:extLst>
             <a:ext uri="{FF2B5EF4-FFF2-40B4-BE49-F238E27FC236}">
-              <a16:creationId xmlns:a16="http://schemas.microsoft.com/office/drawing/2014/main" id="{49DA7EAA-204E-2F90-E52A-6C83B9013025}"/>
+              <a16:creationId xmlns:a16="http://schemas.microsoft.com/office/drawing/2014/main" xmlns="" id="{49DA7EAA-204E-2F90-E52A-6C83B9013025}"/>
             </a:ext>
           </a:extLst>
         </p:cNvPr>
@@ -4367,7 +4561,7 @@
           <p:cNvPr id="5" name="TextBox 4">
             <a:extLst>
               <a:ext uri="{FF2B5EF4-FFF2-40B4-BE49-F238E27FC236}">
-                <a16:creationId xmlns:a16="http://schemas.microsoft.com/office/drawing/2014/main" id="{4715F932-2F2C-4A3F-7F16-1B13D352985A}"/>
+                <a16:creationId xmlns:a16="http://schemas.microsoft.com/office/drawing/2014/main" xmlns="" id="{4715F932-2F2C-4A3F-7F16-1B13D352985A}"/>
               </a:ext>
             </a:extLst>
           </p:cNvPr>
@@ -4376,7 +4570,7 @@
         </p:nvSpPr>
         <p:spPr>
           <a:xfrm>
-            <a:off x="302451" y="315453"/>
+            <a:off x="354702" y="315453"/>
             <a:ext cx="4944140" cy="369332"/>
           </a:xfrm>
           <a:prstGeom prst="rect">
@@ -4391,23 +4585,38 @@
           <a:lstStyle/>
           <a:p>
             <a:r>
-              <a:rPr lang="ko-KR" altLang="en-US" dirty="0"/>
+              <a:rPr lang="ko-KR" altLang="en-US" dirty="0">
+                <a:latin typeface="나눔바른고딕" panose="020B0603020101020101" pitchFamily="34" charset="-127"/>
+                <a:ea typeface="나눔바른고딕" panose="020B0603020101020101" pitchFamily="34" charset="-127"/>
+              </a:rPr>
               <a:t>진행 계획</a:t>
             </a:r>
             <a:r>
-              <a:rPr lang="en-US" altLang="ko-KR" dirty="0"/>
+              <a:rPr lang="en-US" altLang="ko-KR" dirty="0">
+                <a:latin typeface="나눔바른고딕" panose="020B0603020101020101" pitchFamily="34" charset="-127"/>
+                <a:ea typeface="나눔바른고딕" panose="020B0603020101020101" pitchFamily="34" charset="-127"/>
+              </a:rPr>
               <a:t> (</a:t>
             </a:r>
             <a:r>
-              <a:rPr lang="ko-KR" altLang="en-US" dirty="0" err="1"/>
+              <a:rPr lang="ko-KR" altLang="en-US" dirty="0" err="1">
+                <a:latin typeface="나눔바른고딕" panose="020B0603020101020101" pitchFamily="34" charset="-127"/>
+                <a:ea typeface="나눔바른고딕" panose="020B0603020101020101" pitchFamily="34" charset="-127"/>
+              </a:rPr>
               <a:t>주차별</a:t>
             </a:r>
             <a:r>
-              <a:rPr lang="ko-KR" altLang="en-US" dirty="0"/>
+              <a:rPr lang="ko-KR" altLang="en-US" dirty="0">
+                <a:latin typeface="나눔바른고딕" panose="020B0603020101020101" pitchFamily="34" charset="-127"/>
+                <a:ea typeface="나눔바른고딕" panose="020B0603020101020101" pitchFamily="34" charset="-127"/>
+              </a:rPr>
               <a:t> 목표</a:t>
             </a:r>
             <a:r>
-              <a:rPr lang="en-US" altLang="ko-KR" dirty="0"/>
+              <a:rPr lang="en-US" altLang="ko-KR" dirty="0">
+                <a:latin typeface="나눔바른고딕" panose="020B0603020101020101" pitchFamily="34" charset="-127"/>
+                <a:ea typeface="나눔바른고딕" panose="020B0603020101020101" pitchFamily="34" charset="-127"/>
+              </a:rPr>
               <a:t>)</a:t>
             </a:r>
           </a:p>
@@ -4419,7 +4628,13 @@
           <p:cNvGraphicFramePr>
             <a:graphicFrameLocks noGrp="1"/>
           </p:cNvGraphicFramePr>
-          <p:nvPr/>
+          <p:nvPr>
+            <p:extLst>
+              <p:ext uri="{D42A27DB-BD31-4B8C-83A1-F6EECF244321}">
+                <p14:modId xmlns:p14="http://schemas.microsoft.com/office/powerpoint/2010/main" val="2871396276"/>
+              </p:ext>
+            </p:extLst>
+          </p:nvPr>
         </p:nvGraphicFramePr>
         <p:xfrm>
           <a:off x="420856" y="870858"/>
@@ -4429,27 +4644,27 @@
           <a:graphicData uri="http://schemas.openxmlformats.org/drawingml/2006/table">
             <a:tbl>
               <a:tblPr firstRow="1" bandRow="1">
-                <a:tableStyleId>{5C22544A-7EE6-4342-B048-85BDC9FD1C3A}</a:tableStyleId>
+                <a:tableStyleId>{7E9639D4-E3E2-4D34-9284-5A2195B3D0D7}</a:tableStyleId>
               </a:tblPr>
               <a:tblGrid>
                 <a:gridCol w="791436">
                   <a:extLst>
                     <a:ext uri="{9D8B030D-6E8A-4147-A177-3AD203B41FA5}">
-                      <a16:colId xmlns:a16="http://schemas.microsoft.com/office/drawing/2014/main" val="20000"/>
+                      <a16:colId xmlns:a16="http://schemas.microsoft.com/office/drawing/2014/main" xmlns="" val="20000"/>
                     </a:ext>
                   </a:extLst>
                 </a:gridCol>
                 <a:gridCol w="4207281">
                   <a:extLst>
                     <a:ext uri="{9D8B030D-6E8A-4147-A177-3AD203B41FA5}">
-                      <a16:colId xmlns:a16="http://schemas.microsoft.com/office/drawing/2014/main" val="20001"/>
+                      <a16:colId xmlns:a16="http://schemas.microsoft.com/office/drawing/2014/main" xmlns="" val="20001"/>
                     </a:ext>
                   </a:extLst>
                 </a:gridCol>
                 <a:gridCol w="6320143">
                   <a:extLst>
                     <a:ext uri="{9D8B030D-6E8A-4147-A177-3AD203B41FA5}">
-                      <a16:colId xmlns:a16="http://schemas.microsoft.com/office/drawing/2014/main" val="20002"/>
+                      <a16:colId xmlns:a16="http://schemas.microsoft.com/office/drawing/2014/main" xmlns="" val="20002"/>
                     </a:ext>
                   </a:extLst>
                 </a:gridCol>
@@ -4461,7 +4676,10 @@
                     <a:lstStyle/>
                     <a:p>
                       <a:pPr algn="ctr" latinLnBrk="1"/>
-                      <a:endParaRPr lang="ko-KR" altLang="en-US" sz="1400" b="0" dirty="0"/>
+                      <a:endParaRPr lang="ko-KR" altLang="en-US" sz="1400" b="0" dirty="0">
+                        <a:latin typeface="나눔바른고딕" panose="020B0603020101020101" pitchFamily="34" charset="-127"/>
+                        <a:ea typeface="나눔바른고딕" panose="020B0603020101020101" pitchFamily="34" charset="-127"/>
+                      </a:endParaRPr>
                     </a:p>
                   </a:txBody>
                   <a:tcPr/>
@@ -4473,12 +4691,15 @@
                     <a:p>
                       <a:pPr algn="ctr" latinLnBrk="1"/>
                       <a:r>
-                        <a:rPr lang="ko-KR" altLang="en-US" sz="2000" b="0" dirty="0"/>
+                        <a:rPr lang="ko-KR" altLang="en-US" sz="2000" b="0" dirty="0">
+                          <a:latin typeface="나눔바른고딕" panose="020B0603020101020101" pitchFamily="34" charset="-127"/>
+                          <a:ea typeface="나눔바른고딕" panose="020B0603020101020101" pitchFamily="34" charset="-127"/>
+                        </a:rPr>
                         <a:t>작업 목표</a:t>
                       </a:r>
                     </a:p>
                   </a:txBody>
-                  <a:tcPr/>
+                  <a:tcPr anchor="ctr"/>
                 </a:tc>
                 <a:tc>
                   <a:txBody>
@@ -4487,16 +4708,19 @@
                     <a:p>
                       <a:pPr algn="ctr" latinLnBrk="1"/>
                       <a:r>
-                        <a:rPr lang="ko-KR" altLang="en-US" sz="2000" b="0" dirty="0"/>
+                        <a:rPr lang="ko-KR" altLang="en-US" sz="2000" b="0" dirty="0">
+                          <a:latin typeface="나눔바른고딕" panose="020B0603020101020101" pitchFamily="34" charset="-127"/>
+                          <a:ea typeface="나눔바른고딕" panose="020B0603020101020101" pitchFamily="34" charset="-127"/>
+                        </a:rPr>
                         <a:t>작업 세부 내용</a:t>
                       </a:r>
                     </a:p>
                   </a:txBody>
-                  <a:tcPr/>
+                  <a:tcPr anchor="ctr"/>
                 </a:tc>
                 <a:extLst>
                   <a:ext uri="{0D108BD9-81ED-4DB2-BD59-A6C34878D82A}">
-                    <a16:rowId xmlns:a16="http://schemas.microsoft.com/office/drawing/2014/main" val="10000"/>
+                    <a16:rowId xmlns:a16="http://schemas.microsoft.com/office/drawing/2014/main" xmlns="" val="10000"/>
                   </a:ext>
                 </a:extLst>
               </a:tr>
@@ -4508,13 +4732,19 @@
                     <a:p>
                       <a:pPr algn="ctr" latinLnBrk="1"/>
                       <a:r>
-                        <a:rPr lang="en-US" altLang="ko-KR" dirty="0"/>
+                        <a:rPr lang="en-US" altLang="ko-KR" dirty="0">
+                          <a:latin typeface="나눔바른고딕" panose="020B0603020101020101" pitchFamily="34" charset="-127"/>
+                          <a:ea typeface="나눔바른고딕" panose="020B0603020101020101" pitchFamily="34" charset="-127"/>
+                        </a:rPr>
                         <a:t>1</a:t>
                       </a:r>
-                      <a:endParaRPr lang="ko-KR" altLang="en-US" dirty="0"/>
+                      <a:endParaRPr lang="ko-KR" altLang="en-US" dirty="0">
+                        <a:latin typeface="나눔바른고딕" panose="020B0603020101020101" pitchFamily="34" charset="-127"/>
+                        <a:ea typeface="나눔바른고딕" panose="020B0603020101020101" pitchFamily="34" charset="-127"/>
+                      </a:endParaRPr>
                     </a:p>
                   </a:txBody>
-                  <a:tcPr/>
+                  <a:tcPr anchor="ctr"/>
                 </a:tc>
                 <a:tc>
                   <a:txBody>
@@ -4539,17 +4769,26 @@
                         <a:defRPr/>
                       </a:pPr>
                       <a:r>
-                        <a:rPr lang="ko-KR" altLang="en-US" sz="1600" dirty="0"/>
+                        <a:rPr lang="ko-KR" altLang="en-US" sz="1400" dirty="0">
+                          <a:latin typeface="나눔바른고딕" panose="020B0603020101020101" pitchFamily="34" charset="-127"/>
+                          <a:ea typeface="나눔바른고딕" panose="020B0603020101020101" pitchFamily="34" charset="-127"/>
+                        </a:rPr>
                         <a:t>미니엔진 구조 파악 및 기반 클래스</a:t>
                       </a:r>
                       <a:r>
-                        <a:rPr lang="ko-KR" altLang="en-US" sz="1600" baseline="0" dirty="0"/>
+                        <a:rPr lang="ko-KR" altLang="en-US" sz="1400" baseline="0" dirty="0">
+                          <a:latin typeface="나눔바른고딕" panose="020B0603020101020101" pitchFamily="34" charset="-127"/>
+                          <a:ea typeface="나눔바른고딕" panose="020B0603020101020101" pitchFamily="34" charset="-127"/>
+                        </a:rPr>
                         <a:t> 구성</a:t>
                       </a:r>
-                      <a:endParaRPr lang="en-US" altLang="ko-KR" sz="1600" dirty="0"/>
+                      <a:endParaRPr lang="en-US" altLang="ko-KR" sz="1400" dirty="0">
+                        <a:latin typeface="나눔바른고딕" panose="020B0603020101020101" pitchFamily="34" charset="-127"/>
+                        <a:ea typeface="나눔바른고딕" panose="020B0603020101020101" pitchFamily="34" charset="-127"/>
+                      </a:endParaRPr>
                     </a:p>
                   </a:txBody>
-                  <a:tcPr/>
+                  <a:tcPr anchor="ctr"/>
                 </a:tc>
                 <a:tc>
                   <a:txBody>
@@ -4561,64 +4800,106 @@
                         <a:buNone/>
                       </a:pPr>
                       <a:r>
-                        <a:rPr lang="ko-KR" altLang="en-US" sz="1600" dirty="0"/>
+                        <a:rPr lang="ko-KR" altLang="en-US" sz="1400" dirty="0">
+                          <a:latin typeface="나눔바른고딕" panose="020B0603020101020101" pitchFamily="34" charset="-127"/>
+                          <a:ea typeface="나눔바른고딕" panose="020B0603020101020101" pitchFamily="34" charset="-127"/>
+                        </a:rPr>
                         <a:t>미니엔진 파악</a:t>
                       </a:r>
                       <a:r>
-                        <a:rPr lang="en-US" altLang="ko-KR" sz="1600" dirty="0"/>
+                        <a:rPr lang="en-US" altLang="ko-KR" sz="1400" dirty="0">
+                          <a:latin typeface="나눔바른고딕" panose="020B0603020101020101" pitchFamily="34" charset="-127"/>
+                          <a:ea typeface="나눔바른고딕" panose="020B0603020101020101" pitchFamily="34" charset="-127"/>
+                        </a:rPr>
                         <a:t>, </a:t>
                       </a:r>
                       <a:r>
-                        <a:rPr lang="ko-KR" altLang="en-US" sz="1600" dirty="0"/>
+                        <a:rPr lang="ko-KR" altLang="en-US" sz="1400" dirty="0">
+                          <a:latin typeface="나눔바른고딕" panose="020B0603020101020101" pitchFamily="34" charset="-127"/>
+                          <a:ea typeface="나눔바른고딕" panose="020B0603020101020101" pitchFamily="34" charset="-127"/>
+                        </a:rPr>
                         <a:t>게임 기반 클래스 작성</a:t>
                       </a:r>
                       <a:r>
-                        <a:rPr lang="en-US" altLang="ko-KR" sz="1600" dirty="0"/>
+                        <a:rPr lang="en-US" altLang="ko-KR" sz="1400" dirty="0">
+                          <a:latin typeface="나눔바른고딕" panose="020B0603020101020101" pitchFamily="34" charset="-127"/>
+                          <a:ea typeface="나눔바른고딕" panose="020B0603020101020101" pitchFamily="34" charset="-127"/>
+                        </a:rPr>
                         <a:t>, </a:t>
                       </a:r>
                       <a:br>
-                        <a:rPr lang="en-US" altLang="ko-KR" sz="1600" dirty="0"/>
+                        <a:rPr lang="en-US" altLang="ko-KR" sz="1400" dirty="0">
+                          <a:latin typeface="나눔바른고딕" panose="020B0603020101020101" pitchFamily="34" charset="-127"/>
+                          <a:ea typeface="나눔바른고딕" panose="020B0603020101020101" pitchFamily="34" charset="-127"/>
+                        </a:rPr>
                       </a:br>
                       <a:r>
-                        <a:rPr lang="en-US" altLang="ko-KR" sz="1600" dirty="0" err="1"/>
+                        <a:rPr lang="en-US" altLang="ko-KR" sz="1400" dirty="0" err="1">
+                          <a:latin typeface="나눔바른고딕" panose="020B0603020101020101" pitchFamily="34" charset="-127"/>
+                          <a:ea typeface="나눔바른고딕" panose="020B0603020101020101" pitchFamily="34" charset="-127"/>
+                        </a:rPr>
                         <a:t>fbx</a:t>
                       </a:r>
                       <a:r>
-                        <a:rPr lang="en-US" altLang="ko-KR" sz="1600" dirty="0"/>
+                        <a:rPr lang="en-US" altLang="ko-KR" sz="1400" dirty="0">
+                          <a:latin typeface="나눔바른고딕" panose="020B0603020101020101" pitchFamily="34" charset="-127"/>
+                          <a:ea typeface="나눔바른고딕" panose="020B0603020101020101" pitchFamily="34" charset="-127"/>
+                        </a:rPr>
                         <a:t> </a:t>
                       </a:r>
                       <a:r>
-                        <a:rPr lang="ko-KR" altLang="en-US" sz="1600" dirty="0"/>
+                        <a:rPr lang="ko-KR" altLang="en-US" sz="1400" dirty="0">
+                          <a:latin typeface="나눔바른고딕" panose="020B0603020101020101" pitchFamily="34" charset="-127"/>
+                          <a:ea typeface="나눔바른고딕" panose="020B0603020101020101" pitchFamily="34" charset="-127"/>
+                        </a:rPr>
                         <a:t>파일 </a:t>
                       </a:r>
                       <a:r>
-                        <a:rPr lang="ko-KR" altLang="en-US" sz="1600" dirty="0" err="1"/>
+                        <a:rPr lang="ko-KR" altLang="en-US" sz="1400" dirty="0" err="1">
+                          <a:latin typeface="나눔바른고딕" panose="020B0603020101020101" pitchFamily="34" charset="-127"/>
+                          <a:ea typeface="나눔바른고딕" panose="020B0603020101020101" pitchFamily="34" charset="-127"/>
+                        </a:rPr>
                         <a:t>파싱</a:t>
                       </a:r>
                       <a:r>
-                        <a:rPr lang="en-US" altLang="ko-KR" sz="1600" baseline="0" dirty="0"/>
+                        <a:rPr lang="en-US" altLang="ko-KR" sz="1400" baseline="0" dirty="0">
+                          <a:latin typeface="나눔바른고딕" panose="020B0603020101020101" pitchFamily="34" charset="-127"/>
+                          <a:ea typeface="나눔바른고딕" panose="020B0603020101020101" pitchFamily="34" charset="-127"/>
+                        </a:rPr>
                         <a:t>, </a:t>
                       </a:r>
                       <a:r>
-                        <a:rPr lang="ko-KR" altLang="en-US" sz="1600" baseline="0" dirty="0"/>
+                        <a:rPr lang="ko-KR" altLang="en-US" sz="1400" baseline="0" dirty="0">
+                          <a:latin typeface="나눔바른고딕" panose="020B0603020101020101" pitchFamily="34" charset="-127"/>
+                          <a:ea typeface="나눔바른고딕" panose="020B0603020101020101" pitchFamily="34" charset="-127"/>
+                        </a:rPr>
                         <a:t>렌더링</a:t>
                       </a:r>
                       <a:r>
-                        <a:rPr lang="en-US" altLang="ko-KR" sz="1600" baseline="0" dirty="0"/>
+                        <a:rPr lang="en-US" altLang="ko-KR" sz="1400" baseline="0" dirty="0">
+                          <a:latin typeface="나눔바른고딕" panose="020B0603020101020101" pitchFamily="34" charset="-127"/>
+                          <a:ea typeface="나눔바른고딕" panose="020B0603020101020101" pitchFamily="34" charset="-127"/>
+                        </a:rPr>
                         <a:t>, </a:t>
                       </a:r>
                       <a:r>
-                        <a:rPr lang="ko-KR" altLang="en-US" sz="1600" baseline="0" dirty="0"/>
+                        <a:rPr lang="ko-KR" altLang="en-US" sz="1400" baseline="0" dirty="0">
+                          <a:latin typeface="나눔바른고딕" panose="020B0603020101020101" pitchFamily="34" charset="-127"/>
+                          <a:ea typeface="나눔바른고딕" panose="020B0603020101020101" pitchFamily="34" charset="-127"/>
+                        </a:rPr>
                         <a:t>애니메이션 재생</a:t>
                       </a:r>
-                      <a:endParaRPr lang="ko-KR" altLang="en-US" sz="1600" dirty="0"/>
+                      <a:endParaRPr lang="ko-KR" altLang="en-US" sz="1400" dirty="0">
+                        <a:latin typeface="나눔바른고딕" panose="020B0603020101020101" pitchFamily="34" charset="-127"/>
+                        <a:ea typeface="나눔바른고딕" panose="020B0603020101020101" pitchFamily="34" charset="-127"/>
+                      </a:endParaRPr>
                     </a:p>
                   </a:txBody>
-                  <a:tcPr/>
+                  <a:tcPr anchor="ctr"/>
                 </a:tc>
                 <a:extLst>
                   <a:ext uri="{0D108BD9-81ED-4DB2-BD59-A6C34878D82A}">
-                    <a16:rowId xmlns:a16="http://schemas.microsoft.com/office/drawing/2014/main" val="10001"/>
+                    <a16:rowId xmlns:a16="http://schemas.microsoft.com/office/drawing/2014/main" xmlns="" val="10001"/>
                   </a:ext>
                 </a:extLst>
               </a:tr>
@@ -4630,13 +4911,19 @@
                     <a:p>
                       <a:pPr algn="ctr" latinLnBrk="1"/>
                       <a:r>
-                        <a:rPr lang="en-US" altLang="ko-KR" dirty="0"/>
+                        <a:rPr lang="en-US" altLang="ko-KR" dirty="0">
+                          <a:latin typeface="나눔바른고딕" panose="020B0603020101020101" pitchFamily="34" charset="-127"/>
+                          <a:ea typeface="나눔바른고딕" panose="020B0603020101020101" pitchFamily="34" charset="-127"/>
+                        </a:rPr>
                         <a:t>2</a:t>
                       </a:r>
-                      <a:endParaRPr lang="ko-KR" altLang="en-US" dirty="0"/>
+                      <a:endParaRPr lang="ko-KR" altLang="en-US" dirty="0">
+                        <a:latin typeface="나눔바른고딕" panose="020B0603020101020101" pitchFamily="34" charset="-127"/>
+                        <a:ea typeface="나눔바른고딕" panose="020B0603020101020101" pitchFamily="34" charset="-127"/>
+                      </a:endParaRPr>
                     </a:p>
                   </a:txBody>
-                  <a:tcPr/>
+                  <a:tcPr anchor="ctr"/>
                 </a:tc>
                 <a:tc>
                   <a:txBody>
@@ -4645,31 +4932,46 @@
                     <a:p>
                       <a:pPr latinLnBrk="1"/>
                       <a:r>
-                        <a:rPr lang="ko-KR" altLang="en-US" sz="1600" dirty="0"/>
+                        <a:rPr lang="ko-KR" altLang="en-US" sz="1400" dirty="0">
+                          <a:latin typeface="나눔바른고딕" panose="020B0603020101020101" pitchFamily="34" charset="-127"/>
+                          <a:ea typeface="나눔바른고딕" panose="020B0603020101020101" pitchFamily="34" charset="-127"/>
+                        </a:rPr>
                         <a:t>애니메이션 시스템</a:t>
                       </a:r>
                       <a:r>
-                        <a:rPr lang="en-US" altLang="ko-KR" sz="1600" dirty="0"/>
+                        <a:rPr lang="en-US" altLang="ko-KR" sz="1400" dirty="0">
+                          <a:latin typeface="나눔바른고딕" panose="020B0603020101020101" pitchFamily="34" charset="-127"/>
+                          <a:ea typeface="나눔바른고딕" panose="020B0603020101020101" pitchFamily="34" charset="-127"/>
+                        </a:rPr>
                         <a:t>, </a:t>
                       </a:r>
                       <a:r>
-                        <a:rPr lang="ko-KR" altLang="en-US" sz="1600" dirty="0"/>
+                        <a:rPr lang="ko-KR" altLang="en-US" sz="1400" dirty="0">
+                          <a:latin typeface="나눔바른고딕" panose="020B0603020101020101" pitchFamily="34" charset="-127"/>
+                          <a:ea typeface="나눔바른고딕" panose="020B0603020101020101" pitchFamily="34" charset="-127"/>
+                        </a:rPr>
                         <a:t>물리엔진 적용</a:t>
                       </a:r>
                       <a:r>
-                        <a:rPr lang="en-US" altLang="ko-KR" sz="1600" dirty="0"/>
+                        <a:rPr lang="en-US" altLang="ko-KR" sz="1400" dirty="0">
+                          <a:latin typeface="나눔바른고딕" panose="020B0603020101020101" pitchFamily="34" charset="-127"/>
+                          <a:ea typeface="나눔바른고딕" panose="020B0603020101020101" pitchFamily="34" charset="-127"/>
+                        </a:rPr>
                         <a:t>,</a:t>
                       </a:r>
                     </a:p>
                     <a:p>
                       <a:pPr latinLnBrk="1"/>
                       <a:r>
-                        <a:rPr lang="ko-KR" altLang="en-US" sz="1600" dirty="0"/>
+                        <a:rPr lang="ko-KR" altLang="en-US" sz="1400" dirty="0">
+                          <a:latin typeface="나눔바른고딕" panose="020B0603020101020101" pitchFamily="34" charset="-127"/>
+                          <a:ea typeface="나눔바른고딕" panose="020B0603020101020101" pitchFamily="34" charset="-127"/>
+                        </a:rPr>
                         <a:t>입력 바인딩</a:t>
                       </a:r>
                     </a:p>
                   </a:txBody>
-                  <a:tcPr/>
+                  <a:tcPr anchor="ctr"/>
                 </a:tc>
                 <a:tc>
                   <a:txBody>
@@ -4678,75 +4980,120 @@
                     <a:p>
                       <a:pPr latinLnBrk="1"/>
                       <a:r>
-                        <a:rPr lang="ko-KR" altLang="en-US" sz="1600" dirty="0"/>
+                        <a:rPr lang="ko-KR" altLang="en-US" sz="1400" dirty="0">
+                          <a:latin typeface="나눔바른고딕" panose="020B0603020101020101" pitchFamily="34" charset="-127"/>
+                          <a:ea typeface="나눔바른고딕" panose="020B0603020101020101" pitchFamily="34" charset="-127"/>
+                        </a:rPr>
                         <a:t>캐릭터 애니메이션 </a:t>
                       </a:r>
                       <a:r>
-                        <a:rPr lang="ko-KR" altLang="en-US" sz="1600" dirty="0" err="1"/>
+                        <a:rPr lang="ko-KR" altLang="en-US" sz="1400" dirty="0" err="1">
+                          <a:latin typeface="나눔바른고딕" panose="020B0603020101020101" pitchFamily="34" charset="-127"/>
+                          <a:ea typeface="나눔바른고딕" panose="020B0603020101020101" pitchFamily="34" charset="-127"/>
+                        </a:rPr>
                         <a:t>블렌드</a:t>
                       </a:r>
                       <a:r>
-                        <a:rPr lang="en-US" altLang="ko-KR" sz="1600" dirty="0"/>
+                        <a:rPr lang="en-US" altLang="ko-KR" sz="1400" dirty="0">
+                          <a:latin typeface="나눔바른고딕" panose="020B0603020101020101" pitchFamily="34" charset="-127"/>
+                          <a:ea typeface="나눔바른고딕" panose="020B0603020101020101" pitchFamily="34" charset="-127"/>
+                        </a:rPr>
                         <a:t>, </a:t>
                       </a:r>
                       <a:r>
-                        <a:rPr lang="ko-KR" altLang="en-US" sz="1600" dirty="0"/>
+                        <a:rPr lang="ko-KR" altLang="en-US" sz="1400" dirty="0">
+                          <a:latin typeface="나눔바른고딕" panose="020B0603020101020101" pitchFamily="34" charset="-127"/>
+                          <a:ea typeface="나눔바른고딕" panose="020B0603020101020101" pitchFamily="34" charset="-127"/>
+                        </a:rPr>
                         <a:t>애니메이션 </a:t>
                       </a:r>
                       <a:r>
-                        <a:rPr lang="ko-KR" altLang="en-US" sz="1600" dirty="0" err="1"/>
+                        <a:rPr lang="ko-KR" altLang="en-US" sz="1400" dirty="0" err="1">
+                          <a:latin typeface="나눔바른고딕" panose="020B0603020101020101" pitchFamily="34" charset="-127"/>
+                          <a:ea typeface="나눔바른고딕" panose="020B0603020101020101" pitchFamily="34" charset="-127"/>
+                        </a:rPr>
                         <a:t>상태머신</a:t>
                       </a:r>
                       <a:r>
-                        <a:rPr lang="en-US" altLang="ko-KR" sz="1600" dirty="0"/>
+                        <a:rPr lang="en-US" altLang="ko-KR" sz="1400" dirty="0">
+                          <a:latin typeface="나눔바른고딕" panose="020B0603020101020101" pitchFamily="34" charset="-127"/>
+                          <a:ea typeface="나눔바른고딕" panose="020B0603020101020101" pitchFamily="34" charset="-127"/>
+                        </a:rPr>
                         <a:t>,</a:t>
                       </a:r>
                     </a:p>
                     <a:p>
                       <a:pPr latinLnBrk="1"/>
                       <a:r>
-                        <a:rPr lang="ko-KR" altLang="en-US" sz="1600" dirty="0"/>
+                        <a:rPr lang="ko-KR" altLang="en-US" sz="1400" dirty="0">
+                          <a:latin typeface="나눔바른고딕" panose="020B0603020101020101" pitchFamily="34" charset="-127"/>
+                          <a:ea typeface="나눔바른고딕" panose="020B0603020101020101" pitchFamily="34" charset="-127"/>
+                        </a:rPr>
                         <a:t>물리엔진</a:t>
                       </a:r>
                       <a:r>
-                        <a:rPr lang="en-US" altLang="ko-KR" sz="1600" dirty="0"/>
+                        <a:rPr lang="en-US" altLang="ko-KR" sz="1400" dirty="0">
+                          <a:latin typeface="나눔바른고딕" panose="020B0603020101020101" pitchFamily="34" charset="-127"/>
+                          <a:ea typeface="나눔바른고딕" panose="020B0603020101020101" pitchFamily="34" charset="-127"/>
+                        </a:rPr>
                         <a:t>(PhysX) </a:t>
                       </a:r>
                       <a:r>
-                        <a:rPr lang="ko-KR" altLang="en-US" sz="1600" dirty="0"/>
+                        <a:rPr lang="ko-KR" altLang="en-US" sz="1400" dirty="0">
+                          <a:latin typeface="나눔바른고딕" panose="020B0603020101020101" pitchFamily="34" charset="-127"/>
+                          <a:ea typeface="나눔바른고딕" panose="020B0603020101020101" pitchFamily="34" charset="-127"/>
+                        </a:rPr>
                         <a:t>적용</a:t>
                       </a:r>
                       <a:r>
-                        <a:rPr lang="en-US" altLang="ko-KR" sz="1600" dirty="0"/>
+                        <a:rPr lang="en-US" altLang="ko-KR" sz="1400" dirty="0">
+                          <a:latin typeface="나눔바른고딕" panose="020B0603020101020101" pitchFamily="34" charset="-127"/>
+                          <a:ea typeface="나눔바른고딕" panose="020B0603020101020101" pitchFamily="34" charset="-127"/>
+                        </a:rPr>
                         <a:t>, </a:t>
                       </a:r>
                       <a:r>
-                        <a:rPr lang="ko-KR" altLang="en-US" sz="1600" dirty="0"/>
+                        <a:rPr lang="ko-KR" altLang="en-US" sz="1400" dirty="0">
+                          <a:latin typeface="나눔바른고딕" panose="020B0603020101020101" pitchFamily="34" charset="-127"/>
+                          <a:ea typeface="나눔바른고딕" panose="020B0603020101020101" pitchFamily="34" charset="-127"/>
+                        </a:rPr>
                         <a:t>캐릭터 입력 바인딩</a:t>
                       </a:r>
                       <a:r>
-                        <a:rPr lang="en-US" altLang="ko-KR" sz="1600" dirty="0"/>
+                        <a:rPr lang="en-US" altLang="ko-KR" sz="1400" dirty="0">
+                          <a:latin typeface="나눔바른고딕" panose="020B0603020101020101" pitchFamily="34" charset="-127"/>
+                          <a:ea typeface="나눔바른고딕" panose="020B0603020101020101" pitchFamily="34" charset="-127"/>
+                        </a:rPr>
                         <a:t>, </a:t>
                       </a:r>
                       <a:r>
-                        <a:rPr lang="ko-KR" altLang="en-US" sz="1600" dirty="0"/>
+                        <a:rPr lang="ko-KR" altLang="en-US" sz="1400" dirty="0">
+                          <a:latin typeface="나눔바른고딕" panose="020B0603020101020101" pitchFamily="34" charset="-127"/>
+                          <a:ea typeface="나눔바른고딕" panose="020B0603020101020101" pitchFamily="34" charset="-127"/>
+                        </a:rPr>
                         <a:t>캐릭터 </a:t>
                       </a:r>
                       <a:r>
-                        <a:rPr lang="ko-KR" altLang="en-US" sz="1600" dirty="0" err="1"/>
+                        <a:rPr lang="ko-KR" altLang="en-US" sz="1400" dirty="0" err="1">
+                          <a:latin typeface="나눔바른고딕" panose="020B0603020101020101" pitchFamily="34" charset="-127"/>
+                          <a:ea typeface="나눔바른고딕" panose="020B0603020101020101" pitchFamily="34" charset="-127"/>
+                        </a:rPr>
                         <a:t>로코모션</a:t>
                       </a:r>
                       <a:r>
-                        <a:rPr lang="ko-KR" altLang="en-US" sz="1600" dirty="0"/>
+                        <a:rPr lang="ko-KR" altLang="en-US" sz="1400" dirty="0">
+                          <a:latin typeface="나눔바른고딕" panose="020B0603020101020101" pitchFamily="34" charset="-127"/>
+                          <a:ea typeface="나눔바른고딕" panose="020B0603020101020101" pitchFamily="34" charset="-127"/>
+                        </a:rPr>
                         <a:t> 적용</a:t>
                       </a:r>
                     </a:p>
                   </a:txBody>
-                  <a:tcPr/>
+                  <a:tcPr anchor="ctr"/>
                 </a:tc>
                 <a:extLst>
                   <a:ext uri="{0D108BD9-81ED-4DB2-BD59-A6C34878D82A}">
-                    <a16:rowId xmlns:a16="http://schemas.microsoft.com/office/drawing/2014/main" val="10002"/>
+                    <a16:rowId xmlns:a16="http://schemas.microsoft.com/office/drawing/2014/main" xmlns="" val="10002"/>
                   </a:ext>
                 </a:extLst>
               </a:tr>
@@ -4758,13 +5105,19 @@
                     <a:p>
                       <a:pPr algn="ctr" latinLnBrk="1"/>
                       <a:r>
-                        <a:rPr lang="en-US" altLang="ko-KR" dirty="0"/>
+                        <a:rPr lang="en-US" altLang="ko-KR" dirty="0">
+                          <a:latin typeface="나눔바른고딕" panose="020B0603020101020101" pitchFamily="34" charset="-127"/>
+                          <a:ea typeface="나눔바른고딕" panose="020B0603020101020101" pitchFamily="34" charset="-127"/>
+                        </a:rPr>
                         <a:t>3</a:t>
                       </a:r>
-                      <a:endParaRPr lang="ko-KR" altLang="en-US" dirty="0"/>
+                      <a:endParaRPr lang="ko-KR" altLang="en-US" dirty="0">
+                        <a:latin typeface="나눔바른고딕" panose="020B0603020101020101" pitchFamily="34" charset="-127"/>
+                        <a:ea typeface="나눔바른고딕" panose="020B0603020101020101" pitchFamily="34" charset="-127"/>
+                      </a:endParaRPr>
                     </a:p>
                   </a:txBody>
-                  <a:tcPr/>
+                  <a:tcPr anchor="ctr"/>
                 </a:tc>
                 <a:tc>
                   <a:txBody>
@@ -4773,32 +5126,50 @@
                     <a:p>
                       <a:pPr latinLnBrk="1"/>
                       <a:r>
-                        <a:rPr lang="ko-KR" altLang="en-US" sz="1600" dirty="0"/>
+                        <a:rPr lang="ko-KR" altLang="en-US" sz="1400" dirty="0">
+                          <a:latin typeface="나눔바른고딕" panose="020B0603020101020101" pitchFamily="34" charset="-127"/>
+                          <a:ea typeface="나눔바른고딕" panose="020B0603020101020101" pitchFamily="34" charset="-127"/>
+                        </a:rPr>
                         <a:t>씬 배치</a:t>
                       </a:r>
                       <a:r>
-                        <a:rPr lang="en-US" altLang="ko-KR" sz="1600" dirty="0"/>
+                        <a:rPr lang="en-US" altLang="ko-KR" sz="1400" dirty="0">
+                          <a:latin typeface="나눔바른고딕" panose="020B0603020101020101" pitchFamily="34" charset="-127"/>
+                          <a:ea typeface="나눔바른고딕" panose="020B0603020101020101" pitchFamily="34" charset="-127"/>
+                        </a:rPr>
                         <a:t>, </a:t>
                       </a:r>
                       <a:r>
-                        <a:rPr lang="ko-KR" altLang="en-US" sz="1600" dirty="0"/>
+                        <a:rPr lang="ko-KR" altLang="en-US" sz="1400" dirty="0">
+                          <a:latin typeface="나눔바른고딕" panose="020B0603020101020101" pitchFamily="34" charset="-127"/>
+                          <a:ea typeface="나눔바른고딕" panose="020B0603020101020101" pitchFamily="34" charset="-127"/>
+                        </a:rPr>
                         <a:t>캐릭터</a:t>
                       </a:r>
                       <a:r>
-                        <a:rPr lang="en-US" altLang="ko-KR" sz="1600" dirty="0"/>
+                        <a:rPr lang="en-US" altLang="ko-KR" sz="1400" dirty="0">
+                          <a:latin typeface="나눔바른고딕" panose="020B0603020101020101" pitchFamily="34" charset="-127"/>
+                          <a:ea typeface="나눔바른고딕" panose="020B0603020101020101" pitchFamily="34" charset="-127"/>
+                        </a:rPr>
                         <a:t> </a:t>
                       </a:r>
                       <a:r>
-                        <a:rPr lang="ko-KR" altLang="en-US" sz="1600" dirty="0" err="1"/>
+                        <a:rPr lang="ko-KR" altLang="en-US" sz="1400" dirty="0" err="1">
+                          <a:latin typeface="나눔바른고딕" panose="020B0603020101020101" pitchFamily="34" charset="-127"/>
+                          <a:ea typeface="나눔바른고딕" panose="020B0603020101020101" pitchFamily="34" charset="-127"/>
+                        </a:rPr>
                         <a:t>파쿠르</a:t>
                       </a:r>
                       <a:r>
-                        <a:rPr lang="ko-KR" altLang="en-US" sz="1600" dirty="0"/>
+                        <a:rPr lang="ko-KR" altLang="en-US" sz="1400" dirty="0">
+                          <a:latin typeface="나눔바른고딕" panose="020B0603020101020101" pitchFamily="34" charset="-127"/>
+                          <a:ea typeface="나눔바른고딕" panose="020B0603020101020101" pitchFamily="34" charset="-127"/>
+                        </a:rPr>
                         <a:t> 애니메이션 적용</a:t>
                       </a:r>
                     </a:p>
                   </a:txBody>
-                  <a:tcPr/>
+                  <a:tcPr anchor="ctr"/>
                 </a:tc>
                 <a:tc>
                   <a:txBody>
@@ -4807,68 +5178,113 @@
                     <a:p>
                       <a:pPr latinLnBrk="1"/>
                       <a:r>
-                        <a:rPr lang="ko-KR" altLang="en-US" sz="1600" dirty="0"/>
+                        <a:rPr lang="ko-KR" altLang="en-US" sz="1400" dirty="0">
+                          <a:latin typeface="나눔바른고딕" panose="020B0603020101020101" pitchFamily="34" charset="-127"/>
+                          <a:ea typeface="나눔바른고딕" panose="020B0603020101020101" pitchFamily="34" charset="-127"/>
+                        </a:rPr>
                         <a:t>씬</a:t>
                       </a:r>
                       <a:r>
-                        <a:rPr lang="en-US" altLang="ko-KR" sz="1600" baseline="0" dirty="0"/>
+                        <a:rPr lang="en-US" altLang="ko-KR" sz="1400" baseline="0" dirty="0">
+                          <a:latin typeface="나눔바른고딕" panose="020B0603020101020101" pitchFamily="34" charset="-127"/>
+                          <a:ea typeface="나눔바른고딕" panose="020B0603020101020101" pitchFamily="34" charset="-127"/>
+                        </a:rPr>
                         <a:t> </a:t>
                       </a:r>
                       <a:r>
-                        <a:rPr lang="ko-KR" altLang="en-US" sz="1600" baseline="0" dirty="0"/>
+                        <a:rPr lang="ko-KR" altLang="en-US" sz="1400" baseline="0" dirty="0">
+                          <a:latin typeface="나눔바른고딕" panose="020B0603020101020101" pitchFamily="34" charset="-127"/>
+                          <a:ea typeface="나눔바른고딕" panose="020B0603020101020101" pitchFamily="34" charset="-127"/>
+                        </a:rPr>
                         <a:t>데이터 직렬화 </a:t>
                       </a:r>
                       <a:r>
-                        <a:rPr lang="en-US" altLang="ko-KR" sz="1600" baseline="0" dirty="0"/>
+                        <a:rPr lang="en-US" altLang="ko-KR" sz="1400" baseline="0" dirty="0">
+                          <a:latin typeface="나눔바른고딕" panose="020B0603020101020101" pitchFamily="34" charset="-127"/>
+                          <a:ea typeface="나눔바른고딕" panose="020B0603020101020101" pitchFamily="34" charset="-127"/>
+                        </a:rPr>
                         <a:t>(</a:t>
                       </a:r>
                       <a:r>
-                        <a:rPr lang="ko-KR" altLang="en-US" sz="1600" baseline="0" dirty="0"/>
+                        <a:rPr lang="ko-KR" altLang="en-US" sz="1400" baseline="0" dirty="0">
+                          <a:latin typeface="나눔바른고딕" panose="020B0603020101020101" pitchFamily="34" charset="-127"/>
+                          <a:ea typeface="나눔바른고딕" panose="020B0603020101020101" pitchFamily="34" charset="-127"/>
+                        </a:rPr>
                         <a:t>장애물 배치 정보</a:t>
                       </a:r>
                       <a:r>
-                        <a:rPr lang="en-US" altLang="ko-KR" sz="1600" baseline="0" dirty="0"/>
+                        <a:rPr lang="en-US" altLang="ko-KR" sz="1400" baseline="0" dirty="0">
+                          <a:latin typeface="나눔바른고딕" panose="020B0603020101020101" pitchFamily="34" charset="-127"/>
+                          <a:ea typeface="나눔바른고딕" panose="020B0603020101020101" pitchFamily="34" charset="-127"/>
+                        </a:rPr>
                         <a:t>), </a:t>
                       </a:r>
                       <a:r>
-                        <a:rPr lang="ko-KR" altLang="en-US" sz="1600" baseline="0" dirty="0"/>
+                        <a:rPr lang="ko-KR" altLang="en-US" sz="1400" baseline="0" dirty="0">
+                          <a:latin typeface="나눔바른고딕" panose="020B0603020101020101" pitchFamily="34" charset="-127"/>
+                          <a:ea typeface="나눔바른고딕" panose="020B0603020101020101" pitchFamily="34" charset="-127"/>
+                        </a:rPr>
                         <a:t>장애물 높이 인식</a:t>
                       </a:r>
                       <a:r>
-                        <a:rPr lang="en-US" altLang="ko-KR" sz="1600" baseline="0" dirty="0"/>
+                        <a:rPr lang="en-US" altLang="ko-KR" sz="1400" baseline="0" dirty="0">
+                          <a:latin typeface="나눔바른고딕" panose="020B0603020101020101" pitchFamily="34" charset="-127"/>
+                          <a:ea typeface="나눔바른고딕" panose="020B0603020101020101" pitchFamily="34" charset="-127"/>
+                        </a:rPr>
                         <a:t>, </a:t>
                       </a:r>
                       <a:br>
-                        <a:rPr lang="en-US" altLang="ko-KR" sz="1600" baseline="0" dirty="0"/>
+                        <a:rPr lang="en-US" altLang="ko-KR" sz="1400" baseline="0" dirty="0">
+                          <a:latin typeface="나눔바른고딕" panose="020B0603020101020101" pitchFamily="34" charset="-127"/>
+                          <a:ea typeface="나눔바른고딕" panose="020B0603020101020101" pitchFamily="34" charset="-127"/>
+                        </a:rPr>
                       </a:br>
                       <a:r>
-                        <a:rPr lang="ko-KR" altLang="en-US" sz="1600" baseline="0" dirty="0"/>
+                        <a:rPr lang="ko-KR" altLang="en-US" sz="1400" baseline="0" dirty="0">
+                          <a:latin typeface="나눔바른고딕" panose="020B0603020101020101" pitchFamily="34" charset="-127"/>
+                          <a:ea typeface="나눔바른고딕" panose="020B0603020101020101" pitchFamily="34" charset="-127"/>
+                        </a:rPr>
                         <a:t>인식한 장애물에 대한 </a:t>
                       </a:r>
                       <a:r>
-                        <a:rPr lang="ko-KR" altLang="en-US" sz="1600" baseline="0" dirty="0" err="1"/>
+                        <a:rPr lang="ko-KR" altLang="en-US" sz="1400" baseline="0" dirty="0" err="1">
+                          <a:latin typeface="나눔바른고딕" panose="020B0603020101020101" pitchFamily="34" charset="-127"/>
+                          <a:ea typeface="나눔바른고딕" panose="020B0603020101020101" pitchFamily="34" charset="-127"/>
+                        </a:rPr>
                         <a:t>파쿠르</a:t>
                       </a:r>
                       <a:r>
-                        <a:rPr lang="ko-KR" altLang="en-US" sz="1600" baseline="0" dirty="0"/>
+                        <a:rPr lang="ko-KR" altLang="en-US" sz="1400" baseline="0" dirty="0">
+                          <a:latin typeface="나눔바른고딕" panose="020B0603020101020101" pitchFamily="34" charset="-127"/>
+                          <a:ea typeface="나눔바른고딕" panose="020B0603020101020101" pitchFamily="34" charset="-127"/>
+                        </a:rPr>
                         <a:t> 애니메이션 선택</a:t>
                       </a:r>
                       <a:r>
-                        <a:rPr lang="en-US" altLang="ko-KR" sz="1600" baseline="0" dirty="0"/>
+                        <a:rPr lang="en-US" altLang="ko-KR" sz="1400" baseline="0" dirty="0">
+                          <a:latin typeface="나눔바른고딕" panose="020B0603020101020101" pitchFamily="34" charset="-127"/>
+                          <a:ea typeface="나눔바른고딕" panose="020B0603020101020101" pitchFamily="34" charset="-127"/>
+                        </a:rPr>
                         <a:t> </a:t>
                       </a:r>
                       <a:r>
-                        <a:rPr lang="ko-KR" altLang="en-US" sz="1600" baseline="0" dirty="0"/>
+                        <a:rPr lang="ko-KR" altLang="en-US" sz="1400" baseline="0" dirty="0">
+                          <a:latin typeface="나눔바른고딕" panose="020B0603020101020101" pitchFamily="34" charset="-127"/>
+                          <a:ea typeface="나눔바른고딕" panose="020B0603020101020101" pitchFamily="34" charset="-127"/>
+                        </a:rPr>
                         <a:t>및 출력</a:t>
                       </a:r>
-                      <a:endParaRPr lang="ko-KR" altLang="en-US" sz="1600" dirty="0"/>
+                      <a:endParaRPr lang="ko-KR" altLang="en-US" sz="1400" dirty="0">
+                        <a:latin typeface="나눔바른고딕" panose="020B0603020101020101" pitchFamily="34" charset="-127"/>
+                        <a:ea typeface="나눔바른고딕" panose="020B0603020101020101" pitchFamily="34" charset="-127"/>
+                      </a:endParaRPr>
                     </a:p>
                   </a:txBody>
-                  <a:tcPr/>
+                  <a:tcPr anchor="ctr"/>
                 </a:tc>
                 <a:extLst>
                   <a:ext uri="{0D108BD9-81ED-4DB2-BD59-A6C34878D82A}">
-                    <a16:rowId xmlns:a16="http://schemas.microsoft.com/office/drawing/2014/main" val="10003"/>
+                    <a16:rowId xmlns:a16="http://schemas.microsoft.com/office/drawing/2014/main" xmlns="" val="10003"/>
                   </a:ext>
                 </a:extLst>
               </a:tr>
@@ -4880,13 +5296,19 @@
                     <a:p>
                       <a:pPr algn="ctr" latinLnBrk="1"/>
                       <a:r>
-                        <a:rPr lang="en-US" altLang="ko-KR" dirty="0"/>
+                        <a:rPr lang="en-US" altLang="ko-KR" dirty="0">
+                          <a:latin typeface="나눔바른고딕" panose="020B0603020101020101" pitchFamily="34" charset="-127"/>
+                          <a:ea typeface="나눔바른고딕" panose="020B0603020101020101" pitchFamily="34" charset="-127"/>
+                        </a:rPr>
                         <a:t>4</a:t>
                       </a:r>
-                      <a:endParaRPr lang="ko-KR" altLang="en-US" dirty="0"/>
+                      <a:endParaRPr lang="ko-KR" altLang="en-US" dirty="0">
+                        <a:latin typeface="나눔바른고딕" panose="020B0603020101020101" pitchFamily="34" charset="-127"/>
+                        <a:ea typeface="나눔바른고딕" panose="020B0603020101020101" pitchFamily="34" charset="-127"/>
+                      </a:endParaRPr>
                     </a:p>
                   </a:txBody>
-                  <a:tcPr/>
+                  <a:tcPr anchor="ctr"/>
                 </a:tc>
                 <a:tc>
                   <a:txBody>
@@ -4895,21 +5317,33 @@
                     <a:p>
                       <a:pPr latinLnBrk="1"/>
                       <a:r>
-                        <a:rPr lang="ko-KR" altLang="en-US" sz="1600" dirty="0" err="1"/>
+                        <a:rPr lang="ko-KR" altLang="en-US" sz="1400" dirty="0" err="1">
+                          <a:latin typeface="나눔바른고딕" panose="020B0603020101020101" pitchFamily="34" charset="-127"/>
+                          <a:ea typeface="나눔바른고딕" panose="020B0603020101020101" pitchFamily="34" charset="-127"/>
+                        </a:rPr>
                         <a:t>파쿠르</a:t>
                       </a:r>
                       <a:r>
-                        <a:rPr lang="ko-KR" altLang="en-US" sz="1600" dirty="0"/>
+                        <a:rPr lang="ko-KR" altLang="en-US" sz="1400" dirty="0">
+                          <a:latin typeface="나눔바른고딕" panose="020B0603020101020101" pitchFamily="34" charset="-127"/>
+                          <a:ea typeface="나눔바른고딕" panose="020B0603020101020101" pitchFamily="34" charset="-127"/>
+                        </a:rPr>
                         <a:t> </a:t>
                       </a:r>
                       <a:r>
-                        <a:rPr lang="ko-KR" altLang="en-US" sz="1600" dirty="0" err="1"/>
+                        <a:rPr lang="ko-KR" altLang="en-US" sz="1400" dirty="0" err="1">
+                          <a:latin typeface="나눔바른고딕" panose="020B0603020101020101" pitchFamily="34" charset="-127"/>
+                          <a:ea typeface="나눔바른고딕" panose="020B0603020101020101" pitchFamily="34" charset="-127"/>
+                        </a:rPr>
                         <a:t>프로토타입</a:t>
                       </a:r>
-                      <a:endParaRPr lang="ko-KR" altLang="en-US" sz="1600" dirty="0"/>
+                      <a:endParaRPr lang="ko-KR" altLang="en-US" sz="1400" dirty="0">
+                        <a:latin typeface="나눔바른고딕" panose="020B0603020101020101" pitchFamily="34" charset="-127"/>
+                        <a:ea typeface="나눔바른고딕" panose="020B0603020101020101" pitchFamily="34" charset="-127"/>
+                      </a:endParaRPr>
                     </a:p>
                   </a:txBody>
-                  <a:tcPr/>
+                  <a:tcPr anchor="ctr"/>
                 </a:tc>
                 <a:tc>
                   <a:txBody>
@@ -4918,73 +5352,121 @@
                     <a:p>
                       <a:pPr latinLnBrk="1"/>
                       <a:r>
-                        <a:rPr lang="ko-KR" altLang="en-US" sz="1600" dirty="0"/>
+                        <a:rPr lang="ko-KR" altLang="en-US" sz="1400" dirty="0">
+                          <a:latin typeface="나눔바른고딕" panose="020B0603020101020101" pitchFamily="34" charset="-127"/>
+                          <a:ea typeface="나눔바른고딕" panose="020B0603020101020101" pitchFamily="34" charset="-127"/>
+                        </a:rPr>
                         <a:t>높이에 따른 장애물</a:t>
                       </a:r>
                       <a:r>
-                        <a:rPr lang="ko-KR" altLang="en-US" sz="1600" baseline="0" dirty="0"/>
+                        <a:rPr lang="ko-KR" altLang="en-US" sz="1400" baseline="0" dirty="0">
+                          <a:latin typeface="나눔바른고딕" panose="020B0603020101020101" pitchFamily="34" charset="-127"/>
+                          <a:ea typeface="나눔바른고딕" panose="020B0603020101020101" pitchFamily="34" charset="-127"/>
+                        </a:rPr>
                         <a:t> </a:t>
                       </a:r>
                       <a:r>
-                        <a:rPr lang="ko-KR" altLang="en-US" sz="1600" baseline="0" dirty="0" err="1"/>
+                        <a:rPr lang="ko-KR" altLang="en-US" sz="1400" baseline="0" dirty="0" err="1">
+                          <a:latin typeface="나눔바른고딕" panose="020B0603020101020101" pitchFamily="34" charset="-127"/>
+                          <a:ea typeface="나눔바른고딕" panose="020B0603020101020101" pitchFamily="34" charset="-127"/>
+                        </a:rPr>
                         <a:t>파쿠르</a:t>
                       </a:r>
                       <a:r>
-                        <a:rPr lang="ko-KR" altLang="en-US" sz="1600" baseline="0" dirty="0"/>
+                        <a:rPr lang="ko-KR" altLang="en-US" sz="1400" baseline="0" dirty="0">
+                          <a:latin typeface="나눔바른고딕" panose="020B0603020101020101" pitchFamily="34" charset="-127"/>
+                          <a:ea typeface="나눔바른고딕" panose="020B0603020101020101" pitchFamily="34" charset="-127"/>
+                        </a:rPr>
                         <a:t> 처리</a:t>
                       </a:r>
                       <a:r>
-                        <a:rPr lang="en-US" altLang="ko-KR" sz="1600" baseline="0" dirty="0"/>
+                        <a:rPr lang="en-US" altLang="ko-KR" sz="1400" baseline="0" dirty="0">
+                          <a:latin typeface="나눔바른고딕" panose="020B0603020101020101" pitchFamily="34" charset="-127"/>
+                          <a:ea typeface="나눔바른고딕" panose="020B0603020101020101" pitchFamily="34" charset="-127"/>
+                        </a:rPr>
                         <a:t>, </a:t>
                       </a:r>
                       <a:r>
-                        <a:rPr lang="ko-KR" altLang="en-US" sz="1600" dirty="0"/>
+                        <a:rPr lang="ko-KR" altLang="en-US" sz="1400" dirty="0">
+                          <a:latin typeface="나눔바른고딕" panose="020B0603020101020101" pitchFamily="34" charset="-127"/>
+                          <a:ea typeface="나눔바른고딕" panose="020B0603020101020101" pitchFamily="34" charset="-127"/>
+                        </a:rPr>
                         <a:t>평지</a:t>
                       </a:r>
                       <a:r>
-                        <a:rPr lang="en-US" altLang="ko-KR" sz="1600" dirty="0"/>
+                        <a:rPr lang="en-US" altLang="ko-KR" sz="1400" dirty="0">
+                          <a:latin typeface="나눔바른고딕" panose="020B0603020101020101" pitchFamily="34" charset="-127"/>
+                          <a:ea typeface="나눔바른고딕" panose="020B0603020101020101" pitchFamily="34" charset="-127"/>
+                        </a:rPr>
                         <a:t>-</a:t>
                       </a:r>
                       <a:r>
-                        <a:rPr lang="ko-KR" altLang="en-US" sz="1600" dirty="0"/>
+                        <a:rPr lang="ko-KR" altLang="en-US" sz="1400" dirty="0">
+                          <a:latin typeface="나눔바른고딕" panose="020B0603020101020101" pitchFamily="34" charset="-127"/>
+                          <a:ea typeface="나눔바른고딕" panose="020B0603020101020101" pitchFamily="34" charset="-127"/>
+                        </a:rPr>
                         <a:t>벽면 간 애니메이션</a:t>
                       </a:r>
                       <a:r>
-                        <a:rPr lang="ko-KR" altLang="en-US" sz="1600" baseline="0" dirty="0"/>
+                        <a:rPr lang="ko-KR" altLang="en-US" sz="1400" baseline="0" dirty="0">
+                          <a:latin typeface="나눔바른고딕" panose="020B0603020101020101" pitchFamily="34" charset="-127"/>
+                          <a:ea typeface="나눔바른고딕" panose="020B0603020101020101" pitchFamily="34" charset="-127"/>
+                        </a:rPr>
                         <a:t> 상태</a:t>
                       </a:r>
                       <a:r>
-                        <a:rPr lang="ko-KR" altLang="en-US" sz="1600" dirty="0"/>
+                        <a:rPr lang="ko-KR" altLang="en-US" sz="1400" dirty="0">
+                          <a:latin typeface="나눔바른고딕" panose="020B0603020101020101" pitchFamily="34" charset="-127"/>
+                          <a:ea typeface="나눔바른고딕" panose="020B0603020101020101" pitchFamily="34" charset="-127"/>
+                        </a:rPr>
                         <a:t> 전환</a:t>
                       </a:r>
                       <a:r>
-                        <a:rPr lang="en-US" altLang="ko-KR" sz="1600" baseline="0" dirty="0"/>
+                        <a:rPr lang="en-US" altLang="ko-KR" sz="1400" baseline="0" dirty="0">
+                          <a:latin typeface="나눔바른고딕" panose="020B0603020101020101" pitchFamily="34" charset="-127"/>
+                          <a:ea typeface="나눔바른고딕" panose="020B0603020101020101" pitchFamily="34" charset="-127"/>
+                        </a:rPr>
                         <a:t> (</a:t>
                       </a:r>
                       <a:r>
-                        <a:rPr lang="ko-KR" altLang="en-US" sz="1600" baseline="0" dirty="0"/>
+                        <a:rPr lang="ko-KR" altLang="en-US" sz="1400" baseline="0" dirty="0">
+                          <a:latin typeface="나눔바른고딕" panose="020B0603020101020101" pitchFamily="34" charset="-127"/>
+                          <a:ea typeface="나눔바른고딕" panose="020B0603020101020101" pitchFamily="34" charset="-127"/>
+                        </a:rPr>
                         <a:t>벽면을 올라 평지에 도달</a:t>
                       </a:r>
                       <a:r>
-                        <a:rPr lang="en-US" altLang="ko-KR" sz="1600" baseline="0" dirty="0"/>
+                        <a:rPr lang="en-US" altLang="ko-KR" sz="1400" baseline="0" dirty="0">
+                          <a:latin typeface="나눔바른고딕" panose="020B0603020101020101" pitchFamily="34" charset="-127"/>
+                          <a:ea typeface="나눔바른고딕" panose="020B0603020101020101" pitchFamily="34" charset="-127"/>
+                        </a:rPr>
                         <a:t>, </a:t>
                       </a:r>
                       <a:r>
-                        <a:rPr lang="ko-KR" altLang="en-US" sz="1600" baseline="0" dirty="0"/>
+                        <a:rPr lang="ko-KR" altLang="en-US" sz="1400" baseline="0" dirty="0">
+                          <a:latin typeface="나눔바른고딕" panose="020B0603020101020101" pitchFamily="34" charset="-127"/>
+                          <a:ea typeface="나눔바른고딕" panose="020B0603020101020101" pitchFamily="34" charset="-127"/>
+                        </a:rPr>
                         <a:t>벽면에서 내려와 평지에 도달 등</a:t>
                       </a:r>
                       <a:r>
-                        <a:rPr lang="en-US" altLang="ko-KR" sz="1600" baseline="0" dirty="0"/>
+                        <a:rPr lang="en-US" altLang="ko-KR" sz="1400" baseline="0" dirty="0">
+                          <a:latin typeface="나눔바른고딕" panose="020B0603020101020101" pitchFamily="34" charset="-127"/>
+                          <a:ea typeface="나눔바른고딕" panose="020B0603020101020101" pitchFamily="34" charset="-127"/>
+                        </a:rPr>
                         <a:t>)</a:t>
                       </a:r>
-                      <a:endParaRPr lang="en-US" altLang="ko-KR" sz="1600" dirty="0"/>
+                      <a:endParaRPr lang="en-US" altLang="ko-KR" sz="1400" dirty="0">
+                        <a:latin typeface="나눔바른고딕" panose="020B0603020101020101" pitchFamily="34" charset="-127"/>
+                        <a:ea typeface="나눔바른고딕" panose="020B0603020101020101" pitchFamily="34" charset="-127"/>
+                      </a:endParaRPr>
                     </a:p>
                   </a:txBody>
-                  <a:tcPr/>
+                  <a:tcPr anchor="ctr"/>
                 </a:tc>
                 <a:extLst>
                   <a:ext uri="{0D108BD9-81ED-4DB2-BD59-A6C34878D82A}">
-                    <a16:rowId xmlns:a16="http://schemas.microsoft.com/office/drawing/2014/main" val="10004"/>
+                    <a16:rowId xmlns:a16="http://schemas.microsoft.com/office/drawing/2014/main" xmlns="" val="10004"/>
                   </a:ext>
                 </a:extLst>
               </a:tr>
@@ -4996,13 +5478,19 @@
                     <a:p>
                       <a:pPr algn="ctr" latinLnBrk="1"/>
                       <a:r>
-                        <a:rPr lang="en-US" altLang="ko-KR" dirty="0"/>
+                        <a:rPr lang="en-US" altLang="ko-KR" dirty="0">
+                          <a:latin typeface="나눔바른고딕" panose="020B0603020101020101" pitchFamily="34" charset="-127"/>
+                          <a:ea typeface="나눔바른고딕" panose="020B0603020101020101" pitchFamily="34" charset="-127"/>
+                        </a:rPr>
                         <a:t>5</a:t>
                       </a:r>
-                      <a:endParaRPr lang="ko-KR" altLang="en-US" dirty="0"/>
+                      <a:endParaRPr lang="ko-KR" altLang="en-US" dirty="0">
+                        <a:latin typeface="나눔바른고딕" panose="020B0603020101020101" pitchFamily="34" charset="-127"/>
+                        <a:ea typeface="나눔바른고딕" panose="020B0603020101020101" pitchFamily="34" charset="-127"/>
+                      </a:endParaRPr>
                     </a:p>
                   </a:txBody>
-                  <a:tcPr/>
+                  <a:tcPr anchor="ctr"/>
                 </a:tc>
                 <a:tc>
                   <a:txBody>
@@ -5011,16 +5499,22 @@
                     <a:p>
                       <a:pPr latinLnBrk="1"/>
                       <a:r>
-                        <a:rPr lang="ko-KR" altLang="en-US" sz="1600" dirty="0" err="1"/>
+                        <a:rPr lang="ko-KR" altLang="en-US" sz="1400" dirty="0" err="1">
+                          <a:latin typeface="나눔바른고딕" panose="020B0603020101020101" pitchFamily="34" charset="-127"/>
+                          <a:ea typeface="나눔바른고딕" panose="020B0603020101020101" pitchFamily="34" charset="-127"/>
+                        </a:rPr>
                         <a:t>파쿠르</a:t>
                       </a:r>
                       <a:r>
-                        <a:rPr lang="ko-KR" altLang="en-US" sz="1600" dirty="0"/>
+                        <a:rPr lang="ko-KR" altLang="en-US" sz="1400" dirty="0">
+                          <a:latin typeface="나눔바른고딕" panose="020B0603020101020101" pitchFamily="34" charset="-127"/>
+                          <a:ea typeface="나눔바른고딕" panose="020B0603020101020101" pitchFamily="34" charset="-127"/>
+                        </a:rPr>
                         <a:t> 시스템 보완</a:t>
                       </a:r>
                     </a:p>
                   </a:txBody>
-                  <a:tcPr/>
+                  <a:tcPr anchor="ctr"/>
                 </a:tc>
                 <a:tc>
                   <a:txBody>
@@ -5029,53 +5523,86 @@
                     <a:p>
                       <a:pPr latinLnBrk="1"/>
                       <a:r>
-                        <a:rPr lang="ko-KR" altLang="en-US" sz="1600" dirty="0"/>
+                        <a:rPr lang="ko-KR" altLang="en-US" sz="1400" dirty="0">
+                          <a:latin typeface="나눔바른고딕" panose="020B0603020101020101" pitchFamily="34" charset="-127"/>
+                          <a:ea typeface="나눔바른고딕" panose="020B0603020101020101" pitchFamily="34" charset="-127"/>
+                        </a:rPr>
                         <a:t>애니메이션 </a:t>
                       </a:r>
                       <a:r>
-                        <a:rPr lang="en-US" altLang="ko-KR" sz="1600" dirty="0"/>
+                        <a:rPr lang="en-US" altLang="ko-KR" sz="1400" dirty="0">
+                          <a:latin typeface="나눔바른고딕" panose="020B0603020101020101" pitchFamily="34" charset="-127"/>
+                          <a:ea typeface="나눔바른고딕" panose="020B0603020101020101" pitchFamily="34" charset="-127"/>
+                        </a:rPr>
                         <a:t>IK </a:t>
                       </a:r>
                       <a:r>
-                        <a:rPr lang="ko-KR" altLang="en-US" sz="1600" dirty="0"/>
+                        <a:rPr lang="ko-KR" altLang="en-US" sz="1400" dirty="0">
+                          <a:latin typeface="나눔바른고딕" panose="020B0603020101020101" pitchFamily="34" charset="-127"/>
+                          <a:ea typeface="나눔바른고딕" panose="020B0603020101020101" pitchFamily="34" charset="-127"/>
+                        </a:rPr>
                         <a:t>적용</a:t>
                       </a:r>
                       <a:r>
-                        <a:rPr lang="en-US" altLang="ko-KR" sz="1600" dirty="0"/>
+                        <a:rPr lang="en-US" altLang="ko-KR" sz="1400" dirty="0">
+                          <a:latin typeface="나눔바른고딕" panose="020B0603020101020101" pitchFamily="34" charset="-127"/>
+                          <a:ea typeface="나눔바른고딕" panose="020B0603020101020101" pitchFamily="34" charset="-127"/>
+                        </a:rPr>
                         <a:t>, </a:t>
                       </a:r>
                       <a:r>
-                        <a:rPr lang="ko-KR" altLang="en-US" sz="1600" dirty="0" err="1"/>
+                        <a:rPr lang="ko-KR" altLang="en-US" sz="1400" dirty="0" err="1">
+                          <a:latin typeface="나눔바른고딕" panose="020B0603020101020101" pitchFamily="34" charset="-127"/>
+                          <a:ea typeface="나눔바른고딕" panose="020B0603020101020101" pitchFamily="34" charset="-127"/>
+                        </a:rPr>
                         <a:t>파쿠르</a:t>
                       </a:r>
                       <a:r>
-                        <a:rPr lang="ko-KR" altLang="en-US" sz="1600" dirty="0"/>
+                        <a:rPr lang="ko-KR" altLang="en-US" sz="1400" dirty="0">
+                          <a:latin typeface="나눔바른고딕" panose="020B0603020101020101" pitchFamily="34" charset="-127"/>
+                          <a:ea typeface="나눔바른고딕" panose="020B0603020101020101" pitchFamily="34" charset="-127"/>
+                        </a:rPr>
                         <a:t> 시</a:t>
                       </a:r>
                       <a:r>
-                        <a:rPr lang="en-US" altLang="ko-KR" sz="1600" dirty="0"/>
+                        <a:rPr lang="en-US" altLang="ko-KR" sz="1400" dirty="0">
+                          <a:latin typeface="나눔바른고딕" panose="020B0603020101020101" pitchFamily="34" charset="-127"/>
+                          <a:ea typeface="나눔바른고딕" panose="020B0603020101020101" pitchFamily="34" charset="-127"/>
+                        </a:rPr>
                         <a:t> </a:t>
                       </a:r>
                       <a:r>
-                        <a:rPr lang="ko-KR" altLang="en-US" sz="1600" dirty="0"/>
+                        <a:rPr lang="ko-KR" altLang="en-US" sz="1400" dirty="0">
+                          <a:latin typeface="나눔바른고딕" panose="020B0603020101020101" pitchFamily="34" charset="-127"/>
+                          <a:ea typeface="나눔바른고딕" panose="020B0603020101020101" pitchFamily="34" charset="-127"/>
+                        </a:rPr>
                         <a:t>캐릭터 손 위치 </a:t>
                       </a:r>
                       <a:r>
-                        <a:rPr lang="en-US" altLang="ko-KR" sz="1600" dirty="0"/>
+                        <a:rPr lang="en-US" altLang="ko-KR" sz="1400" dirty="0">
+                          <a:latin typeface="나눔바른고딕" panose="020B0603020101020101" pitchFamily="34" charset="-127"/>
+                          <a:ea typeface="나눔바른고딕" panose="020B0603020101020101" pitchFamily="34" charset="-127"/>
+                        </a:rPr>
                         <a:t>IK</a:t>
                       </a:r>
                       <a:r>
-                        <a:rPr lang="ko-KR" altLang="en-US" sz="1600" dirty="0"/>
+                        <a:rPr lang="ko-KR" altLang="en-US" sz="1400" dirty="0">
+                          <a:latin typeface="나눔바른고딕" panose="020B0603020101020101" pitchFamily="34" charset="-127"/>
+                          <a:ea typeface="나눔바른고딕" panose="020B0603020101020101" pitchFamily="34" charset="-127"/>
+                        </a:rPr>
                         <a:t>를 통해 보정</a:t>
                       </a:r>
-                      <a:endParaRPr lang="en-US" altLang="ko-KR" sz="1600" dirty="0"/>
+                      <a:endParaRPr lang="en-US" altLang="ko-KR" sz="1400" dirty="0">
+                        <a:latin typeface="나눔바른고딕" panose="020B0603020101020101" pitchFamily="34" charset="-127"/>
+                        <a:ea typeface="나눔바른고딕" panose="020B0603020101020101" pitchFamily="34" charset="-127"/>
+                      </a:endParaRPr>
                     </a:p>
                   </a:txBody>
-                  <a:tcPr/>
+                  <a:tcPr anchor="ctr"/>
                 </a:tc>
                 <a:extLst>
                   <a:ext uri="{0D108BD9-81ED-4DB2-BD59-A6C34878D82A}">
-                    <a16:rowId xmlns:a16="http://schemas.microsoft.com/office/drawing/2014/main" val="10005"/>
+                    <a16:rowId xmlns:a16="http://schemas.microsoft.com/office/drawing/2014/main" xmlns="" val="10005"/>
                   </a:ext>
                 </a:extLst>
               </a:tr>
@@ -5087,13 +5614,19 @@
                     <a:p>
                       <a:pPr algn="ctr" latinLnBrk="1"/>
                       <a:r>
-                        <a:rPr lang="en-US" altLang="ko-KR" dirty="0"/>
+                        <a:rPr lang="en-US" altLang="ko-KR" dirty="0">
+                          <a:latin typeface="나눔바른고딕" panose="020B0603020101020101" pitchFamily="34" charset="-127"/>
+                          <a:ea typeface="나눔바른고딕" panose="020B0603020101020101" pitchFamily="34" charset="-127"/>
+                        </a:rPr>
                         <a:t>6</a:t>
                       </a:r>
-                      <a:endParaRPr lang="ko-KR" altLang="en-US" dirty="0"/>
+                      <a:endParaRPr lang="ko-KR" altLang="en-US" dirty="0">
+                        <a:latin typeface="나눔바른고딕" panose="020B0603020101020101" pitchFamily="34" charset="-127"/>
+                        <a:ea typeface="나눔바른고딕" panose="020B0603020101020101" pitchFamily="34" charset="-127"/>
+                      </a:endParaRPr>
                     </a:p>
                   </a:txBody>
-                  <a:tcPr/>
+                  <a:tcPr anchor="ctr"/>
                 </a:tc>
                 <a:tc>
                   <a:txBody>
@@ -5102,17 +5635,26 @@
                     <a:p>
                       <a:pPr latinLnBrk="1"/>
                       <a:r>
-                        <a:rPr lang="ko-KR" altLang="en-US" sz="1600" dirty="0"/>
+                        <a:rPr lang="ko-KR" altLang="en-US" sz="1400" dirty="0">
+                          <a:latin typeface="나눔바른고딕" panose="020B0603020101020101" pitchFamily="34" charset="-127"/>
+                          <a:ea typeface="나눔바른고딕" panose="020B0603020101020101" pitchFamily="34" charset="-127"/>
+                        </a:rPr>
                         <a:t>복잡한 지형 애니메이션 처리 </a:t>
                       </a:r>
                       <a:r>
-                        <a:rPr lang="en-US" altLang="ko-KR" sz="1600" dirty="0"/>
+                        <a:rPr lang="en-US" altLang="ko-KR" sz="1400" dirty="0">
+                          <a:latin typeface="나눔바른고딕" panose="020B0603020101020101" pitchFamily="34" charset="-127"/>
+                          <a:ea typeface="나눔바른고딕" panose="020B0603020101020101" pitchFamily="34" charset="-127"/>
+                        </a:rPr>
                         <a:t>1</a:t>
                       </a:r>
-                      <a:endParaRPr lang="ko-KR" altLang="en-US" sz="1600" dirty="0"/>
+                      <a:endParaRPr lang="ko-KR" altLang="en-US" sz="1400" dirty="0">
+                        <a:latin typeface="나눔바른고딕" panose="020B0603020101020101" pitchFamily="34" charset="-127"/>
+                        <a:ea typeface="나눔바른고딕" panose="020B0603020101020101" pitchFamily="34" charset="-127"/>
+                      </a:endParaRPr>
                     </a:p>
                   </a:txBody>
-                  <a:tcPr/>
+                  <a:tcPr anchor="ctr"/>
                 </a:tc>
                 <a:tc>
                   <a:txBody>
@@ -5121,44 +5663,78 @@
                     <a:p>
                       <a:pPr latinLnBrk="1"/>
                       <a:r>
-                        <a:rPr lang="ko-KR" altLang="en-US" sz="1600" baseline="0" dirty="0"/>
+                        <a:rPr lang="ko-KR" altLang="en-US" sz="1400" baseline="0" dirty="0">
+                          <a:latin typeface="나눔바른고딕" panose="020B0603020101020101" pitchFamily="34" charset="-127"/>
+                          <a:ea typeface="나눔바른고딕" panose="020B0603020101020101" pitchFamily="34" charset="-127"/>
+                        </a:rPr>
                         <a:t>벽면 중간에 지붕</a:t>
                       </a:r>
                       <a:r>
-                        <a:rPr lang="en-US" altLang="ko-KR" sz="1600" baseline="0" dirty="0"/>
+                        <a:rPr lang="en-US" altLang="ko-KR" sz="1400" baseline="0" dirty="0">
+                          <a:latin typeface="나눔바른고딕" panose="020B0603020101020101" pitchFamily="34" charset="-127"/>
+                          <a:ea typeface="나눔바른고딕" panose="020B0603020101020101" pitchFamily="34" charset="-127"/>
+                        </a:rPr>
                         <a:t>, </a:t>
                       </a:r>
                       <a:r>
-                        <a:rPr lang="ko-KR" altLang="en-US" sz="1600" baseline="0" dirty="0"/>
+                        <a:rPr lang="ko-KR" altLang="en-US" sz="1400" baseline="0" dirty="0">
+                          <a:latin typeface="나눔바른고딕" panose="020B0603020101020101" pitchFamily="34" charset="-127"/>
+                          <a:ea typeface="나눔바른고딕" panose="020B0603020101020101" pitchFamily="34" charset="-127"/>
+                        </a:rPr>
                         <a:t>경사로</a:t>
                       </a:r>
                       <a:r>
-                        <a:rPr lang="en-US" altLang="ko-KR" sz="1600" baseline="0" dirty="0"/>
+                        <a:rPr lang="en-US" altLang="ko-KR" sz="1400" baseline="0" dirty="0">
+                          <a:latin typeface="나눔바른고딕" panose="020B0603020101020101" pitchFamily="34" charset="-127"/>
+                          <a:ea typeface="나눔바른고딕" panose="020B0603020101020101" pitchFamily="34" charset="-127"/>
+                        </a:rPr>
                         <a:t>, </a:t>
                       </a:r>
                       <a:r>
-                        <a:rPr lang="ko-KR" altLang="en-US" sz="1600" baseline="0" dirty="0"/>
+                        <a:rPr lang="ko-KR" altLang="en-US" sz="1400" baseline="0" dirty="0">
+                          <a:latin typeface="나눔바른고딕" panose="020B0603020101020101" pitchFamily="34" charset="-127"/>
+                          <a:ea typeface="나눔바른고딕" panose="020B0603020101020101" pitchFamily="34" charset="-127"/>
+                        </a:rPr>
                         <a:t>철봉 나열된 환경</a:t>
                       </a:r>
+                      <a:r>
+                        <a:rPr lang="en-US" altLang="ko-KR" sz="1400" baseline="0" dirty="0">
+                          <a:latin typeface="나눔바른고딕" panose="020B0603020101020101" pitchFamily="34" charset="-127"/>
+                          <a:ea typeface="나눔바른고딕" panose="020B0603020101020101" pitchFamily="34" charset="-127"/>
+                        </a:rPr>
+                        <a:t/>
+                      </a:r>
                       <a:br>
-                        <a:rPr lang="en-US" altLang="ko-KR" sz="1600" baseline="0" dirty="0"/>
+                        <a:rPr lang="en-US" altLang="ko-KR" sz="1400" baseline="0" dirty="0">
+                          <a:latin typeface="나눔바른고딕" panose="020B0603020101020101" pitchFamily="34" charset="-127"/>
+                          <a:ea typeface="나눔바른고딕" panose="020B0603020101020101" pitchFamily="34" charset="-127"/>
+                        </a:rPr>
                       </a:br>
                       <a:r>
-                        <a:rPr lang="ko-KR" altLang="en-US" sz="1600" baseline="0" dirty="0" err="1"/>
+                        <a:rPr lang="ko-KR" altLang="en-US" sz="1400" baseline="0" dirty="0" err="1">
+                          <a:latin typeface="나눔바른고딕" panose="020B0603020101020101" pitchFamily="34" charset="-127"/>
+                          <a:ea typeface="나눔바른고딕" panose="020B0603020101020101" pitchFamily="34" charset="-127"/>
+                        </a:rPr>
                         <a:t>파쿠르</a:t>
                       </a:r>
                       <a:r>
-                        <a:rPr lang="ko-KR" altLang="en-US" sz="1600" baseline="0" dirty="0"/>
+                        <a:rPr lang="ko-KR" altLang="en-US" sz="1400" baseline="0" dirty="0">
+                          <a:latin typeface="나눔바른고딕" panose="020B0603020101020101" pitchFamily="34" charset="-127"/>
+                          <a:ea typeface="나눔바른고딕" panose="020B0603020101020101" pitchFamily="34" charset="-127"/>
+                        </a:rPr>
                         <a:t> 애니메이션 처리</a:t>
                       </a:r>
-                      <a:endParaRPr lang="ko-KR" altLang="en-US" sz="1600" dirty="0"/>
+                      <a:endParaRPr lang="ko-KR" altLang="en-US" sz="1400" dirty="0">
+                        <a:latin typeface="나눔바른고딕" panose="020B0603020101020101" pitchFamily="34" charset="-127"/>
+                        <a:ea typeface="나눔바른고딕" panose="020B0603020101020101" pitchFamily="34" charset="-127"/>
+                      </a:endParaRPr>
                     </a:p>
                   </a:txBody>
-                  <a:tcPr/>
+                  <a:tcPr anchor="ctr"/>
                 </a:tc>
                 <a:extLst>
                   <a:ext uri="{0D108BD9-81ED-4DB2-BD59-A6C34878D82A}">
-                    <a16:rowId xmlns:a16="http://schemas.microsoft.com/office/drawing/2014/main" val="10006"/>
+                    <a16:rowId xmlns:a16="http://schemas.microsoft.com/office/drawing/2014/main" xmlns="" val="10006"/>
                   </a:ext>
                 </a:extLst>
               </a:tr>
@@ -5170,13 +5746,19 @@
                     <a:p>
                       <a:pPr algn="ctr" latinLnBrk="1"/>
                       <a:r>
-                        <a:rPr lang="en-US" altLang="ko-KR" dirty="0"/>
+                        <a:rPr lang="en-US" altLang="ko-KR" dirty="0">
+                          <a:latin typeface="나눔바른고딕" panose="020B0603020101020101" pitchFamily="34" charset="-127"/>
+                          <a:ea typeface="나눔바른고딕" panose="020B0603020101020101" pitchFamily="34" charset="-127"/>
+                        </a:rPr>
                         <a:t>7</a:t>
                       </a:r>
-                      <a:endParaRPr lang="ko-KR" altLang="en-US" dirty="0"/>
+                      <a:endParaRPr lang="ko-KR" altLang="en-US" dirty="0">
+                        <a:latin typeface="나눔바른고딕" panose="020B0603020101020101" pitchFamily="34" charset="-127"/>
+                        <a:ea typeface="나눔바른고딕" panose="020B0603020101020101" pitchFamily="34" charset="-127"/>
+                      </a:endParaRPr>
                     </a:p>
                   </a:txBody>
-                  <a:tcPr/>
+                  <a:tcPr anchor="ctr"/>
                 </a:tc>
                 <a:tc>
                   <a:txBody>
@@ -5201,21 +5783,33 @@
                         <a:defRPr/>
                       </a:pPr>
                       <a:r>
-                        <a:rPr lang="ko-KR" altLang="en-US" sz="1600" dirty="0"/>
+                        <a:rPr lang="ko-KR" altLang="en-US" sz="1400" dirty="0">
+                          <a:latin typeface="나눔바른고딕" panose="020B0603020101020101" pitchFamily="34" charset="-127"/>
+                          <a:ea typeface="나눔바른고딕" panose="020B0603020101020101" pitchFamily="34" charset="-127"/>
+                        </a:rPr>
                         <a:t>복잡한 지형 애니메이션 처리 </a:t>
                       </a:r>
                       <a:r>
-                        <a:rPr lang="en-US" altLang="ko-KR" sz="1600" dirty="0"/>
+                        <a:rPr lang="en-US" altLang="ko-KR" sz="1400" dirty="0">
+                          <a:latin typeface="나눔바른고딕" panose="020B0603020101020101" pitchFamily="34" charset="-127"/>
+                          <a:ea typeface="나눔바른고딕" panose="020B0603020101020101" pitchFamily="34" charset="-127"/>
+                        </a:rPr>
                         <a:t>2</a:t>
                       </a:r>
-                      <a:endParaRPr lang="ko-KR" altLang="en-US" sz="1600" dirty="0"/>
+                      <a:endParaRPr lang="ko-KR" altLang="en-US" sz="1400" dirty="0">
+                        <a:latin typeface="나눔바른고딕" panose="020B0603020101020101" pitchFamily="34" charset="-127"/>
+                        <a:ea typeface="나눔바른고딕" panose="020B0603020101020101" pitchFamily="34" charset="-127"/>
+                      </a:endParaRPr>
                     </a:p>
                     <a:p>
                       <a:pPr latinLnBrk="1"/>
-                      <a:endParaRPr lang="ko-KR" altLang="en-US" sz="1600" dirty="0"/>
+                      <a:endParaRPr lang="ko-KR" altLang="en-US" sz="1400" dirty="0">
+                        <a:latin typeface="나눔바른고딕" panose="020B0603020101020101" pitchFamily="34" charset="-127"/>
+                        <a:ea typeface="나눔바른고딕" panose="020B0603020101020101" pitchFamily="34" charset="-127"/>
+                      </a:endParaRPr>
                     </a:p>
                   </a:txBody>
-                  <a:tcPr/>
+                  <a:tcPr anchor="ctr"/>
                 </a:tc>
                 <a:tc>
                   <a:txBody>
@@ -5224,37 +5818,58 @@
                     <a:p>
                       <a:pPr latinLnBrk="1"/>
                       <a:r>
-                        <a:rPr lang="ko-KR" altLang="en-US" sz="1600" dirty="0"/>
+                        <a:rPr lang="ko-KR" altLang="en-US" sz="1400" dirty="0">
+                          <a:latin typeface="나눔바른고딕" panose="020B0603020101020101" pitchFamily="34" charset="-127"/>
+                          <a:ea typeface="나눔바른고딕" panose="020B0603020101020101" pitchFamily="34" charset="-127"/>
+                        </a:rPr>
                         <a:t>직각으로 만나는 벽면 간 이동 처리</a:t>
                       </a:r>
                       <a:r>
-                        <a:rPr lang="en-US" altLang="ko-KR" sz="1600" dirty="0"/>
+                        <a:rPr lang="en-US" altLang="ko-KR" sz="1400" dirty="0">
+                          <a:latin typeface="나눔바른고딕" panose="020B0603020101020101" pitchFamily="34" charset="-127"/>
+                          <a:ea typeface="나눔바른고딕" panose="020B0603020101020101" pitchFamily="34" charset="-127"/>
+                        </a:rPr>
                         <a:t>, </a:t>
                       </a:r>
                       <a:r>
-                        <a:rPr lang="ko-KR" altLang="en-US" sz="1600" dirty="0"/>
+                        <a:rPr lang="ko-KR" altLang="en-US" sz="1400" dirty="0">
+                          <a:latin typeface="나눔바른고딕" panose="020B0603020101020101" pitchFamily="34" charset="-127"/>
+                          <a:ea typeface="나눔바른고딕" panose="020B0603020101020101" pitchFamily="34" charset="-127"/>
+                        </a:rPr>
                         <a:t>벽면에 뻗어 나온 줄 또는 기둥</a:t>
                       </a:r>
                       <a:r>
-                        <a:rPr lang="ko-KR" altLang="en-US" sz="1600" baseline="0" dirty="0"/>
+                        <a:rPr lang="ko-KR" altLang="en-US" sz="1400" baseline="0" dirty="0">
+                          <a:latin typeface="나눔바른고딕" panose="020B0603020101020101" pitchFamily="34" charset="-127"/>
+                          <a:ea typeface="나눔바른고딕" panose="020B0603020101020101" pitchFamily="34" charset="-127"/>
+                        </a:rPr>
                         <a:t> 환경 </a:t>
                       </a:r>
                       <a:r>
-                        <a:rPr lang="ko-KR" altLang="en-US" sz="1600" baseline="0" dirty="0" err="1"/>
+                        <a:rPr lang="ko-KR" altLang="en-US" sz="1400" baseline="0" dirty="0" err="1">
+                          <a:latin typeface="나눔바른고딕" panose="020B0603020101020101" pitchFamily="34" charset="-127"/>
+                          <a:ea typeface="나눔바른고딕" panose="020B0603020101020101" pitchFamily="34" charset="-127"/>
+                        </a:rPr>
                         <a:t>파쿠르</a:t>
                       </a:r>
                       <a:r>
-                        <a:rPr lang="ko-KR" altLang="en-US" sz="1600" baseline="0" dirty="0"/>
+                        <a:rPr lang="ko-KR" altLang="en-US" sz="1400" baseline="0" dirty="0">
+                          <a:latin typeface="나눔바른고딕" panose="020B0603020101020101" pitchFamily="34" charset="-127"/>
+                          <a:ea typeface="나눔바른고딕" panose="020B0603020101020101" pitchFamily="34" charset="-127"/>
+                        </a:rPr>
                         <a:t> 애니메이션 처리</a:t>
                       </a:r>
-                      <a:endParaRPr lang="ko-KR" altLang="en-US" sz="1600" dirty="0"/>
+                      <a:endParaRPr lang="ko-KR" altLang="en-US" sz="1400" dirty="0">
+                        <a:latin typeface="나눔바른고딕" panose="020B0603020101020101" pitchFamily="34" charset="-127"/>
+                        <a:ea typeface="나눔바른고딕" panose="020B0603020101020101" pitchFamily="34" charset="-127"/>
+                      </a:endParaRPr>
                     </a:p>
                   </a:txBody>
-                  <a:tcPr/>
+                  <a:tcPr anchor="ctr"/>
                 </a:tc>
                 <a:extLst>
                   <a:ext uri="{0D108BD9-81ED-4DB2-BD59-A6C34878D82A}">
-                    <a16:rowId xmlns:a16="http://schemas.microsoft.com/office/drawing/2014/main" val="10007"/>
+                    <a16:rowId xmlns:a16="http://schemas.microsoft.com/office/drawing/2014/main" xmlns="" val="10007"/>
                   </a:ext>
                 </a:extLst>
               </a:tr>
@@ -5266,13 +5881,19 @@
                     <a:p>
                       <a:pPr algn="ctr" latinLnBrk="1"/>
                       <a:r>
-                        <a:rPr lang="en-US" altLang="ko-KR" dirty="0"/>
+                        <a:rPr lang="en-US" altLang="ko-KR" dirty="0">
+                          <a:latin typeface="나눔바른고딕" panose="020B0603020101020101" pitchFamily="34" charset="-127"/>
+                          <a:ea typeface="나눔바른고딕" panose="020B0603020101020101" pitchFamily="34" charset="-127"/>
+                        </a:rPr>
                         <a:t>8</a:t>
                       </a:r>
-                      <a:endParaRPr lang="ko-KR" altLang="en-US" dirty="0"/>
+                      <a:endParaRPr lang="ko-KR" altLang="en-US" dirty="0">
+                        <a:latin typeface="나눔바른고딕" panose="020B0603020101020101" pitchFamily="34" charset="-127"/>
+                        <a:ea typeface="나눔바른고딕" panose="020B0603020101020101" pitchFamily="34" charset="-127"/>
+                      </a:endParaRPr>
                     </a:p>
                   </a:txBody>
-                  <a:tcPr/>
+                  <a:tcPr anchor="ctr"/>
                 </a:tc>
                 <a:tc>
                   <a:txBody>
@@ -5281,12 +5902,15 @@
                     <a:p>
                       <a:pPr latinLnBrk="1"/>
                       <a:r>
-                        <a:rPr lang="ko-KR" altLang="en-US" sz="1600" dirty="0"/>
+                        <a:rPr lang="ko-KR" altLang="en-US" sz="1400" dirty="0">
+                          <a:latin typeface="나눔바른고딕" panose="020B0603020101020101" pitchFamily="34" charset="-127"/>
+                          <a:ea typeface="나눔바른고딕" panose="020B0603020101020101" pitchFamily="34" charset="-127"/>
+                        </a:rPr>
                         <a:t>마무리 및 보완</a:t>
                       </a:r>
                     </a:p>
                   </a:txBody>
-                  <a:tcPr/>
+                  <a:tcPr anchor="ctr"/>
                 </a:tc>
                 <a:tc>
                   <a:txBody>
@@ -5295,16 +5919,19 @@
                     <a:p>
                       <a:pPr latinLnBrk="1"/>
                       <a:r>
-                        <a:rPr lang="ko-KR" altLang="en-US" sz="1600" dirty="0"/>
+                        <a:rPr lang="ko-KR" altLang="en-US" sz="1400" dirty="0">
+                          <a:latin typeface="나눔바른고딕" panose="020B0603020101020101" pitchFamily="34" charset="-127"/>
+                          <a:ea typeface="나눔바른고딕" panose="020B0603020101020101" pitchFamily="34" charset="-127"/>
+                        </a:rPr>
                         <a:t>미흡사항 보완</a:t>
                       </a:r>
                     </a:p>
                   </a:txBody>
-                  <a:tcPr/>
+                  <a:tcPr anchor="ctr"/>
                 </a:tc>
                 <a:extLst>
                   <a:ext uri="{0D108BD9-81ED-4DB2-BD59-A6C34878D82A}">
-                    <a16:rowId xmlns:a16="http://schemas.microsoft.com/office/drawing/2014/main" val="10008"/>
+                    <a16:rowId xmlns:a16="http://schemas.microsoft.com/office/drawing/2014/main" xmlns="" val="10008"/>
                   </a:ext>
                 </a:extLst>
               </a:tr>
